--- a/demo/presentation.pptx
+++ b/demo/presentation.pptx
@@ -2,22 +2,24 @@
 <file path=ppt/presentation.xml><?xml version="1.0" encoding="utf-8"?>
 <p:presentation xmlns:p="http://schemas.openxmlformats.org/presentationml/2006/main">
   <p:sldMasterIdLst>
-    <p:sldMasterId xmlns:r="http://schemas.openxmlformats.org/officeDocument/2006/relationships" id="2147483648" r:id="R4958c7b631e54528"/>
+    <p:sldMasterId xmlns:r="http://schemas.openxmlformats.org/officeDocument/2006/relationships" id="2147483648" r:id="R36ac456df21c4542"/>
   </p:sldMasterIdLst>
   <p:notesMasterIdLst>
-    <p:notesMasterId xmlns:r="http://schemas.openxmlformats.org/officeDocument/2006/relationships" r:id="Reb1b2cb9989d4bb3"/>
+    <p:notesMasterId xmlns:r="http://schemas.openxmlformats.org/officeDocument/2006/relationships" r:id="Ra5e7a5eaa1144206"/>
   </p:notesMasterIdLst>
   <p:sldIdLst>
-    <p:sldId xmlns:r="http://schemas.openxmlformats.org/officeDocument/2006/relationships" id="256" r:id="R54d8d20d29704449"/>
-    <p:sldId xmlns:r="http://schemas.openxmlformats.org/officeDocument/2006/relationships" id="257" r:id="R91be42338c994d14"/>
-    <p:sldId xmlns:r="http://schemas.openxmlformats.org/officeDocument/2006/relationships" id="258" r:id="R9d231852f92c49a1"/>
-    <p:sldId xmlns:r="http://schemas.openxmlformats.org/officeDocument/2006/relationships" id="259" r:id="R63315c6e7ab54cc7"/>
-    <p:sldId xmlns:r="http://schemas.openxmlformats.org/officeDocument/2006/relationships" id="260" r:id="Ra07bc39fd28d44ea"/>
-    <p:sldId xmlns:r="http://schemas.openxmlformats.org/officeDocument/2006/relationships" id="261" r:id="R8f0d6e00d933401d"/>
-    <p:sldId xmlns:r="http://schemas.openxmlformats.org/officeDocument/2006/relationships" id="262" r:id="Ra709c86b8fdb4a8e"/>
-    <p:sldId xmlns:r="http://schemas.openxmlformats.org/officeDocument/2006/relationships" id="263" r:id="Ra8993245cde349db"/>
-    <p:sldId xmlns:r="http://schemas.openxmlformats.org/officeDocument/2006/relationships" id="264" r:id="R7229f37d7e784c22"/>
-    <p:sldId xmlns:r="http://schemas.openxmlformats.org/officeDocument/2006/relationships" id="265" r:id="Rccdd0abd8dcb4066"/>
+    <p:sldId xmlns:r="http://schemas.openxmlformats.org/officeDocument/2006/relationships" id="256" r:id="Rb63c4b926a9d4b92"/>
+    <p:sldId xmlns:r="http://schemas.openxmlformats.org/officeDocument/2006/relationships" id="257" r:id="Rf40f9d5bba654d62"/>
+    <p:sldId xmlns:r="http://schemas.openxmlformats.org/officeDocument/2006/relationships" id="258" r:id="Rfaaf7380fcea4838"/>
+    <p:sldId xmlns:r="http://schemas.openxmlformats.org/officeDocument/2006/relationships" id="259" r:id="R698e9bd9bad946c8"/>
+    <p:sldId xmlns:r="http://schemas.openxmlformats.org/officeDocument/2006/relationships" id="260" r:id="R59dd9f02f8214de2"/>
+    <p:sldId xmlns:r="http://schemas.openxmlformats.org/officeDocument/2006/relationships" id="261" r:id="Rc237e1c29eab4fa7"/>
+    <p:sldId xmlns:r="http://schemas.openxmlformats.org/officeDocument/2006/relationships" id="262" r:id="R270846edc4154291"/>
+    <p:sldId xmlns:r="http://schemas.openxmlformats.org/officeDocument/2006/relationships" id="263" r:id="R7b638dca727241dd"/>
+    <p:sldId xmlns:r="http://schemas.openxmlformats.org/officeDocument/2006/relationships" id="264" r:id="R189706fc90fd48cb"/>
+    <p:sldId xmlns:r="http://schemas.openxmlformats.org/officeDocument/2006/relationships" id="265" r:id="R578205abcd8c49eb"/>
+    <p:sldId xmlns:r="http://schemas.openxmlformats.org/officeDocument/2006/relationships" id="266" r:id="R1ec75357b8084127"/>
+    <p:sldId xmlns:r="http://schemas.openxmlformats.org/officeDocument/2006/relationships" id="267" r:id="Rb29bcd9d7a604491"/>
   </p:sldIdLst>
   <p:sldSz cx="12192000" cy="6858000"/>
   <p:notesSz cx="6858000" cy="9144000"/>
@@ -451,12 +453,12 @@
           <a:lstStyle xmlns:a="http://schemas.openxmlformats.org/drawingml/2006/main"/>
           <a:p xmlns:a="http://schemas.openxmlformats.org/drawingml/2006/main">
             <a:r>
-              <a:t>A classroom application for reserving one-hour study-room slots. The project uses only disposable demo bookings. Source: https://github.com/archit0k/Devops-HW/tree/main/project</a:t>
-            </a:r>
-          </a:p>
-          <a:p xmlns:a="http://schemas.openxmlformats.org/drawingml/2006/main">
-            <a:r>
-              <a:t>Requirements: https://github.com/Nency-Ravaliya/devsecops-python/blob/main/GRADING.md</a:t>
+              <a:t>Hi, I'm Archit Kulkarni, roll number 24BCS10194, Section A. This is StudySlot, a study-room booking app. I'll explain the setup briefly, then show the code, deployment and monitoring.</a:t>
+            </a:r>
+          </a:p>
+          <a:p xmlns:a="http://schemas.openxmlformats.org/drawingml/2006/main">
+            <a:r>
+              <a:t>https://github.com/archit0k/Devops-HW/tree/main/project</a:t>
             </a:r>
           </a:p>
         </p:txBody>
@@ -526,12 +528,207 @@
           <a:lstStyle xmlns:a="http://schemas.openxmlformats.org/drawingml/2006/main"/>
           <a:p xmlns:a="http://schemas.openxmlformats.org/drawingml/2006/main">
             <a:r>
-              <a:t>Source: https://github.com/archit0k/Devops-HW/tree/main/project</a:t>
-            </a:r>
-          </a:p>
-          <a:p xmlns:a="http://schemas.openxmlformats.org/drawingml/2006/main">
-            <a:r>
-              <a:t>Requirements: https://github.com/Nency-Ravaliya/devsecops-python/blob/main/GRADING.md</a:t>
+              <a:t>FastAPI exposes application request counters and latency histograms. The ServiceMonitor selects backend Pods. All application scrape targets must be UP with no scrape errors. The HPA allows two to four replicas. Metrics Server separately supplies CPU readings for the HPA.</a:t>
+            </a:r>
+          </a:p>
+          <a:p xmlns:a="http://schemas.openxmlformats.org/drawingml/2006/main">
+            <a:r>
+              <a:t>Project source: https://github.com/archit0k/Devops-HW/tree/main/project</a:t>
+            </a:r>
+          </a:p>
+          <a:p xmlns:a="http://schemas.openxmlformats.org/drawingml/2006/main">
+            <a:r>
+              <a:t>Rubric: https://github.com/Nency-Ravaliya/devsecops-python/blob/main/GRADING.md</a:t>
+            </a:r>
+          </a:p>
+          <a:p xmlns:a="http://schemas.openxmlformats.org/drawingml/2006/main">
+            <a:r>
+              <a:t>Screenshot: C:\Users\archi\Github Projects\Devops-HW\project\evidence\rehearsal-20261016\prometheus-targets.jpg</a:t>
+            </a:r>
+          </a:p>
+          <a:p xmlns:a="http://schemas.openxmlformats.org/drawingml/2006/main">
+            <a:r>
+              <a:t>Captured evidence is dated. It does not imply an always-on cloud service.</a:t>
+            </a:r>
+          </a:p>
+        </p:txBody>
+      </p:sp>
+      <p:sp>
+        <p:nvSpPr>
+          <p:cNvPr id="4" name="Slide Number Placeholder 3"/>
+          <p:cNvSpPr>
+            <a:spLocks xmlns:a="http://schemas.openxmlformats.org/drawingml/2006/main" noGrp="1"/>
+          </p:cNvSpPr>
+          <p:nvPr>
+            <p:ph type="sldNum" idx="5"/>
+          </p:nvPr>
+        </p:nvSpPr>
+        <p:spPr/>
+        <p:txBody>
+          <a:bodyPr xmlns:a="http://schemas.openxmlformats.org/drawingml/2006/main"/>
+          <a:lstStyle xmlns:a="http://schemas.openxmlformats.org/drawingml/2006/main"/>
+          <a:p xmlns:a="http://schemas.openxmlformats.org/drawingml/2006/main"/>
+        </p:txBody>
+      </p:sp>
+    </p:spTree>
+  </p:cSld>
+  <p:clrMapOvr>
+    <a:masterClrMapping xmlns:a="http://schemas.openxmlformats.org/drawingml/2006/main"/>
+  </p:clrMapOvr>
+</p:notes>
+</file>
+
+<file path=ppt/notesSlides/notesSlide11.xml><?xml version="1.0" encoding="utf-8"?>
+<p:notes xmlns:p="http://schemas.openxmlformats.org/presentationml/2006/main">
+  <p:cSld>
+    <p:spTree>
+      <p:nvGrpSpPr>
+        <p:cNvPr id="1" name=""/>
+        <p:cNvGrpSpPr/>
+        <p:nvPr/>
+      </p:nvGrpSpPr>
+      <p:grpSpPr>
+        <a:xfrm xmlns:a="http://schemas.openxmlformats.org/drawingml/2006/main"/>
+      </p:grpSpPr>
+      <p:sp>
+        <p:nvSpPr>
+          <p:cNvPr id="2" name="Slide Image Placeholder 1"/>
+          <p:cNvSpPr>
+            <a:spLocks xmlns:a="http://schemas.openxmlformats.org/drawingml/2006/main" noGrp="1"/>
+          </p:cNvSpPr>
+          <p:nvPr>
+            <p:ph type="sldImg" idx="0"/>
+          </p:nvPr>
+        </p:nvSpPr>
+        <p:spPr/>
+      </p:sp>
+      <p:sp>
+        <p:nvSpPr>
+          <p:cNvPr id="3" name="Notes Placeholder 2"/>
+          <p:cNvSpPr>
+            <a:spLocks xmlns:a="http://schemas.openxmlformats.org/drawingml/2006/main" noGrp="1"/>
+          </p:cNvSpPr>
+          <p:nvPr>
+            <p:ph type="body" idx="1"/>
+          </p:nvPr>
+        </p:nvSpPr>
+        <p:spPr/>
+        <p:txBody>
+          <a:bodyPr xmlns:a="http://schemas.openxmlformats.org/drawingml/2006/main"/>
+          <a:lstStyle xmlns:a="http://schemas.openxmlformats.org/drawingml/2006/main"/>
+          <a:p xmlns:a="http://schemas.openxmlformats.org/drawingml/2006/main">
+            <a:r>
+              <a:t>The dashboard queries live Prometheus data: target health, HTTP requests/rate, backend replicas, CPU, p95 latency and errors. Real traffic populates the panels. A zero error rate is a valid measurement. Authentication remains enabled for this private local UI.</a:t>
+            </a:r>
+          </a:p>
+          <a:p xmlns:a="http://schemas.openxmlformats.org/drawingml/2006/main">
+            <a:r>
+              <a:t>Project source: https://github.com/archit0k/Devops-HW/tree/main/project</a:t>
+            </a:r>
+          </a:p>
+          <a:p xmlns:a="http://schemas.openxmlformats.org/drawingml/2006/main">
+            <a:r>
+              <a:t>Rubric: https://github.com/Nency-Ravaliya/devsecops-python/blob/main/GRADING.md</a:t>
+            </a:r>
+          </a:p>
+          <a:p xmlns:a="http://schemas.openxmlformats.org/drawingml/2006/main">
+            <a:r>
+              <a:t>Screenshot: C:\Users\archi\Github Projects\Devops-HW\project\evidence\rehearsal-20261016\grafana-live.jpg</a:t>
+            </a:r>
+          </a:p>
+          <a:p xmlns:a="http://schemas.openxmlformats.org/drawingml/2006/main">
+            <a:r>
+              <a:t>Captured evidence is dated. It does not imply an always-on cloud service.</a:t>
+            </a:r>
+          </a:p>
+        </p:txBody>
+      </p:sp>
+      <p:sp>
+        <p:nvSpPr>
+          <p:cNvPr id="4" name="Slide Number Placeholder 3"/>
+          <p:cNvSpPr>
+            <a:spLocks xmlns:a="http://schemas.openxmlformats.org/drawingml/2006/main" noGrp="1"/>
+          </p:cNvSpPr>
+          <p:nvPr>
+            <p:ph type="sldNum" idx="5"/>
+          </p:nvPr>
+        </p:nvSpPr>
+        <p:spPr/>
+        <p:txBody>
+          <a:bodyPr xmlns:a="http://schemas.openxmlformats.org/drawingml/2006/main"/>
+          <a:lstStyle xmlns:a="http://schemas.openxmlformats.org/drawingml/2006/main"/>
+          <a:p xmlns:a="http://schemas.openxmlformats.org/drawingml/2006/main"/>
+        </p:txBody>
+      </p:sp>
+    </p:spTree>
+  </p:cSld>
+  <p:clrMapOvr>
+    <a:masterClrMapping xmlns:a="http://schemas.openxmlformats.org/drawingml/2006/main"/>
+  </p:clrMapOvr>
+</p:notes>
+</file>
+
+<file path=ppt/notesSlides/notesSlide12.xml><?xml version="1.0" encoding="utf-8"?>
+<p:notes xmlns:p="http://schemas.openxmlformats.org/presentationml/2006/main">
+  <p:cSld>
+    <p:spTree>
+      <p:nvGrpSpPr>
+        <p:cNvPr id="1" name=""/>
+        <p:cNvGrpSpPr/>
+        <p:nvPr/>
+      </p:nvGrpSpPr>
+      <p:grpSpPr>
+        <a:xfrm xmlns:a="http://schemas.openxmlformats.org/drawingml/2006/main"/>
+      </p:grpSpPr>
+      <p:sp>
+        <p:nvSpPr>
+          <p:cNvPr id="2" name="Slide Image Placeholder 1"/>
+          <p:cNvSpPr>
+            <a:spLocks xmlns:a="http://schemas.openxmlformats.org/drawingml/2006/main" noGrp="1"/>
+          </p:cNvSpPr>
+          <p:nvPr>
+            <p:ph type="sldImg" idx="0"/>
+          </p:nvPr>
+        </p:nvSpPr>
+        <p:spPr/>
+      </p:sp>
+      <p:sp>
+        <p:nvSpPr>
+          <p:cNvPr id="3" name="Notes Placeholder 2"/>
+          <p:cNvSpPr>
+            <a:spLocks xmlns:a="http://schemas.openxmlformats.org/drawingml/2006/main" noGrp="1"/>
+          </p:cNvSpPr>
+          <p:nvPr>
+            <p:ph type="body" idx="1"/>
+          </p:nvPr>
+        </p:nvSpPr>
+        <p:spPr/>
+        <p:txBody>
+          <a:bodyPr xmlns:a="http://schemas.openxmlformats.org/drawingml/2006/main"/>
+          <a:lstStyle xmlns:a="http://schemas.openxmlformats.org/drawingml/2006/main"/>
+          <a:p xmlns:a="http://schemas.openxmlformats.org/drawingml/2006/main">
+            <a:r>
+              <a:t>Database constraints prevent booking races. Least-privilege deployment access needs an explicit Role for the custom ServiceMonitor resource. A Ready Pod does not prove routing and monitoring, so verify real HTTP requests. The temporary AWS lab is destroyed after recording. The classroom app still lacks authentication, TLS, automated backups and a highly available database.</a:t>
+            </a:r>
+          </a:p>
+          <a:p xmlns:a="http://schemas.openxmlformats.org/drawingml/2006/main">
+            <a:r>
+              <a:t>Project source: https://github.com/archit0k/Devops-HW/tree/main/project</a:t>
+            </a:r>
+          </a:p>
+          <a:p xmlns:a="http://schemas.openxmlformats.org/drawingml/2006/main">
+            <a:r>
+              <a:t>Rubric: https://github.com/Nency-Ravaliya/devsecops-python/blob/main/GRADING.md</a:t>
+            </a:r>
+          </a:p>
+          <a:p xmlns:a="http://schemas.openxmlformats.org/drawingml/2006/main">
+            <a:r>
+              <a:t>Screenshot: C:\Users\archi\Github Projects\Devops-HW\project\evidence\cloud-cleanup-output.jpg</a:t>
+            </a:r>
+          </a:p>
+          <a:p xmlns:a="http://schemas.openxmlformats.org/drawingml/2006/main">
+            <a:r>
+              <a:t>Captured evidence is dated. It does not imply an always-on cloud service.</a:t>
             </a:r>
           </a:p>
         </p:txBody>
@@ -601,12 +798,27 @@
           <a:lstStyle xmlns:a="http://schemas.openxmlformats.org/drawingml/2006/main"/>
           <a:p xmlns:a="http://schemas.openxmlformats.org/drawingml/2006/main">
             <a:r>
-              <a:t>Source: https://github.com/archit0k/Devops-HW/tree/main/project</a:t>
-            </a:r>
-          </a:p>
-          <a:p xmlns:a="http://schemas.openxmlformats.org/drawingml/2006/main">
-            <a:r>
-              <a:t>Requirements: https://github.com/Nency-Ravaliya/devsecops-python/blob/main/GRADING.md</a:t>
+              <a:t>A student reserves one room for one hour, changes the booking or cancels it. Capacity and duplicate-slot validation give the app a concrete rule to test. Demo data only.</a:t>
+            </a:r>
+          </a:p>
+          <a:p xmlns:a="http://schemas.openxmlformats.org/drawingml/2006/main">
+            <a:r>
+              <a:t>Project source: https://github.com/archit0k/Devops-HW/tree/main/project</a:t>
+            </a:r>
+          </a:p>
+          <a:p xmlns:a="http://schemas.openxmlformats.org/drawingml/2006/main">
+            <a:r>
+              <a:t>Rubric: https://github.com/Nency-Ravaliya/devsecops-python/blob/main/GRADING.md</a:t>
+            </a:r>
+          </a:p>
+          <a:p xmlns:a="http://schemas.openxmlformats.org/drawingml/2006/main">
+            <a:r>
+              <a:t>Screenshot: C:\Users\archi\Github Projects\Devops-HW\project\evidence\rehearsal-20261016\desktop-browser.jpg</a:t>
+            </a:r>
+          </a:p>
+          <a:p xmlns:a="http://schemas.openxmlformats.org/drawingml/2006/main">
+            <a:r>
+              <a:t>Captured evidence is dated. It does not imply an always-on cloud service.</a:t>
             </a:r>
           </a:p>
         </p:txBody>
@@ -676,12 +888,17 @@
           <a:lstStyle xmlns:a="http://schemas.openxmlformats.org/drawingml/2006/main"/>
           <a:p xmlns:a="http://schemas.openxmlformats.org/drawingml/2006/main">
             <a:r>
-              <a:t>Source: https://github.com/archit0k/Devops-HW/tree/main/project</a:t>
-            </a:r>
-          </a:p>
-          <a:p xmlns:a="http://schemas.openxmlformats.org/drawingml/2006/main">
-            <a:r>
-              <a:t>Requirements: https://github.com/Nency-Ravaliya/devsecops-python/blob/main/GRADING.md</a:t>
+              <a:t>The browser uses Ingress. The root route serves React through Nginx. API traffic goes to FastAPI and PostgreSQL. Prometheus scrapes FastAPI independently; Grafana queries Prometheus. PostgreSQL stays internal.</a:t>
+            </a:r>
+          </a:p>
+          <a:p xmlns:a="http://schemas.openxmlformats.org/drawingml/2006/main">
+            <a:r>
+              <a:t>Project source: https://github.com/archit0k/Devops-HW/tree/main/project</a:t>
+            </a:r>
+          </a:p>
+          <a:p xmlns:a="http://schemas.openxmlformats.org/drawingml/2006/main">
+            <a:r>
+              <a:t>Rubric: https://github.com/Nency-Ravaliya/devsecops-python/blob/main/GRADING.md</a:t>
             </a:r>
           </a:p>
         </p:txBody>
@@ -751,12 +968,17 @@
           <a:lstStyle xmlns:a="http://schemas.openxmlformats.org/drawingml/2006/main"/>
           <a:p xmlns:a="http://schemas.openxmlformats.org/drawingml/2006/main">
             <a:r>
-              <a:t>Source: https://github.com/archit0k/Devops-HW/tree/main/project</a:t>
-            </a:r>
-          </a:p>
-          <a:p xmlns:a="http://schemas.openxmlformats.org/drawingml/2006/main">
-            <a:r>
-              <a:t>Requirements: https://github.com/Nency-Ravaliya/devsecops-python/blob/main/GRADING.md</a:t>
+              <a:t>React/Vite is the UI. FastAPI handles the API. SQLAlchemy and Alembic manage PostgreSQL. Docker packages the app. GitHub Actions and Trivy check both images. Terraform, Helm, Kubernetes and Argo CD handle infrastructure and deployment.</a:t>
+            </a:r>
+          </a:p>
+          <a:p xmlns:a="http://schemas.openxmlformats.org/drawingml/2006/main">
+            <a:r>
+              <a:t>Project source: https://github.com/archit0k/Devops-HW/tree/main/project</a:t>
+            </a:r>
+          </a:p>
+          <a:p xmlns:a="http://schemas.openxmlformats.org/drawingml/2006/main">
+            <a:r>
+              <a:t>Rubric: https://github.com/Nency-Ravaliya/devsecops-python/blob/main/GRADING.md</a:t>
             </a:r>
           </a:p>
         </p:txBody>
@@ -826,12 +1048,27 @@
           <a:lstStyle xmlns:a="http://schemas.openxmlformats.org/drawingml/2006/main"/>
           <a:p xmlns:a="http://schemas.openxmlformats.org/drawingml/2006/main">
             <a:r>
-              <a:t>Source: https://github.com/archit0k/Devops-HW/tree/main/project</a:t>
-            </a:r>
-          </a:p>
-          <a:p xmlns:a="http://schemas.openxmlformats.org/drawingml/2006/main">
-            <a:r>
-              <a:t>Requirements: https://github.com/Nency-Ravaliya/devsecops-python/blob/main/GRADING.md</a:t>
+              <a:t>Sixteen API tests use an isolated test database. A separate HTTP integration check uses actual PostgreSQL. Simultaneous POSTs for the same room/date/hour produce one 201 and one 409. The database constraint enforces this even under a race.</a:t>
+            </a:r>
+          </a:p>
+          <a:p xmlns:a="http://schemas.openxmlformats.org/drawingml/2006/main">
+            <a:r>
+              <a:t>Project source: https://github.com/archit0k/Devops-HW/tree/main/project</a:t>
+            </a:r>
+          </a:p>
+          <a:p xmlns:a="http://schemas.openxmlformats.org/drawingml/2006/main">
+            <a:r>
+              <a:t>Rubric: https://github.com/Nency-Ravaliya/devsecops-python/blob/main/GRADING.md</a:t>
+            </a:r>
+          </a:p>
+          <a:p xmlns:a="http://schemas.openxmlformats.org/drawingml/2006/main">
+            <a:r>
+              <a:t>Screenshot: C:\Users\archi\Github Projects\Devops-HW\project\evidence\pytest-output.jpg</a:t>
+            </a:r>
+          </a:p>
+          <a:p xmlns:a="http://schemas.openxmlformats.org/drawingml/2006/main">
+            <a:r>
+              <a:t>Captured evidence is dated. It does not imply an always-on cloud service.</a:t>
             </a:r>
           </a:p>
         </p:txBody>
@@ -901,12 +1138,27 @@
           <a:lstStyle xmlns:a="http://schemas.openxmlformats.org/drawingml/2006/main"/>
           <a:p xmlns:a="http://schemas.openxmlformats.org/drawingml/2006/main">
             <a:r>
-              <a:t>Source: https://github.com/archit0k/Devops-HW/tree/main/project</a:t>
-            </a:r>
-          </a:p>
-          <a:p xmlns:a="http://schemas.openxmlformats.org/drawingml/2006/main">
-            <a:r>
-              <a:t>Requirements: https://github.com/Nency-Ravaliya/devsecops-python/blob/main/GRADING.md</a:t>
+              <a:t>Each main push runs tests, frontend build, audits and a full-history secret scan. Trivy scans both runtime images. HIGH/CRITICAL findings block publication. Full commit-SHA image tags identify the checked builds. Kind verifies the exact images before optional EKS deployment. The pictured six-job run passed during the earlier temporary AWS lab.</a:t>
+            </a:r>
+          </a:p>
+          <a:p xmlns:a="http://schemas.openxmlformats.org/drawingml/2006/main">
+            <a:r>
+              <a:t>Project source: https://github.com/archit0k/Devops-HW/tree/main/project</a:t>
+            </a:r>
+          </a:p>
+          <a:p xmlns:a="http://schemas.openxmlformats.org/drawingml/2006/main">
+            <a:r>
+              <a:t>Rubric: https://github.com/Nency-Ravaliya/devsecops-python/blob/main/GRADING.md</a:t>
+            </a:r>
+          </a:p>
+          <a:p xmlns:a="http://schemas.openxmlformats.org/drawingml/2006/main">
+            <a:r>
+              <a:t>Screenshot: C:\Users\archi\Github Projects\Devops-HW\project\evidence\pipeline-final.jpg</a:t>
+            </a:r>
+          </a:p>
+          <a:p xmlns:a="http://schemas.openxmlformats.org/drawingml/2006/main">
+            <a:r>
+              <a:t>Captured evidence is dated. It does not imply an always-on cloud service.</a:t>
             </a:r>
           </a:p>
         </p:txBody>
@@ -976,12 +1228,27 @@
           <a:lstStyle xmlns:a="http://schemas.openxmlformats.org/drawingml/2006/main"/>
           <a:p xmlns:a="http://schemas.openxmlformats.org/drawingml/2006/main">
             <a:r>
-              <a:t>Source: https://github.com/archit0k/Devops-HW/tree/main/project</a:t>
-            </a:r>
-          </a:p>
-          <a:p xmlns:a="http://schemas.openxmlformats.org/drawingml/2006/main">
-            <a:r>
-              <a:t>Requirements: https://github.com/Nency-Ravaliya/devsecops-python/blob/main/GRADING.md</a:t>
+              <a:t>Terraform manages one VPC, two public subnets in separate availability zones, EKS 1.35 with two t3.medium workers and storage/identity/metrics add-ons. The fresh lab has 25 managed resources and reuses an existing GitHub OIDC provider. Short-lived access replaces permanent keys. No NAT gateway, RDS or public application LoadBalancer. The screenshot records a genuine temporary lab.</a:t>
+            </a:r>
+          </a:p>
+          <a:p xmlns:a="http://schemas.openxmlformats.org/drawingml/2006/main">
+            <a:r>
+              <a:t>Project source: https://github.com/archit0k/Devops-HW/tree/main/project</a:t>
+            </a:r>
+          </a:p>
+          <a:p xmlns:a="http://schemas.openxmlformats.org/drawingml/2006/main">
+            <a:r>
+              <a:t>Rubric: https://github.com/Nency-Ravaliya/devsecops-python/blob/main/GRADING.md</a:t>
+            </a:r>
+          </a:p>
+          <a:p xmlns:a="http://schemas.openxmlformats.org/drawingml/2006/main">
+            <a:r>
+              <a:t>Screenshot: C:\Users\archi\Github Projects\Devops-HW\project\evidence\rehearsal-20261016\aws-vpc-map.jpg</a:t>
+            </a:r>
+          </a:p>
+          <a:p xmlns:a="http://schemas.openxmlformats.org/drawingml/2006/main">
+            <a:r>
+              <a:t>Captured evidence is dated. It does not imply an always-on cloud service.</a:t>
             </a:r>
           </a:p>
         </p:txBody>
@@ -1051,12 +1318,27 @@
           <a:lstStyle xmlns:a="http://schemas.openxmlformats.org/drawingml/2006/main"/>
           <a:p xmlns:a="http://schemas.openxmlformats.org/drawingml/2006/main">
             <a:r>
-              <a:t>Source: https://github.com/archit0k/Devops-HW/tree/main/project</a:t>
-            </a:r>
-          </a:p>
-          <a:p xmlns:a="http://schemas.openxmlformats.org/drawingml/2006/main">
-            <a:r>
-              <a:t>Requirements: https://github.com/Nency-Ravaliya/devsecops-python/blob/main/GRADING.md</a:t>
+              <a:t>The chart deploys two frontend replicas, backend HPA with a two-Pod minimum, internal Services, routing and a PostgreSQL PVC. Readiness probes keep unready Pods out of traffic. This pictured cluster is the local Minikube lab, separate from the AWS EKS checks.</a:t>
+            </a:r>
+          </a:p>
+          <a:p xmlns:a="http://schemas.openxmlformats.org/drawingml/2006/main">
+            <a:r>
+              <a:t>Project source: https://github.com/archit0k/Devops-HW/tree/main/project</a:t>
+            </a:r>
+          </a:p>
+          <a:p xmlns:a="http://schemas.openxmlformats.org/drawingml/2006/main">
+            <a:r>
+              <a:t>Rubric: https://github.com/Nency-Ravaliya/devsecops-python/blob/main/GRADING.md</a:t>
+            </a:r>
+          </a:p>
+          <a:p xmlns:a="http://schemas.openxmlformats.org/drawingml/2006/main">
+            <a:r>
+              <a:t>Screenshot: C:\Users\archi\Github Projects\Devops-HW\project\evidence\kubernetes-pods-services.jpg</a:t>
+            </a:r>
+          </a:p>
+          <a:p xmlns:a="http://schemas.openxmlformats.org/drawingml/2006/main">
+            <a:r>
+              <a:t>Captured evidence is dated. It does not imply an always-on cloud service.</a:t>
             </a:r>
           </a:p>
         </p:txBody>
@@ -1126,12 +1408,27 @@
           <a:lstStyle xmlns:a="http://schemas.openxmlformats.org/drawingml/2006/main"/>
           <a:p xmlns:a="http://schemas.openxmlformats.org/drawingml/2006/main">
             <a:r>
-              <a:t>Source: https://github.com/archit0k/Devops-HW/tree/main/project</a:t>
-            </a:r>
-          </a:p>
-          <a:p xmlns:a="http://schemas.openxmlformats.org/drawingml/2006/main">
-            <a:r>
-              <a:t>Requirements: https://github.com/Nency-Ravaliya/devsecops-python/blob/main/GRADING.md</a:t>
+              <a:t>Argo CD follows main, the Helm chart and pinned tested local image values. A demoRevision change updates the backend Pod annotation and causes an actual rollout. Automatic sync and self-healing reconcile the desired configuration. The HPA owns backend replica count.</a:t>
+            </a:r>
+          </a:p>
+          <a:p xmlns:a="http://schemas.openxmlformats.org/drawingml/2006/main">
+            <a:r>
+              <a:t>Project source: https://github.com/archit0k/Devops-HW/tree/main/project</a:t>
+            </a:r>
+          </a:p>
+          <a:p xmlns:a="http://schemas.openxmlformats.org/drawingml/2006/main">
+            <a:r>
+              <a:t>Rubric: https://github.com/Nency-Ravaliya/devsecops-python/blob/main/GRADING.md</a:t>
+            </a:r>
+          </a:p>
+          <a:p xmlns:a="http://schemas.openxmlformats.org/drawingml/2006/main">
+            <a:r>
+              <a:t>Screenshot: C:\Users\archi\Github Projects\Devops-HW\project\evidence\rehearsal-20261016\argocd-synced.jpg</a:t>
+            </a:r>
+          </a:p>
+          <a:p xmlns:a="http://schemas.openxmlformats.org/drawingml/2006/main">
+            <a:r>
+              <a:t>Captured evidence is dated. It does not imply an always-on cloud service.</a:t>
             </a:r>
           </a:p>
         </p:txBody>
@@ -1178,7 +1475,7 @@
           <p:cNvPr id="3" name="Title">
             <a:extLst xmlns:a="http://schemas.openxmlformats.org/drawingml/2006/main">
               <a:ext uri="{FF2B5EF4-FFF2-40B4-BE49-F238E27FC236}">
-                <a16:creationId xmlns:a16="http://schemas.microsoft.com/office/drawing/2014/main" id="{0AD1A208-6590-4102-BBD7-5BBCA47EBA3C}"/>
+                <a16:creationId xmlns:a16="http://schemas.microsoft.com/office/drawing/2014/main" id="{8DD9CE72-62EF-46CC-A6ED-AFCB6F26A810}"/>
               </a:ext>
             </a:extLst>
           </p:cNvPr>
@@ -1335,7 +1632,7 @@
           <p:cNvPr id="2" name="Subtitle">
             <a:extLst xmlns:a="http://schemas.openxmlformats.org/drawingml/2006/main">
               <a:ext uri="{FF2B5EF4-FFF2-40B4-BE49-F238E27FC236}">
-                <a16:creationId xmlns:a16="http://schemas.microsoft.com/office/drawing/2014/main" id="{1F7C6DE0-68AE-4210-A867-93086F4E31F0}"/>
+                <a16:creationId xmlns:a16="http://schemas.microsoft.com/office/drawing/2014/main" id="{2D202F97-809D-4444-9436-D530B4AC1410}"/>
               </a:ext>
             </a:extLst>
           </p:cNvPr>
@@ -1509,7 +1806,7 @@
           <p:cNvPr id="2" name="Section title">
             <a:extLst xmlns:a="http://schemas.openxmlformats.org/drawingml/2006/main">
               <a:ext uri="{FF2B5EF4-FFF2-40B4-BE49-F238E27FC236}">
-                <a16:creationId xmlns:a16="http://schemas.microsoft.com/office/drawing/2014/main" id="{0C303602-45E1-4C3E-95EE-F22360DCE483}"/>
+                <a16:creationId xmlns:a16="http://schemas.microsoft.com/office/drawing/2014/main" id="{092387E8-04C1-4FD4-9DCA-DF2CA3D15488}"/>
               </a:ext>
             </a:extLst>
           </p:cNvPr>
@@ -1683,7 +1980,7 @@
           <p:cNvPr id="3" name="Title">
             <a:extLst xmlns:a="http://schemas.openxmlformats.org/drawingml/2006/main">
               <a:ext uri="{FF2B5EF4-FFF2-40B4-BE49-F238E27FC236}">
-                <a16:creationId xmlns:a16="http://schemas.microsoft.com/office/drawing/2014/main" id="{15FD87BF-0F74-4C18-8456-7C55A8010F5C}"/>
+                <a16:creationId xmlns:a16="http://schemas.microsoft.com/office/drawing/2014/main" id="{CA697BC4-A710-4478-B8EB-44216B3AD313}"/>
               </a:ext>
             </a:extLst>
           </p:cNvPr>
@@ -1840,7 +2137,7 @@
           <p:cNvPr id="2" name="Body">
             <a:extLst xmlns:a="http://schemas.openxmlformats.org/drawingml/2006/main">
               <a:ext uri="{FF2B5EF4-FFF2-40B4-BE49-F238E27FC236}">
-                <a16:creationId xmlns:a16="http://schemas.microsoft.com/office/drawing/2014/main" id="{D3EF00A9-B02B-4543-B60E-1CA729DF830A}"/>
+                <a16:creationId xmlns:a16="http://schemas.microsoft.com/office/drawing/2014/main" id="{EFE6F329-09A0-47C1-8A25-4E873467816B}"/>
               </a:ext>
             </a:extLst>
           </p:cNvPr>
@@ -2014,7 +2311,7 @@
           <p:cNvPr id="4" name="Title">
             <a:extLst xmlns:a="http://schemas.openxmlformats.org/drawingml/2006/main">
               <a:ext uri="{FF2B5EF4-FFF2-40B4-BE49-F238E27FC236}">
-                <a16:creationId xmlns:a16="http://schemas.microsoft.com/office/drawing/2014/main" id="{09C080C1-CC08-4A12-8F47-B462D8772846}"/>
+                <a16:creationId xmlns:a16="http://schemas.microsoft.com/office/drawing/2014/main" id="{2A071AD2-E1C8-4D24-B8CE-F6B31614CFF4}"/>
               </a:ext>
             </a:extLst>
           </p:cNvPr>
@@ -2171,7 +2468,7 @@
           <p:cNvPr id="2" name="Left column">
             <a:extLst xmlns:a="http://schemas.openxmlformats.org/drawingml/2006/main">
               <a:ext uri="{FF2B5EF4-FFF2-40B4-BE49-F238E27FC236}">
-                <a16:creationId xmlns:a16="http://schemas.microsoft.com/office/drawing/2014/main" id="{40707C89-AB24-458F-B77D-8DCD9EF1B556}"/>
+                <a16:creationId xmlns:a16="http://schemas.microsoft.com/office/drawing/2014/main" id="{8490B5B9-F8D1-4BE8-8426-BE0C7F9E38D3}"/>
               </a:ext>
             </a:extLst>
           </p:cNvPr>
@@ -2328,7 +2625,7 @@
           <p:cNvPr id="3" name="Right column">
             <a:extLst xmlns:a="http://schemas.openxmlformats.org/drawingml/2006/main">
               <a:ext uri="{FF2B5EF4-FFF2-40B4-BE49-F238E27FC236}">
-                <a16:creationId xmlns:a16="http://schemas.microsoft.com/office/drawing/2014/main" id="{A3744071-9A81-4681-858E-66687A3530AC}"/>
+                <a16:creationId xmlns:a16="http://schemas.microsoft.com/office/drawing/2014/main" id="{634AE638-8C61-4624-BBF7-6865D2A7B63B}"/>
               </a:ext>
             </a:extLst>
           </p:cNvPr>
@@ -2502,7 +2799,7 @@
           <p:cNvPr id="3" name="Title">
             <a:extLst xmlns:a="http://schemas.openxmlformats.org/drawingml/2006/main">
               <a:ext uri="{FF2B5EF4-FFF2-40B4-BE49-F238E27FC236}">
-                <a16:creationId xmlns:a16="http://schemas.microsoft.com/office/drawing/2014/main" id="{B508059F-E7DB-4655-A1A7-1ED20B75187A}"/>
+                <a16:creationId xmlns:a16="http://schemas.microsoft.com/office/drawing/2014/main" id="{115046E0-5608-4FAB-B406-EA3F50EF5014}"/>
               </a:ext>
             </a:extLst>
           </p:cNvPr>
@@ -2659,7 +2956,7 @@
           <p:cNvPr id="2" name="Left column">
             <a:extLst xmlns:a="http://schemas.openxmlformats.org/drawingml/2006/main">
               <a:ext uri="{FF2B5EF4-FFF2-40B4-BE49-F238E27FC236}">
-                <a16:creationId xmlns:a16="http://schemas.microsoft.com/office/drawing/2014/main" id="{779720DB-594A-4A03-8E2C-EB7A1311F99B}"/>
+                <a16:creationId xmlns:a16="http://schemas.microsoft.com/office/drawing/2014/main" id="{367F88D4-BEE2-4E88-97AA-9E126F02F62F}"/>
               </a:ext>
             </a:extLst>
           </p:cNvPr>
@@ -2854,12 +3151,12 @@
   </p:cSld>
   <p:clrMap bg1="lt1" tx1="dk1" bg2="lt2" tx2="dk2" accent1="accent1" accent2="accent2" accent3="accent3" accent4="accent4" accent5="accent5" accent6="accent6" hlink="hlink" folHlink="folHlink"/>
   <p:sldLayoutIdLst>
-    <p:sldLayoutId xmlns:r="http://schemas.openxmlformats.org/officeDocument/2006/relationships" id="2147483649" r:id="R0fbab974cdee4b35"/>
-    <p:sldLayoutId xmlns:r="http://schemas.openxmlformats.org/officeDocument/2006/relationships" id="2147483650" r:id="R19f6b4a60b6e4b85"/>
-    <p:sldLayoutId xmlns:r="http://schemas.openxmlformats.org/officeDocument/2006/relationships" id="2147483651" r:id="R4b3ddebf68a34fc6"/>
-    <p:sldLayoutId xmlns:r="http://schemas.openxmlformats.org/officeDocument/2006/relationships" id="2147483652" r:id="R85b389282d42494e"/>
-    <p:sldLayoutId xmlns:r="http://schemas.openxmlformats.org/officeDocument/2006/relationships" id="2147483653" r:id="R7fc73e640bfe4c33"/>
-    <p:sldLayoutId xmlns:r="http://schemas.openxmlformats.org/officeDocument/2006/relationships" id="2147483654" r:id="Rc5911ba4f4764236"/>
+    <p:sldLayoutId xmlns:r="http://schemas.openxmlformats.org/officeDocument/2006/relationships" id="2147483649" r:id="Rc0eef5061bdb48de"/>
+    <p:sldLayoutId xmlns:r="http://schemas.openxmlformats.org/officeDocument/2006/relationships" id="2147483650" r:id="R403fd1be12594bc7"/>
+    <p:sldLayoutId xmlns:r="http://schemas.openxmlformats.org/officeDocument/2006/relationships" id="2147483651" r:id="R3e75766368ac4ee1"/>
+    <p:sldLayoutId xmlns:r="http://schemas.openxmlformats.org/officeDocument/2006/relationships" id="2147483652" r:id="R573a7862410842de"/>
+    <p:sldLayoutId xmlns:r="http://schemas.openxmlformats.org/officeDocument/2006/relationships" id="2147483653" r:id="Rc51bca755e7e4954"/>
+    <p:sldLayoutId xmlns:r="http://schemas.openxmlformats.org/officeDocument/2006/relationships" id="2147483654" r:id="R59c683a0bc994aab"/>
   </p:sldLayoutIdLst>
   <p:txStyles>
     <p:titleStyle>
@@ -3392,7 +3689,7 @@
     <p:bg>
       <p:bgPr>
         <a:solidFill xmlns:a="http://schemas.openxmlformats.org/drawingml/2006/main">
-          <a:srgbClr val="23423C"/>
+          <a:srgbClr val="163D38"/>
         </a:solidFill>
       </p:bgPr>
     </p:bg>
@@ -3407,10 +3704,10 @@
       </p:grpSpPr>
       <p:sp>
         <p:nvSpPr>
-          <p:cNvPr id="4" name="">
+          <p:cNvPr id="6" name="">
             <a:extLst xmlns:a="http://schemas.openxmlformats.org/drawingml/2006/main">
               <a:ext uri="{FF2B5EF4-FFF2-40B4-BE49-F238E27FC236}">
-                <a16:creationId xmlns:a16="http://schemas.microsoft.com/office/drawing/2014/main" id="{41AD7A0A-71BC-450B-A869-B610F297A82C}"/>
+                <a16:creationId xmlns:a16="http://schemas.microsoft.com/office/drawing/2014/main" id="{97F70648-4A4C-481F-9538-771D1FC916ED}"/>
               </a:ext>
             </a:extLst>
           </p:cNvPr>
@@ -3421,8 +3718,8 @@
         </p:nvSpPr>
         <p:spPr>
           <a:xfrm xmlns:a="http://schemas.openxmlformats.org/drawingml/2006/main">
-            <a:off x="685800" y="1066800"/>
-            <a:ext cx="10477500" cy="1238250"/>
+            <a:off x="609600" y="1238250"/>
+            <a:ext cx="10953750" cy="1428750"/>
           </a:xfrm>
           <a:prstGeom xmlns:a="http://schemas.openxmlformats.org/drawingml/2006/main" prst="rect">
             <a:avLst/>
@@ -3436,7 +3733,7 @@
           <a:bodyPr xmlns:a="http://schemas.openxmlformats.org/drawingml/2006/main"/>
           <a:lstStyle xmlns:a="http://schemas.openxmlformats.org/drawingml/2006/main">
             <a:defPPr>
-              <a:defRPr sz="7200" b="1">
+              <a:defRPr sz="8850" b="1">
                 <a:solidFill>
                   <a:srgbClr val="FFFFFF"/>
                 </a:solidFill>
@@ -3448,7 +3745,7 @@
           </a:lstStyle>
           <a:p xmlns:a="http://schemas.openxmlformats.org/drawingml/2006/main">
             <a:pPr>
-              <a:defRPr sz="7200" b="1">
+              <a:defRPr sz="8850" b="1">
                 <a:solidFill>
                   <a:srgbClr val="FFFFFF"/>
                 </a:solidFill>
@@ -3458,7 +3755,7 @@
               </a:defRPr>
             </a:pPr>
             <a:r>
-              <a:rPr sz="7200" b="1">
+              <a:rPr sz="8850" b="1">
                 <a:solidFill>
                   <a:srgbClr val="FFFFFF"/>
                 </a:solidFill>
@@ -3476,7 +3773,7 @@
           <p:cNvPr id="2" name="">
             <a:extLst xmlns:a="http://schemas.openxmlformats.org/drawingml/2006/main">
               <a:ext uri="{FF2B5EF4-FFF2-40B4-BE49-F238E27FC236}">
-                <a16:creationId xmlns:a16="http://schemas.microsoft.com/office/drawing/2014/main" id="{60F5F220-9CB5-43EB-91EA-32B1F154C6BC}"/>
+                <a16:creationId xmlns:a16="http://schemas.microsoft.com/office/drawing/2014/main" id="{C0918481-BB83-41F1-879F-DA448F589C14}"/>
               </a:ext>
             </a:extLst>
           </p:cNvPr>
@@ -3487,8 +3784,8 @@
         </p:nvSpPr>
         <p:spPr>
           <a:xfrm xmlns:a="http://schemas.openxmlformats.org/drawingml/2006/main">
-            <a:off x="723900" y="2571750"/>
-            <a:ext cx="9525000" cy="666750"/>
+            <a:off x="666750" y="2857500"/>
+            <a:ext cx="10191750" cy="619125"/>
           </a:xfrm>
           <a:prstGeom xmlns:a="http://schemas.openxmlformats.org/drawingml/2006/main" prst="rect">
             <a:avLst/>
@@ -3502,9 +3799,9 @@
           <a:bodyPr xmlns:a="http://schemas.openxmlformats.org/drawingml/2006/main"/>
           <a:lstStyle xmlns:a="http://schemas.openxmlformats.org/drawingml/2006/main">
             <a:defPPr>
-              <a:defRPr sz="2700" b="0">
-                <a:solidFill>
-                  <a:srgbClr val="D0DDC4"/>
+              <a:defRPr sz="3150" b="0">
+                <a:solidFill>
+                  <a:srgbClr val="DEE9DC"/>
                 </a:solidFill>
                 <a:latin typeface="Arial"/>
                 <a:ea typeface="Arial"/>
@@ -3514,9 +3811,9 @@
           </a:lstStyle>
           <a:p xmlns:a="http://schemas.openxmlformats.org/drawingml/2006/main">
             <a:pPr>
-              <a:defRPr sz="2700" b="0">
-                <a:solidFill>
-                  <a:srgbClr val="D0DDC4"/>
+              <a:defRPr sz="3150" b="0">
+                <a:solidFill>
+                  <a:srgbClr val="DEE9DC"/>
                 </a:solidFill>
                 <a:latin typeface="Arial"/>
                 <a:ea typeface="Arial"/>
@@ -3524,15 +3821,15 @@
               </a:defRPr>
             </a:pPr>
             <a:r>
-              <a:rPr sz="2700" b="0">
-                <a:solidFill>
-                  <a:srgbClr val="D0DDC4"/>
+              <a:rPr sz="3150" b="0">
+                <a:solidFill>
+                  <a:srgbClr val="DEE9DC"/>
                 </a:solidFill>
                 <a:latin typeface="Arial"/>
                 <a:ea typeface="Arial"/>
                 <a:cs typeface="Arial"/>
               </a:rPr>
-              <a:t>Study-room booking</a:t>
+              <a:t>Study-room bookings</a:t>
             </a:r>
           </a:p>
         </p:txBody>
@@ -3542,7 +3839,7 @@
           <p:cNvPr id="3" name="">
             <a:extLst xmlns:a="http://schemas.openxmlformats.org/drawingml/2006/main">
               <a:ext uri="{FF2B5EF4-FFF2-40B4-BE49-F238E27FC236}">
-                <a16:creationId xmlns:a16="http://schemas.microsoft.com/office/drawing/2014/main" id="{2ECAD9FF-0B44-40B0-9E00-3BAC1E3086D1}"/>
+                <a16:creationId xmlns:a16="http://schemas.microsoft.com/office/drawing/2014/main" id="{72379455-17BB-4BA8-868E-E1AD69BE0409}"/>
               </a:ext>
             </a:extLst>
           </p:cNvPr>
@@ -3553,8 +3850,8 @@
         </p:nvSpPr>
         <p:spPr>
           <a:xfrm xmlns:a="http://schemas.openxmlformats.org/drawingml/2006/main">
-            <a:off x="723900" y="4267200"/>
-            <a:ext cx="8572500" cy="1428750"/>
+            <a:off x="685800" y="3581400"/>
+            <a:ext cx="8572500" cy="419100"/>
           </a:xfrm>
           <a:prstGeom xmlns:a="http://schemas.openxmlformats.org/drawingml/2006/main" prst="rect">
             <a:avLst/>
@@ -3570,7 +3867,7 @@
             <a:defPPr>
               <a:defRPr sz="2100" b="0">
                 <a:solidFill>
-                  <a:srgbClr val="FFFFFF"/>
+                  <a:srgbClr val="DEE9DC"/>
                 </a:solidFill>
                 <a:latin typeface="Arial"/>
                 <a:ea typeface="Arial"/>
@@ -3582,15 +3879,81 @@
             <a:pPr>
               <a:defRPr sz="2100" b="0">
                 <a:solidFill>
+                  <a:srgbClr val="DEE9DC"/>
+                </a:solidFill>
+                <a:latin typeface="Arial"/>
+                <a:ea typeface="Arial"/>
+                <a:cs typeface="Arial"/>
+              </a:defRPr>
+            </a:pPr>
+            <a:r>
+              <a:rPr sz="2100" b="0">
+                <a:solidFill>
+                  <a:srgbClr val="DEE9DC"/>
+                </a:solidFill>
+                <a:latin typeface="Arial"/>
+                <a:ea typeface="Arial"/>
+                <a:cs typeface="Arial"/>
+              </a:rPr>
+              <a:t>DevOps capstone</a:t>
+            </a:r>
+          </a:p>
+        </p:txBody>
+      </p:sp>
+      <p:sp>
+        <p:nvSpPr>
+          <p:cNvPr id="4" name="">
+            <a:extLst xmlns:a="http://schemas.openxmlformats.org/drawingml/2006/main">
+              <a:ext uri="{FF2B5EF4-FFF2-40B4-BE49-F238E27FC236}">
+                <a16:creationId xmlns:a16="http://schemas.microsoft.com/office/drawing/2014/main" id="{10D30BF2-2F33-4341-BEC7-1B07CBCDDEDD}"/>
+              </a:ext>
+            </a:extLst>
+          </p:cNvPr>
+          <p:cNvSpPr>
+            <a:spLocks xmlns:a="http://schemas.openxmlformats.org/drawingml/2006/main" noGrp="1"/>
+          </p:cNvSpPr>
+          <p:nvPr/>
+        </p:nvSpPr>
+        <p:spPr>
+          <a:xfrm xmlns:a="http://schemas.openxmlformats.org/drawingml/2006/main">
+            <a:off x="685800" y="5314950"/>
+            <a:ext cx="9525000" cy="428625"/>
+          </a:xfrm>
+          <a:prstGeom xmlns:a="http://schemas.openxmlformats.org/drawingml/2006/main" prst="rect">
+            <a:avLst/>
+          </a:prstGeom>
+          <a:noFill xmlns:a="http://schemas.openxmlformats.org/drawingml/2006/main"/>
+          <a:ln xmlns:a="http://schemas.openxmlformats.org/drawingml/2006/main" w="0">
+            <a:noFill/>
+          </a:ln>
+        </p:spPr>
+        <p:txBody>
+          <a:bodyPr xmlns:a="http://schemas.openxmlformats.org/drawingml/2006/main"/>
+          <a:lstStyle xmlns:a="http://schemas.openxmlformats.org/drawingml/2006/main">
+            <a:defPPr>
+              <a:defRPr sz="2400" b="1">
+                <a:solidFill>
                   <a:srgbClr val="FFFFFF"/>
                 </a:solidFill>
                 <a:latin typeface="Arial"/>
                 <a:ea typeface="Arial"/>
                 <a:cs typeface="Arial"/>
               </a:defRPr>
+            </a:defPPr>
+          </a:lstStyle>
+          <a:p xmlns:a="http://schemas.openxmlformats.org/drawingml/2006/main">
+            <a:pPr>
+              <a:defRPr sz="2400" b="1">
+                <a:solidFill>
+                  <a:srgbClr val="FFFFFF"/>
+                </a:solidFill>
+                <a:latin typeface="Arial"/>
+                <a:ea typeface="Arial"/>
+                <a:cs typeface="Arial"/>
+              </a:defRPr>
             </a:pPr>
             <a:r>
-              <a:rPr sz="2100" b="0">
+              <a:rPr sz="2400" b="1">
                 <a:solidFill>
                   <a:srgbClr val="FFFFFF"/>
                 </a:solidFill>
@@ -3601,11 +3964,54 @@
               <a:t>Archit Kulkarni</a:t>
             </a:r>
           </a:p>
+        </p:txBody>
+      </p:sp>
+      <p:sp>
+        <p:nvSpPr>
+          <p:cNvPr id="5" name="">
+            <a:extLst xmlns:a="http://schemas.openxmlformats.org/drawingml/2006/main">
+              <a:ext uri="{FF2B5EF4-FFF2-40B4-BE49-F238E27FC236}">
+                <a16:creationId xmlns:a16="http://schemas.microsoft.com/office/drawing/2014/main" id="{C2657E7A-A46F-45DC-8CF6-50B416CE2827}"/>
+              </a:ext>
+            </a:extLst>
+          </p:cNvPr>
+          <p:cNvSpPr>
+            <a:spLocks xmlns:a="http://schemas.openxmlformats.org/drawingml/2006/main" noGrp="1"/>
+          </p:cNvSpPr>
+          <p:nvPr/>
+        </p:nvSpPr>
+        <p:spPr>
+          <a:xfrm xmlns:a="http://schemas.openxmlformats.org/drawingml/2006/main">
+            <a:off x="704850" y="5810250"/>
+            <a:ext cx="9525000" cy="361950"/>
+          </a:xfrm>
+          <a:prstGeom xmlns:a="http://schemas.openxmlformats.org/drawingml/2006/main" prst="rect">
+            <a:avLst/>
+          </a:prstGeom>
+          <a:noFill xmlns:a="http://schemas.openxmlformats.org/drawingml/2006/main"/>
+          <a:ln xmlns:a="http://schemas.openxmlformats.org/drawingml/2006/main" w="0">
+            <a:noFill/>
+          </a:ln>
+        </p:spPr>
+        <p:txBody>
+          <a:bodyPr xmlns:a="http://schemas.openxmlformats.org/drawingml/2006/main"/>
+          <a:lstStyle xmlns:a="http://schemas.openxmlformats.org/drawingml/2006/main">
+            <a:defPPr>
+              <a:defRPr sz="1875" b="0">
+                <a:solidFill>
+                  <a:srgbClr val="DEE9DC"/>
+                </a:solidFill>
+                <a:latin typeface="Arial"/>
+                <a:ea typeface="Arial"/>
+                <a:cs typeface="Arial"/>
+              </a:defRPr>
+            </a:defPPr>
+          </a:lstStyle>
           <a:p xmlns:a="http://schemas.openxmlformats.org/drawingml/2006/main">
             <a:pPr>
-              <a:defRPr sz="2100" b="0">
-                <a:solidFill>
-                  <a:srgbClr val="FFFFFF"/>
+              <a:defRPr sz="1875" b="0">
+                <a:solidFill>
+                  <a:srgbClr val="DEE9DC"/>
                 </a:solidFill>
                 <a:latin typeface="Arial"/>
                 <a:ea typeface="Arial"/>
@@ -3613,38 +4019,15 @@
               </a:defRPr>
             </a:pPr>
             <a:r>
-              <a:rPr sz="2100" b="0">
-                <a:solidFill>
-                  <a:srgbClr val="FFFFFF"/>
+              <a:rPr sz="1875" b="0">
+                <a:solidFill>
+                  <a:srgbClr val="DEE9DC"/>
                 </a:solidFill>
                 <a:latin typeface="Arial"/>
                 <a:ea typeface="Arial"/>
                 <a:cs typeface="Arial"/>
               </a:rPr>
-              <a:t>24BCS10194</a:t>
-            </a:r>
-          </a:p>
-          <a:p xmlns:a="http://schemas.openxmlformats.org/drawingml/2006/main">
-            <a:pPr>
-              <a:defRPr sz="2100" b="0">
-                <a:solidFill>
-                  <a:srgbClr val="FFFFFF"/>
-                </a:solidFill>
-                <a:latin typeface="Arial"/>
-                <a:ea typeface="Arial"/>
-                <a:cs typeface="Arial"/>
-              </a:defRPr>
-            </a:pPr>
-            <a:r>
-              <a:rPr sz="2100" b="0">
-                <a:solidFill>
-                  <a:srgbClr val="FFFFFF"/>
-                </a:solidFill>
-                <a:latin typeface="Arial"/>
-                <a:ea typeface="Arial"/>
-                <a:cs typeface="Arial"/>
-              </a:rPr>
-              <a:t>Section A</a:t>
+              <a:t>24BCS10194   Section A</a:t>
             </a:r>
           </a:p>
         </p:txBody>
@@ -3652,7 +4035,7 @@
     </p:spTree>
     <p:extLst>
       <p:ext uri="{BB962C8B-B14F-4D97-AF65-F5344CB8AC3E}">
-        <p14:creationId xmlns:p14="http://schemas.microsoft.com/office/powerpoint/2010/main" val="305848872"/>
+        <p14:creationId xmlns:p14="http://schemas.microsoft.com/office/powerpoint/2010/main" val="1651325804"/>
       </p:ext>
     </p:extLst>
   </p:cSld>
@@ -3665,7 +4048,7 @@
     <p:bg>
       <p:bgPr>
         <a:solidFill xmlns:a="http://schemas.openxmlformats.org/drawingml/2006/main">
-          <a:srgbClr val="F5F4EF"/>
+          <a:srgbClr val="F8F5EE"/>
         </a:solidFill>
       </p:bgPr>
     </p:bg>
@@ -3680,10 +4063,10 @@
       </p:grpSpPr>
       <p:sp>
         <p:nvSpPr>
-          <p:cNvPr id="7" name="">
+          <p:cNvPr id="4" name="">
             <a:extLst xmlns:a="http://schemas.openxmlformats.org/drawingml/2006/main">
               <a:ext uri="{FF2B5EF4-FFF2-40B4-BE49-F238E27FC236}">
-                <a16:creationId xmlns:a16="http://schemas.microsoft.com/office/drawing/2014/main" id="{624A68B8-E4B3-4E37-90B4-15EA2495D355}"/>
+                <a16:creationId xmlns:a16="http://schemas.microsoft.com/office/drawing/2014/main" id="{465CF60B-66DC-4FB3-A85E-DBB635603574}"/>
               </a:ext>
             </a:extLst>
           </p:cNvPr>
@@ -3694,8 +4077,8 @@
         </p:nvSpPr>
         <p:spPr>
           <a:xfrm xmlns:a="http://schemas.openxmlformats.org/drawingml/2006/main">
-            <a:off x="609600" y="476250"/>
-            <a:ext cx="10858500" cy="714375"/>
+            <a:off x="609600" y="381000"/>
+            <a:ext cx="10972800" cy="723900"/>
           </a:xfrm>
           <a:prstGeom xmlns:a="http://schemas.openxmlformats.org/drawingml/2006/main" prst="rect">
             <a:avLst/>
@@ -3709,9 +4092,9 @@
           <a:bodyPr xmlns:a="http://schemas.openxmlformats.org/drawingml/2006/main"/>
           <a:lstStyle xmlns:a="http://schemas.openxmlformats.org/drawingml/2006/main">
             <a:defPPr>
-              <a:defRPr sz="3300" b="1">
-                <a:solidFill>
-                  <a:srgbClr val="23423C"/>
+              <a:defRPr sz="3600" b="1">
+                <a:solidFill>
+                  <a:srgbClr val="163D38"/>
                 </a:solidFill>
                 <a:latin typeface="Arial"/>
                 <a:ea typeface="Arial"/>
@@ -3721,9 +4104,9 @@
           </a:lstStyle>
           <a:p xmlns:a="http://schemas.openxmlformats.org/drawingml/2006/main">
             <a:pPr>
-              <a:defRPr sz="3300" b="1">
-                <a:solidFill>
-                  <a:srgbClr val="23423C"/>
+              <a:defRPr sz="3600" b="1">
+                <a:solidFill>
+                  <a:srgbClr val="163D38"/>
                 </a:solidFill>
                 <a:latin typeface="Arial"/>
                 <a:ea typeface="Arial"/>
@@ -3731,37 +4114,65 @@
               </a:defRPr>
             </a:pPr>
             <a:r>
-              <a:rPr sz="3300" b="1">
-                <a:solidFill>
-                  <a:srgbClr val="23423C"/>
+              <a:rPr sz="3600" b="1">
+                <a:solidFill>
+                  <a:srgbClr val="163D38"/>
                 </a:solidFill>
                 <a:latin typeface="Arial"/>
                 <a:ea typeface="Arial"/>
                 <a:cs typeface="Arial"/>
               </a:rPr>
-              <a:t>What I learned</a:t>
-            </a:r>
-          </a:p>
-        </p:txBody>
-      </p:sp>
-      <p:sp>
-        <p:nvSpPr>
+              <a:t>Prometheus targets</a:t>
+            </a:r>
+          </a:p>
+        </p:txBody>
+      </p:sp>
+      <p:pic>
+        <p:nvPicPr>
           <p:cNvPr id="2" name="">
             <a:extLst xmlns:a="http://schemas.openxmlformats.org/drawingml/2006/main">
               <a:ext uri="{FF2B5EF4-FFF2-40B4-BE49-F238E27FC236}">
-                <a16:creationId xmlns:a16="http://schemas.microsoft.com/office/drawing/2014/main" id="{2009D72E-9C30-4D47-B476-9711516F5844}"/>
+                <a16:creationId xmlns:a16="http://schemas.microsoft.com/office/drawing/2014/main" id="{A892EA9E-9541-48B2-A21A-4DD2ACCEDFA3}"/>
               </a:ext>
             </a:extLst>
           </p:cNvPr>
-          <p:cNvSpPr>
-            <a:spLocks xmlns:a="http://schemas.openxmlformats.org/drawingml/2006/main" noGrp="1"/>
-          </p:cNvSpPr>
+          <p:cNvPicPr>
+            <a:picLocks xmlns:a="http://schemas.openxmlformats.org/drawingml/2006/main" noChangeAspect="1"/>
+          </p:cNvPicPr>
           <p:nvPr/>
-        </p:nvSpPr>
+        </p:nvPicPr>
+        <p:blipFill>
+          <a:blip xmlns:r="http://schemas.openxmlformats.org/officeDocument/2006/relationships" xmlns:a="http://schemas.openxmlformats.org/drawingml/2006/main" r:embed="Rfb637aaa32cc41db"/>
+          <a:stretch xmlns:a="http://schemas.openxmlformats.org/drawingml/2006/main"/>
+        </p:blipFill>
         <p:spPr>
           <a:xfrm xmlns:a="http://schemas.openxmlformats.org/drawingml/2006/main">
-            <a:off x="685800" y="1381125"/>
-            <a:ext cx="10572750" cy="714375"/>
+            <a:off x="1989667" y="1285875"/>
+            <a:ext cx="8212667" cy="4619625"/>
+          </a:xfrm>
+          <a:prstGeom xmlns:a="http://schemas.openxmlformats.org/drawingml/2006/main" prst="rect">
+            <a:avLst/>
+          </a:prstGeom>
+        </p:spPr>
+      </p:pic>
+      <p:sp>
+        <p:nvSpPr>
+          <p:cNvPr id="3" name="">
+            <a:extLst xmlns:a="http://schemas.openxmlformats.org/drawingml/2006/main">
+              <a:ext uri="{FF2B5EF4-FFF2-40B4-BE49-F238E27FC236}">
+                <a16:creationId xmlns:a16="http://schemas.microsoft.com/office/drawing/2014/main" id="{6235D23A-6E2D-4193-9375-0C9589790866}"/>
+              </a:ext>
+            </a:extLst>
+          </p:cNvPr>
+          <p:cNvSpPr>
+            <a:spLocks xmlns:a="http://schemas.openxmlformats.org/drawingml/2006/main" noGrp="1"/>
+          </p:cNvSpPr>
+          <p:nvPr/>
+        </p:nvSpPr>
+        <p:spPr>
+          <a:xfrm xmlns:a="http://schemas.openxmlformats.org/drawingml/2006/main">
+            <a:off x="628650" y="6181725"/>
+            <a:ext cx="10906125" cy="438150"/>
           </a:xfrm>
           <a:prstGeom xmlns:a="http://schemas.openxmlformats.org/drawingml/2006/main" prst="rect">
             <a:avLst/>
@@ -3775,9 +4186,9 @@
           <a:bodyPr xmlns:a="http://schemas.openxmlformats.org/drawingml/2006/main"/>
           <a:lstStyle xmlns:a="http://schemas.openxmlformats.org/drawingml/2006/main">
             <a:defPPr>
-              <a:defRPr sz="2100" b="0">
-                <a:solidFill>
-                  <a:srgbClr val="23423C"/>
+              <a:defRPr sz="2250" b="1">
+                <a:solidFill>
+                  <a:srgbClr val="163D38"/>
                 </a:solidFill>
                 <a:latin typeface="Arial"/>
                 <a:ea typeface="Arial"/>
@@ -3787,9 +4198,9 @@
           </a:lstStyle>
           <a:p xmlns:a="http://schemas.openxmlformats.org/drawingml/2006/main">
             <a:pPr>
-              <a:defRPr sz="2100" b="0">
-                <a:solidFill>
-                  <a:srgbClr val="23423C"/>
+              <a:defRPr sz="2250" b="1">
+                <a:solidFill>
+                  <a:srgbClr val="163D38"/>
                 </a:solidFill>
                 <a:latin typeface="Arial"/>
                 <a:ea typeface="Arial"/>
@@ -3797,25 +4208,54 @@
               </a:defRPr>
             </a:pPr>
             <a:r>
-              <a:rPr sz="2100" b="0">
-                <a:solidFill>
-                  <a:srgbClr val="23423C"/>
+              <a:rPr sz="2250" b="1">
+                <a:solidFill>
+                  <a:srgbClr val="163D38"/>
                 </a:solidFill>
                 <a:latin typeface="Arial"/>
                 <a:ea typeface="Arial"/>
                 <a:cs typeface="Arial"/>
               </a:rPr>
-              <a:t>A database constraint protects against races that frontend checks miss.</a:t>
-            </a:r>
-          </a:p>
-        </p:txBody>
-      </p:sp>
-      <p:sp>
-        <p:nvSpPr>
-          <p:cNvPr id="3" name="">
+              <a:t>Backend targets UP through the ServiceMonitor</a:t>
+            </a:r>
+          </a:p>
+        </p:txBody>
+      </p:sp>
+    </p:spTree>
+    <p:extLst>
+      <p:ext uri="{BB962C8B-B14F-4D97-AF65-F5344CB8AC3E}">
+        <p14:creationId xmlns:p14="http://schemas.microsoft.com/office/powerpoint/2010/main" val="430769952"/>
+      </p:ext>
+    </p:extLst>
+  </p:cSld>
+</p:sld>
+</file>
+
+<file path=ppt/slides/slide11.xml><?xml version="1.0" encoding="utf-8"?>
+<p:sld xmlns:p="http://schemas.openxmlformats.org/presentationml/2006/main">
+  <p:cSld>
+    <p:bg>
+      <p:bgPr>
+        <a:solidFill xmlns:a="http://schemas.openxmlformats.org/drawingml/2006/main">
+          <a:srgbClr val="F8F5EE"/>
+        </a:solidFill>
+      </p:bgPr>
+    </p:bg>
+    <p:spTree>
+      <p:nvGrpSpPr>
+        <p:cNvPr id="1" name=""/>
+        <p:cNvGrpSpPr/>
+        <p:nvPr/>
+      </p:nvGrpSpPr>
+      <p:grpSpPr>
+        <a:xfrm xmlns:a="http://schemas.openxmlformats.org/drawingml/2006/main"/>
+      </p:grpSpPr>
+      <p:sp>
+        <p:nvSpPr>
+          <p:cNvPr id="4" name="">
             <a:extLst xmlns:a="http://schemas.openxmlformats.org/drawingml/2006/main">
               <a:ext uri="{FF2B5EF4-FFF2-40B4-BE49-F238E27FC236}">
-                <a16:creationId xmlns:a16="http://schemas.microsoft.com/office/drawing/2014/main" id="{A80D4CB7-6EED-4FF0-81B0-4EBE5F0F29F7}"/>
+                <a16:creationId xmlns:a16="http://schemas.microsoft.com/office/drawing/2014/main" id="{B2ED38F5-7536-4BAE-BB36-49567D87551F}"/>
               </a:ext>
             </a:extLst>
           </p:cNvPr>
@@ -3826,8 +4266,8 @@
         </p:nvSpPr>
         <p:spPr>
           <a:xfrm xmlns:a="http://schemas.openxmlformats.org/drawingml/2006/main">
-            <a:off x="685800" y="2257425"/>
-            <a:ext cx="10572750" cy="714375"/>
+            <a:off x="609600" y="381000"/>
+            <a:ext cx="10972800" cy="723900"/>
           </a:xfrm>
           <a:prstGeom xmlns:a="http://schemas.openxmlformats.org/drawingml/2006/main" prst="rect">
             <a:avLst/>
@@ -3841,9 +4281,9 @@
           <a:bodyPr xmlns:a="http://schemas.openxmlformats.org/drawingml/2006/main"/>
           <a:lstStyle xmlns:a="http://schemas.openxmlformats.org/drawingml/2006/main">
             <a:defPPr>
-              <a:defRPr sz="2100" b="0">
-                <a:solidFill>
-                  <a:srgbClr val="23423C"/>
+              <a:defRPr sz="3600" b="1">
+                <a:solidFill>
+                  <a:srgbClr val="163D38"/>
                 </a:solidFill>
                 <a:latin typeface="Arial"/>
                 <a:ea typeface="Arial"/>
@@ -3853,9 +4293,9 @@
           </a:lstStyle>
           <a:p xmlns:a="http://schemas.openxmlformats.org/drawingml/2006/main">
             <a:pPr>
-              <a:defRPr sz="2100" b="0">
-                <a:solidFill>
-                  <a:srgbClr val="23423C"/>
+              <a:defRPr sz="3600" b="1">
+                <a:solidFill>
+                  <a:srgbClr val="163D38"/>
                 </a:solidFill>
                 <a:latin typeface="Arial"/>
                 <a:ea typeface="Arial"/>
@@ -3863,37 +4303,65 @@
               </a:defRPr>
             </a:pPr>
             <a:r>
-              <a:rPr sz="2100" b="0">
-                <a:solidFill>
-                  <a:srgbClr val="23423C"/>
+              <a:rPr sz="3600" b="1">
+                <a:solidFill>
+                  <a:srgbClr val="163D38"/>
                 </a:solidFill>
                 <a:latin typeface="Arial"/>
                 <a:ea typeface="Arial"/>
                 <a:cs typeface="Arial"/>
               </a:rPr>
-              <a:t>Old volumes keep their old database password. Preserve them during tests.</a:t>
-            </a:r>
-          </a:p>
-        </p:txBody>
-      </p:sp>
-      <p:sp>
-        <p:nvSpPr>
-          <p:cNvPr id="4" name="">
+              <a:t>Application metrics in Grafana</a:t>
+            </a:r>
+          </a:p>
+        </p:txBody>
+      </p:sp>
+      <p:pic>
+        <p:nvPicPr>
+          <p:cNvPr id="2" name="">
             <a:extLst xmlns:a="http://schemas.openxmlformats.org/drawingml/2006/main">
               <a:ext uri="{FF2B5EF4-FFF2-40B4-BE49-F238E27FC236}">
-                <a16:creationId xmlns:a16="http://schemas.microsoft.com/office/drawing/2014/main" id="{33A27183-5BE0-486A-BB52-CE977F3573E2}"/>
+                <a16:creationId xmlns:a16="http://schemas.microsoft.com/office/drawing/2014/main" id="{A7A53DDF-71A3-4CD5-ADB7-E27330C6F02E}"/>
               </a:ext>
             </a:extLst>
           </p:cNvPr>
-          <p:cNvSpPr>
-            <a:spLocks xmlns:a="http://schemas.openxmlformats.org/drawingml/2006/main" noGrp="1"/>
-          </p:cNvSpPr>
+          <p:cNvPicPr>
+            <a:picLocks xmlns:a="http://schemas.openxmlformats.org/drawingml/2006/main" noChangeAspect="1"/>
+          </p:cNvPicPr>
           <p:nvPr/>
-        </p:nvSpPr>
+        </p:nvPicPr>
+        <p:blipFill>
+          <a:blip xmlns:r="http://schemas.openxmlformats.org/officeDocument/2006/relationships" xmlns:a="http://schemas.openxmlformats.org/drawingml/2006/main" r:embed="R459a21dadb5c4864"/>
+          <a:stretch xmlns:a="http://schemas.openxmlformats.org/drawingml/2006/main"/>
+        </p:blipFill>
         <p:spPr>
           <a:xfrm xmlns:a="http://schemas.openxmlformats.org/drawingml/2006/main">
-            <a:off x="685800" y="3133725"/>
-            <a:ext cx="10572750" cy="714375"/>
+            <a:off x="1738346" y="1238250"/>
+            <a:ext cx="8715308" cy="4905375"/>
+          </a:xfrm>
+          <a:prstGeom xmlns:a="http://schemas.openxmlformats.org/drawingml/2006/main" prst="rect">
+            <a:avLst/>
+          </a:prstGeom>
+        </p:spPr>
+      </p:pic>
+      <p:sp>
+        <p:nvSpPr>
+          <p:cNvPr id="3" name="">
+            <a:extLst xmlns:a="http://schemas.openxmlformats.org/drawingml/2006/main">
+              <a:ext uri="{FF2B5EF4-FFF2-40B4-BE49-F238E27FC236}">
+                <a16:creationId xmlns:a16="http://schemas.microsoft.com/office/drawing/2014/main" id="{5AA41A1E-5C2B-4CB3-91CD-A14AB323FB43}"/>
+              </a:ext>
+            </a:extLst>
+          </p:cNvPr>
+          <p:cNvSpPr>
+            <a:spLocks xmlns:a="http://schemas.openxmlformats.org/drawingml/2006/main" noGrp="1"/>
+          </p:cNvSpPr>
+          <p:nvPr/>
+        </p:nvSpPr>
+        <p:spPr>
+          <a:xfrm xmlns:a="http://schemas.openxmlformats.org/drawingml/2006/main">
+            <a:off x="609600" y="6315075"/>
+            <a:ext cx="10953750" cy="323850"/>
           </a:xfrm>
           <a:prstGeom xmlns:a="http://schemas.openxmlformats.org/drawingml/2006/main" prst="rect">
             <a:avLst/>
@@ -3907,9 +4375,9 @@
           <a:bodyPr xmlns:a="http://schemas.openxmlformats.org/drawingml/2006/main"/>
           <a:lstStyle xmlns:a="http://schemas.openxmlformats.org/drawingml/2006/main">
             <a:defPPr>
-              <a:defRPr sz="2100" b="0">
-                <a:solidFill>
-                  <a:srgbClr val="23423C"/>
+              <a:defRPr sz="1800" b="0">
+                <a:solidFill>
+                  <a:srgbClr val="526963"/>
                 </a:solidFill>
                 <a:latin typeface="Arial"/>
                 <a:ea typeface="Arial"/>
@@ -3919,9 +4387,9 @@
           </a:lstStyle>
           <a:p xmlns:a="http://schemas.openxmlformats.org/drawingml/2006/main">
             <a:pPr>
-              <a:defRPr sz="2100" b="0">
-                <a:solidFill>
-                  <a:srgbClr val="23423C"/>
+              <a:defRPr sz="1800" b="0">
+                <a:solidFill>
+                  <a:srgbClr val="526963"/>
                 </a:solidFill>
                 <a:latin typeface="Arial"/>
                 <a:ea typeface="Arial"/>
@@ -3929,25 +4397,54 @@
               </a:defRPr>
             </a:pPr>
             <a:r>
-              <a:rPr sz="2100" b="0">
-                <a:solidFill>
-                  <a:srgbClr val="23423C"/>
+              <a:rPr sz="1800" b="0">
+                <a:solidFill>
+                  <a:srgbClr val="526963"/>
                 </a:solidFill>
                 <a:latin typeface="Arial"/>
                 <a:ea typeface="Arial"/>
                 <a:cs typeface="Arial"/>
               </a:rPr>
-              <a:t>Root credentials cannot assume the lab role. Short-lived OIDC solves deployment access.</a:t>
-            </a:r>
-          </a:p>
-        </p:txBody>
-      </p:sp>
-      <p:sp>
-        <p:nvSpPr>
-          <p:cNvPr id="5" name="">
+              <a:t>Actual request activity and latency, collected from the running application</a:t>
+            </a:r>
+          </a:p>
+        </p:txBody>
+      </p:sp>
+    </p:spTree>
+    <p:extLst>
+      <p:ext uri="{BB962C8B-B14F-4D97-AF65-F5344CB8AC3E}">
+        <p14:creationId xmlns:p14="http://schemas.microsoft.com/office/powerpoint/2010/main" val="1259369579"/>
+      </p:ext>
+    </p:extLst>
+  </p:cSld>
+</p:sld>
+</file>
+
+<file path=ppt/slides/slide12.xml><?xml version="1.0" encoding="utf-8"?>
+<p:sld xmlns:p="http://schemas.openxmlformats.org/presentationml/2006/main">
+  <p:cSld>
+    <p:bg>
+      <p:bgPr>
+        <a:solidFill xmlns:a="http://schemas.openxmlformats.org/drawingml/2006/main">
+          <a:srgbClr val="F8F5EE"/>
+        </a:solidFill>
+      </p:bgPr>
+    </p:bg>
+    <p:spTree>
+      <p:nvGrpSpPr>
+        <p:cNvPr id="1" name=""/>
+        <p:cNvGrpSpPr/>
+        <p:nvPr/>
+      </p:nvGrpSpPr>
+      <p:grpSpPr>
+        <a:xfrm xmlns:a="http://schemas.openxmlformats.org/drawingml/2006/main"/>
+      </p:grpSpPr>
+      <p:sp>
+        <p:nvSpPr>
+          <p:cNvPr id="10" name="">
             <a:extLst xmlns:a="http://schemas.openxmlformats.org/drawingml/2006/main">
               <a:ext uri="{FF2B5EF4-FFF2-40B4-BE49-F238E27FC236}">
-                <a16:creationId xmlns:a16="http://schemas.microsoft.com/office/drawing/2014/main" id="{FA312AEB-511C-42C9-91F6-7364C08EB9CD}"/>
+                <a16:creationId xmlns:a16="http://schemas.microsoft.com/office/drawing/2014/main" id="{F34E1EA7-9201-452E-9222-773C98C4D30E}"/>
               </a:ext>
             </a:extLst>
           </p:cNvPr>
@@ -3958,8 +4455,8 @@
         </p:nvSpPr>
         <p:spPr>
           <a:xfrm xmlns:a="http://schemas.openxmlformats.org/drawingml/2006/main">
-            <a:off x="685800" y="4010025"/>
-            <a:ext cx="10572750" cy="714375"/>
+            <a:off x="609600" y="381000"/>
+            <a:ext cx="10972800" cy="723900"/>
           </a:xfrm>
           <a:prstGeom xmlns:a="http://schemas.openxmlformats.org/drawingml/2006/main" prst="rect">
             <a:avLst/>
@@ -3973,9 +4470,9 @@
           <a:bodyPr xmlns:a="http://schemas.openxmlformats.org/drawingml/2006/main"/>
           <a:lstStyle xmlns:a="http://schemas.openxmlformats.org/drawingml/2006/main">
             <a:defPPr>
-              <a:defRPr sz="2100" b="0">
-                <a:solidFill>
-                  <a:srgbClr val="23423C"/>
+              <a:defRPr sz="3600" b="1">
+                <a:solidFill>
+                  <a:srgbClr val="163D38"/>
                 </a:solidFill>
                 <a:latin typeface="Arial"/>
                 <a:ea typeface="Arial"/>
@@ -3985,9 +4482,9 @@
           </a:lstStyle>
           <a:p xmlns:a="http://schemas.openxmlformats.org/drawingml/2006/main">
             <a:pPr>
-              <a:defRPr sz="2100" b="0">
-                <a:solidFill>
-                  <a:srgbClr val="23423C"/>
+              <a:defRPr sz="3600" b="1">
+                <a:solidFill>
+                  <a:srgbClr val="163D38"/>
                 </a:solidFill>
                 <a:latin typeface="Arial"/>
                 <a:ea typeface="Arial"/>
@@ -3995,25 +4492,25 @@
               </a:defRPr>
             </a:pPr>
             <a:r>
-              <a:rPr sz="2100" b="0">
-                <a:solidFill>
-                  <a:srgbClr val="23423C"/>
+              <a:rPr sz="3600" b="1">
+                <a:solidFill>
+                  <a:srgbClr val="163D38"/>
                 </a:solidFill>
                 <a:latin typeface="Arial"/>
                 <a:ea typeface="Arial"/>
                 <a:cs typeface="Arial"/>
               </a:rPr>
-              <a:t>A running Pod does not prove that routing or monitoring works. Check real requests.</a:t>
-            </a:r>
-          </a:p>
-        </p:txBody>
-      </p:sp>
-      <p:sp>
-        <p:nvSpPr>
-          <p:cNvPr id="6" name="">
+              <a:t>Learnings and cleanup</a:t>
+            </a:r>
+          </a:p>
+        </p:txBody>
+      </p:sp>
+      <p:sp>
+        <p:nvSpPr>
+          <p:cNvPr id="2" name="">
             <a:extLst xmlns:a="http://schemas.openxmlformats.org/drawingml/2006/main">
               <a:ext uri="{FF2B5EF4-FFF2-40B4-BE49-F238E27FC236}">
-                <a16:creationId xmlns:a16="http://schemas.microsoft.com/office/drawing/2014/main" id="{11967BC4-0E8D-4FC8-A997-1A52BEBB132B}"/>
+                <a16:creationId xmlns:a16="http://schemas.microsoft.com/office/drawing/2014/main" id="{C62C12C9-615D-4F9E-A4BB-CB3FD87292D5}"/>
               </a:ext>
             </a:extLst>
           </p:cNvPr>
@@ -4024,8 +4521,8 @@
         </p:nvSpPr>
         <p:spPr>
           <a:xfrm xmlns:a="http://schemas.openxmlformats.org/drawingml/2006/main">
-            <a:off x="685800" y="4886325"/>
-            <a:ext cx="10572750" cy="714375"/>
+            <a:off x="628650" y="1552575"/>
+            <a:ext cx="5191125" cy="419100"/>
           </a:xfrm>
           <a:prstGeom xmlns:a="http://schemas.openxmlformats.org/drawingml/2006/main" prst="rect">
             <a:avLst/>
@@ -4039,9 +4536,9 @@
           <a:bodyPr xmlns:a="http://schemas.openxmlformats.org/drawingml/2006/main"/>
           <a:lstStyle xmlns:a="http://schemas.openxmlformats.org/drawingml/2006/main">
             <a:defPPr>
-              <a:defRPr sz="2100" b="0">
-                <a:solidFill>
-                  <a:srgbClr val="23423C"/>
+              <a:defRPr sz="2250" b="1">
+                <a:solidFill>
+                  <a:srgbClr val="163D38"/>
                 </a:solidFill>
                 <a:latin typeface="Arial"/>
                 <a:ea typeface="Arial"/>
@@ -4051,9 +4548,9 @@
           </a:lstStyle>
           <a:p xmlns:a="http://schemas.openxmlformats.org/drawingml/2006/main">
             <a:pPr>
-              <a:defRPr sz="2100" b="0">
-                <a:solidFill>
-                  <a:srgbClr val="23423C"/>
+              <a:defRPr sz="2250" b="1">
+                <a:solidFill>
+                  <a:srgbClr val="163D38"/>
                 </a:solidFill>
                 <a:latin typeface="Arial"/>
                 <a:ea typeface="Arial"/>
@@ -4061,15 +4558,462 @@
               </a:defRPr>
             </a:pPr>
             <a:r>
-              <a:rPr sz="2100" b="0">
-                <a:solidFill>
-                  <a:srgbClr val="23423C"/>
+              <a:rPr sz="2250" b="1">
+                <a:solidFill>
+                  <a:srgbClr val="163D38"/>
                 </a:solidFill>
                 <a:latin typeface="Arial"/>
                 <a:ea typeface="Arial"/>
                 <a:cs typeface="Arial"/>
               </a:rPr>
-              <a:t>This is a private classroom demo. Production needs authentication, backups and maintained ingress software.</a:t>
+              <a:t>The database handles races</a:t>
+            </a:r>
+          </a:p>
+        </p:txBody>
+      </p:sp>
+      <p:sp>
+        <p:nvSpPr>
+          <p:cNvPr id="3" name="">
+            <a:extLst xmlns:a="http://schemas.openxmlformats.org/drawingml/2006/main">
+              <a:ext uri="{FF2B5EF4-FFF2-40B4-BE49-F238E27FC236}">
+                <a16:creationId xmlns:a16="http://schemas.microsoft.com/office/drawing/2014/main" id="{B77BF6CB-D1BD-4D46-8225-F30253B45C07}"/>
+              </a:ext>
+            </a:extLst>
+          </p:cNvPr>
+          <p:cNvSpPr>
+            <a:spLocks xmlns:a="http://schemas.openxmlformats.org/drawingml/2006/main" noGrp="1"/>
+          </p:cNvSpPr>
+          <p:nvPr/>
+        </p:nvSpPr>
+        <p:spPr>
+          <a:xfrm xmlns:a="http://schemas.openxmlformats.org/drawingml/2006/main">
+            <a:off x="628650" y="2047875"/>
+            <a:ext cx="5191125" cy="876300"/>
+          </a:xfrm>
+          <a:prstGeom xmlns:a="http://schemas.openxmlformats.org/drawingml/2006/main" prst="rect">
+            <a:avLst/>
+          </a:prstGeom>
+          <a:noFill xmlns:a="http://schemas.openxmlformats.org/drawingml/2006/main"/>
+          <a:ln xmlns:a="http://schemas.openxmlformats.org/drawingml/2006/main" w="0">
+            <a:noFill/>
+          </a:ln>
+        </p:spPr>
+        <p:txBody>
+          <a:bodyPr xmlns:a="http://schemas.openxmlformats.org/drawingml/2006/main"/>
+          <a:lstStyle xmlns:a="http://schemas.openxmlformats.org/drawingml/2006/main">
+            <a:defPPr>
+              <a:defRPr sz="1875" b="0">
+                <a:solidFill>
+                  <a:srgbClr val="526963"/>
+                </a:solidFill>
+                <a:latin typeface="Arial"/>
+                <a:ea typeface="Arial"/>
+                <a:cs typeface="Arial"/>
+              </a:defRPr>
+            </a:defPPr>
+          </a:lstStyle>
+          <a:p xmlns:a="http://schemas.openxmlformats.org/drawingml/2006/main">
+            <a:pPr>
+              <a:defRPr sz="1875" b="0">
+                <a:solidFill>
+                  <a:srgbClr val="526963"/>
+                </a:solidFill>
+                <a:latin typeface="Arial"/>
+                <a:ea typeface="Arial"/>
+                <a:cs typeface="Arial"/>
+              </a:defRPr>
+            </a:pPr>
+            <a:r>
+              <a:rPr sz="1875" b="0">
+                <a:solidFill>
+                  <a:srgbClr val="526963"/>
+                </a:solidFill>
+                <a:latin typeface="Arial"/>
+                <a:ea typeface="Arial"/>
+                <a:cs typeface="Arial"/>
+              </a:rPr>
+              <a:t>A unique room/date/hour key protects simultaneous requests.</a:t>
+            </a:r>
+          </a:p>
+        </p:txBody>
+      </p:sp>
+      <p:sp>
+        <p:nvSpPr>
+          <p:cNvPr id="4" name="">
+            <a:extLst xmlns:a="http://schemas.openxmlformats.org/drawingml/2006/main">
+              <a:ext uri="{FF2B5EF4-FFF2-40B4-BE49-F238E27FC236}">
+                <a16:creationId xmlns:a16="http://schemas.microsoft.com/office/drawing/2014/main" id="{936B9494-4DD9-4912-AD7C-ECD576D8EC5A}"/>
+              </a:ext>
+            </a:extLst>
+          </p:cNvPr>
+          <p:cNvSpPr>
+            <a:spLocks xmlns:a="http://schemas.openxmlformats.org/drawingml/2006/main" noGrp="1"/>
+          </p:cNvSpPr>
+          <p:nvPr/>
+        </p:nvSpPr>
+        <p:spPr>
+          <a:xfrm xmlns:a="http://schemas.openxmlformats.org/drawingml/2006/main">
+            <a:off x="628650" y="3105150"/>
+            <a:ext cx="5191125" cy="419100"/>
+          </a:xfrm>
+          <a:prstGeom xmlns:a="http://schemas.openxmlformats.org/drawingml/2006/main" prst="rect">
+            <a:avLst/>
+          </a:prstGeom>
+          <a:noFill xmlns:a="http://schemas.openxmlformats.org/drawingml/2006/main"/>
+          <a:ln xmlns:a="http://schemas.openxmlformats.org/drawingml/2006/main" w="0">
+            <a:noFill/>
+          </a:ln>
+        </p:spPr>
+        <p:txBody>
+          <a:bodyPr xmlns:a="http://schemas.openxmlformats.org/drawingml/2006/main"/>
+          <a:lstStyle xmlns:a="http://schemas.openxmlformats.org/drawingml/2006/main">
+            <a:defPPr>
+              <a:defRPr sz="2250" b="1">
+                <a:solidFill>
+                  <a:srgbClr val="163D38"/>
+                </a:solidFill>
+                <a:latin typeface="Arial"/>
+                <a:ea typeface="Arial"/>
+                <a:cs typeface="Arial"/>
+              </a:defRPr>
+            </a:defPPr>
+          </a:lstStyle>
+          <a:p xmlns:a="http://schemas.openxmlformats.org/drawingml/2006/main">
+            <a:pPr>
+              <a:defRPr sz="2250" b="1">
+                <a:solidFill>
+                  <a:srgbClr val="163D38"/>
+                </a:solidFill>
+                <a:latin typeface="Arial"/>
+                <a:ea typeface="Arial"/>
+                <a:cs typeface="Arial"/>
+              </a:defRPr>
+            </a:pPr>
+            <a:r>
+              <a:rPr sz="2250" b="1">
+                <a:solidFill>
+                  <a:srgbClr val="163D38"/>
+                </a:solidFill>
+                <a:latin typeface="Arial"/>
+                <a:ea typeface="Arial"/>
+                <a:cs typeface="Arial"/>
+              </a:rPr>
+              <a:t>Access stays small</a:t>
+            </a:r>
+          </a:p>
+        </p:txBody>
+      </p:sp>
+      <p:sp>
+        <p:nvSpPr>
+          <p:cNvPr id="5" name="">
+            <a:extLst xmlns:a="http://schemas.openxmlformats.org/drawingml/2006/main">
+              <a:ext uri="{FF2B5EF4-FFF2-40B4-BE49-F238E27FC236}">
+                <a16:creationId xmlns:a16="http://schemas.microsoft.com/office/drawing/2014/main" id="{F7851567-A0C6-4FF7-ACE1-204B2E6109B5}"/>
+              </a:ext>
+            </a:extLst>
+          </p:cNvPr>
+          <p:cNvSpPr>
+            <a:spLocks xmlns:a="http://schemas.openxmlformats.org/drawingml/2006/main" noGrp="1"/>
+          </p:cNvSpPr>
+          <p:nvPr/>
+        </p:nvSpPr>
+        <p:spPr>
+          <a:xfrm xmlns:a="http://schemas.openxmlformats.org/drawingml/2006/main">
+            <a:off x="628650" y="3600450"/>
+            <a:ext cx="5191125" cy="876300"/>
+          </a:xfrm>
+          <a:prstGeom xmlns:a="http://schemas.openxmlformats.org/drawingml/2006/main" prst="rect">
+            <a:avLst/>
+          </a:prstGeom>
+          <a:noFill xmlns:a="http://schemas.openxmlformats.org/drawingml/2006/main"/>
+          <a:ln xmlns:a="http://schemas.openxmlformats.org/drawingml/2006/main" w="0">
+            <a:noFill/>
+          </a:ln>
+        </p:spPr>
+        <p:txBody>
+          <a:bodyPr xmlns:a="http://schemas.openxmlformats.org/drawingml/2006/main"/>
+          <a:lstStyle xmlns:a="http://schemas.openxmlformats.org/drawingml/2006/main">
+            <a:defPPr>
+              <a:defRPr sz="1875" b="0">
+                <a:solidFill>
+                  <a:srgbClr val="526963"/>
+                </a:solidFill>
+                <a:latin typeface="Arial"/>
+                <a:ea typeface="Arial"/>
+                <a:cs typeface="Arial"/>
+              </a:defRPr>
+            </a:defPPr>
+          </a:lstStyle>
+          <a:p xmlns:a="http://schemas.openxmlformats.org/drawingml/2006/main">
+            <a:pPr>
+              <a:defRPr sz="1875" b="0">
+                <a:solidFill>
+                  <a:srgbClr val="526963"/>
+                </a:solidFill>
+                <a:latin typeface="Arial"/>
+                <a:ea typeface="Arial"/>
+                <a:cs typeface="Arial"/>
+              </a:defRPr>
+            </a:pPr>
+            <a:r>
+              <a:rPr sz="1875" b="0">
+                <a:solidFill>
+                  <a:srgbClr val="526963"/>
+                </a:solidFill>
+                <a:latin typeface="Arial"/>
+                <a:ea typeface="Arial"/>
+                <a:cs typeface="Arial"/>
+              </a:rPr>
+              <a:t>Namespace deployment permissions include the required custom resource.</a:t>
+            </a:r>
+          </a:p>
+        </p:txBody>
+      </p:sp>
+      <p:sp>
+        <p:nvSpPr>
+          <p:cNvPr id="6" name="">
+            <a:extLst xmlns:a="http://schemas.openxmlformats.org/drawingml/2006/main">
+              <a:ext uri="{FF2B5EF4-FFF2-40B4-BE49-F238E27FC236}">
+                <a16:creationId xmlns:a16="http://schemas.microsoft.com/office/drawing/2014/main" id="{8A49C501-9E66-44C1-9313-EACB42451EF8}"/>
+              </a:ext>
+            </a:extLst>
+          </p:cNvPr>
+          <p:cNvSpPr>
+            <a:spLocks xmlns:a="http://schemas.openxmlformats.org/drawingml/2006/main" noGrp="1"/>
+          </p:cNvSpPr>
+          <p:nvPr/>
+        </p:nvSpPr>
+        <p:spPr>
+          <a:xfrm xmlns:a="http://schemas.openxmlformats.org/drawingml/2006/main">
+            <a:off x="628650" y="4733925"/>
+            <a:ext cx="5191125" cy="419100"/>
+          </a:xfrm>
+          <a:prstGeom xmlns:a="http://schemas.openxmlformats.org/drawingml/2006/main" prst="rect">
+            <a:avLst/>
+          </a:prstGeom>
+          <a:noFill xmlns:a="http://schemas.openxmlformats.org/drawingml/2006/main"/>
+          <a:ln xmlns:a="http://schemas.openxmlformats.org/drawingml/2006/main" w="0">
+            <a:noFill/>
+          </a:ln>
+        </p:spPr>
+        <p:txBody>
+          <a:bodyPr xmlns:a="http://schemas.openxmlformats.org/drawingml/2006/main"/>
+          <a:lstStyle xmlns:a="http://schemas.openxmlformats.org/drawingml/2006/main">
+            <a:defPPr>
+              <a:defRPr sz="2250" b="1">
+                <a:solidFill>
+                  <a:srgbClr val="163D38"/>
+                </a:solidFill>
+                <a:latin typeface="Arial"/>
+                <a:ea typeface="Arial"/>
+                <a:cs typeface="Arial"/>
+              </a:defRPr>
+            </a:defPPr>
+          </a:lstStyle>
+          <a:p xmlns:a="http://schemas.openxmlformats.org/drawingml/2006/main">
+            <a:pPr>
+              <a:defRPr sz="2250" b="1">
+                <a:solidFill>
+                  <a:srgbClr val="163D38"/>
+                </a:solidFill>
+                <a:latin typeface="Arial"/>
+                <a:ea typeface="Arial"/>
+                <a:cs typeface="Arial"/>
+              </a:defRPr>
+            </a:pPr>
+            <a:r>
+              <a:rPr sz="2250" b="1">
+                <a:solidFill>
+                  <a:srgbClr val="163D38"/>
+                </a:solidFill>
+                <a:latin typeface="Arial"/>
+                <a:ea typeface="Arial"/>
+                <a:cs typeface="Arial"/>
+              </a:rPr>
+              <a:t>The lab has limits</a:t>
+            </a:r>
+          </a:p>
+        </p:txBody>
+      </p:sp>
+      <p:sp>
+        <p:nvSpPr>
+          <p:cNvPr id="7" name="">
+            <a:extLst xmlns:a="http://schemas.openxmlformats.org/drawingml/2006/main">
+              <a:ext uri="{FF2B5EF4-FFF2-40B4-BE49-F238E27FC236}">
+                <a16:creationId xmlns:a16="http://schemas.microsoft.com/office/drawing/2014/main" id="{3D17B93A-9869-48B5-9EAC-2372EE70370D}"/>
+              </a:ext>
+            </a:extLst>
+          </p:cNvPr>
+          <p:cNvSpPr>
+            <a:spLocks xmlns:a="http://schemas.openxmlformats.org/drawingml/2006/main" noGrp="1"/>
+          </p:cNvSpPr>
+          <p:nvPr/>
+        </p:nvSpPr>
+        <p:spPr>
+          <a:xfrm xmlns:a="http://schemas.openxmlformats.org/drawingml/2006/main">
+            <a:off x="628650" y="5229225"/>
+            <a:ext cx="5191125" cy="876300"/>
+          </a:xfrm>
+          <a:prstGeom xmlns:a="http://schemas.openxmlformats.org/drawingml/2006/main" prst="rect">
+            <a:avLst/>
+          </a:prstGeom>
+          <a:noFill xmlns:a="http://schemas.openxmlformats.org/drawingml/2006/main"/>
+          <a:ln xmlns:a="http://schemas.openxmlformats.org/drawingml/2006/main" w="0">
+            <a:noFill/>
+          </a:ln>
+        </p:spPr>
+        <p:txBody>
+          <a:bodyPr xmlns:a="http://schemas.openxmlformats.org/drawingml/2006/main"/>
+          <a:lstStyle xmlns:a="http://schemas.openxmlformats.org/drawingml/2006/main">
+            <a:defPPr>
+              <a:defRPr sz="1875" b="0">
+                <a:solidFill>
+                  <a:srgbClr val="526963"/>
+                </a:solidFill>
+                <a:latin typeface="Arial"/>
+                <a:ea typeface="Arial"/>
+                <a:cs typeface="Arial"/>
+              </a:defRPr>
+            </a:defPPr>
+          </a:lstStyle>
+          <a:p xmlns:a="http://schemas.openxmlformats.org/drawingml/2006/main">
+            <a:pPr>
+              <a:defRPr sz="1875" b="0">
+                <a:solidFill>
+                  <a:srgbClr val="526963"/>
+                </a:solidFill>
+                <a:latin typeface="Arial"/>
+                <a:ea typeface="Arial"/>
+                <a:cs typeface="Arial"/>
+              </a:defRPr>
+            </a:pPr>
+            <a:r>
+              <a:rPr sz="1875" b="0">
+                <a:solidFill>
+                  <a:srgbClr val="526963"/>
+                </a:solidFill>
+                <a:latin typeface="Arial"/>
+                <a:ea typeface="Arial"/>
+                <a:cs typeface="Arial"/>
+              </a:rPr>
+              <a:t>Authentication, TLS, reliable backups and database HA remain production work.</a:t>
+            </a:r>
+          </a:p>
+        </p:txBody>
+      </p:sp>
+      <p:pic>
+        <p:nvPicPr>
+          <p:cNvPr id="8" name="">
+            <a:extLst xmlns:a="http://schemas.openxmlformats.org/drawingml/2006/main">
+              <a:ext uri="{FF2B5EF4-FFF2-40B4-BE49-F238E27FC236}">
+                <a16:creationId xmlns:a16="http://schemas.microsoft.com/office/drawing/2014/main" id="{69EC48E0-6B9A-4147-B4C1-90EF58891248}"/>
+              </a:ext>
+            </a:extLst>
+          </p:cNvPr>
+          <p:cNvPicPr>
+            <a:picLocks xmlns:a="http://schemas.openxmlformats.org/drawingml/2006/main" noChangeAspect="1"/>
+          </p:cNvPicPr>
+          <p:nvPr/>
+        </p:nvPicPr>
+        <p:blipFill>
+          <a:blip xmlns:r="http://schemas.openxmlformats.org/officeDocument/2006/relationships" xmlns:a="http://schemas.openxmlformats.org/drawingml/2006/main" r:embed="Rb2be7e04909f4908"/>
+          <a:stretch xmlns:a="http://schemas.openxmlformats.org/drawingml/2006/main"/>
+        </p:blipFill>
+        <p:spPr>
+          <a:xfrm xmlns:a="http://schemas.openxmlformats.org/drawingml/2006/main">
+            <a:off x="6219825" y="2025551"/>
+            <a:ext cx="5362575" cy="3016448"/>
+          </a:xfrm>
+          <a:prstGeom xmlns:a="http://schemas.openxmlformats.org/drawingml/2006/main" prst="rect">
+            <a:avLst/>
+          </a:prstGeom>
+        </p:spPr>
+      </p:pic>
+      <p:sp>
+        <p:nvSpPr>
+          <p:cNvPr id="9" name="">
+            <a:extLst xmlns:a="http://schemas.openxmlformats.org/drawingml/2006/main">
+              <a:ext uri="{FF2B5EF4-FFF2-40B4-BE49-F238E27FC236}">
+                <a16:creationId xmlns:a16="http://schemas.microsoft.com/office/drawing/2014/main" id="{8A423D52-7EE1-4313-BAC9-3B4063DF3F23}"/>
+              </a:ext>
+            </a:extLst>
+          </p:cNvPr>
+          <p:cNvSpPr>
+            <a:spLocks xmlns:a="http://schemas.openxmlformats.org/drawingml/2006/main" noGrp="1"/>
+          </p:cNvSpPr>
+          <p:nvPr/>
+        </p:nvSpPr>
+        <p:spPr>
+          <a:xfrm xmlns:a="http://schemas.openxmlformats.org/drawingml/2006/main">
+            <a:off x="6448425" y="5676900"/>
+            <a:ext cx="4953000" cy="762000"/>
+          </a:xfrm>
+          <a:prstGeom xmlns:a="http://schemas.openxmlformats.org/drawingml/2006/main" prst="rect">
+            <a:avLst/>
+          </a:prstGeom>
+          <a:noFill xmlns:a="http://schemas.openxmlformats.org/drawingml/2006/main"/>
+          <a:ln xmlns:a="http://schemas.openxmlformats.org/drawingml/2006/main" w="0">
+            <a:noFill/>
+          </a:ln>
+        </p:spPr>
+        <p:txBody>
+          <a:bodyPr xmlns:a="http://schemas.openxmlformats.org/drawingml/2006/main"/>
+          <a:lstStyle xmlns:a="http://schemas.openxmlformats.org/drawingml/2006/main">
+            <a:defPPr>
+              <a:defRPr sz="1950" b="1">
+                <a:solidFill>
+                  <a:srgbClr val="163D38"/>
+                </a:solidFill>
+                <a:latin typeface="Arial"/>
+                <a:ea typeface="Arial"/>
+                <a:cs typeface="Arial"/>
+              </a:defRPr>
+            </a:defPPr>
+          </a:lstStyle>
+          <a:p xmlns:a="http://schemas.openxmlformats.org/drawingml/2006/main">
+            <a:pPr>
+              <a:defRPr sz="1950" b="1">
+                <a:solidFill>
+                  <a:srgbClr val="163D38"/>
+                </a:solidFill>
+                <a:latin typeface="Arial"/>
+                <a:ea typeface="Arial"/>
+                <a:cs typeface="Arial"/>
+              </a:defRPr>
+            </a:pPr>
+            <a:r>
+              <a:rPr sz="1950" b="1">
+                <a:solidFill>
+                  <a:srgbClr val="163D38"/>
+                </a:solidFill>
+                <a:latin typeface="Arial"/>
+                <a:ea typeface="Arial"/>
+                <a:cs typeface="Arial"/>
+              </a:rPr>
+              <a:t>Earlier lab: verified teardown</a:t>
+            </a:r>
+          </a:p>
+          <a:p xmlns:a="http://schemas.openxmlformats.org/drawingml/2006/main">
+            <a:pPr>
+              <a:defRPr sz="1950" b="1">
+                <a:solidFill>
+                  <a:srgbClr val="163D38"/>
+                </a:solidFill>
+                <a:latin typeface="Arial"/>
+                <a:ea typeface="Arial"/>
+                <a:cs typeface="Arial"/>
+              </a:defRPr>
+            </a:pPr>
+            <a:r>
+              <a:rPr sz="1950" b="1">
+                <a:solidFill>
+                  <a:srgbClr val="163D38"/>
+                </a:solidFill>
+                <a:latin typeface="Arial"/>
+                <a:ea typeface="Arial"/>
+                <a:cs typeface="Arial"/>
+              </a:rPr>
+              <a:t>New lab: cleanup after recording</a:t>
             </a:r>
           </a:p>
         </p:txBody>
@@ -4077,7 +5021,7 @@
     </p:spTree>
     <p:extLst>
       <p:ext uri="{BB962C8B-B14F-4D97-AF65-F5344CB8AC3E}">
-        <p14:creationId xmlns:p14="http://schemas.microsoft.com/office/powerpoint/2010/main" val="78124033"/>
+        <p14:creationId xmlns:p14="http://schemas.microsoft.com/office/powerpoint/2010/main" val="483527580"/>
       </p:ext>
     </p:extLst>
   </p:cSld>
@@ -4090,7 +5034,7 @@
     <p:bg>
       <p:bgPr>
         <a:solidFill xmlns:a="http://schemas.openxmlformats.org/drawingml/2006/main">
-          <a:srgbClr val="F5F4EF"/>
+          <a:srgbClr val="F8F5EE"/>
         </a:solidFill>
       </p:bgPr>
     </p:bg>
@@ -4108,7 +5052,7 @@
           <p:cNvPr id="6" name="">
             <a:extLst xmlns:a="http://schemas.openxmlformats.org/drawingml/2006/main">
               <a:ext uri="{FF2B5EF4-FFF2-40B4-BE49-F238E27FC236}">
-                <a16:creationId xmlns:a16="http://schemas.microsoft.com/office/drawing/2014/main" id="{F9C7ADA1-7C8E-4B95-B4DA-9C9E8712F3E8}"/>
+                <a16:creationId xmlns:a16="http://schemas.microsoft.com/office/drawing/2014/main" id="{EE7B6FAC-709D-4A31-81D1-4A2B8DA53110}"/>
               </a:ext>
             </a:extLst>
           </p:cNvPr>
@@ -4119,8 +5063,8 @@
         </p:nvSpPr>
         <p:spPr>
           <a:xfrm xmlns:a="http://schemas.openxmlformats.org/drawingml/2006/main">
-            <a:off x="609600" y="476250"/>
-            <a:ext cx="10858500" cy="714375"/>
+            <a:off x="609600" y="381000"/>
+            <a:ext cx="10972800" cy="723900"/>
           </a:xfrm>
           <a:prstGeom xmlns:a="http://schemas.openxmlformats.org/drawingml/2006/main" prst="rect">
             <a:avLst/>
@@ -4134,9 +5078,9 @@
           <a:bodyPr xmlns:a="http://schemas.openxmlformats.org/drawingml/2006/main"/>
           <a:lstStyle xmlns:a="http://schemas.openxmlformats.org/drawingml/2006/main">
             <a:defPPr>
-              <a:defRPr sz="3300" b="1">
-                <a:solidFill>
-                  <a:srgbClr val="23423C"/>
+              <a:defRPr sz="3600" b="1">
+                <a:solidFill>
+                  <a:srgbClr val="163D38"/>
                 </a:solidFill>
                 <a:latin typeface="Arial"/>
                 <a:ea typeface="Arial"/>
@@ -4146,9 +5090,9 @@
           </a:lstStyle>
           <a:p xmlns:a="http://schemas.openxmlformats.org/drawingml/2006/main">
             <a:pPr>
-              <a:defRPr sz="3300" b="1">
-                <a:solidFill>
-                  <a:srgbClr val="23423C"/>
+              <a:defRPr sz="3600" b="1">
+                <a:solidFill>
+                  <a:srgbClr val="163D38"/>
                 </a:solidFill>
                 <a:latin typeface="Arial"/>
                 <a:ea typeface="Arial"/>
@@ -4156,9 +5100,9 @@
               </a:defRPr>
             </a:pPr>
             <a:r>
-              <a:rPr sz="3300" b="1">
-                <a:solidFill>
-                  <a:srgbClr val="23423C"/>
+              <a:rPr sz="3600" b="1">
+                <a:solidFill>
+                  <a:srgbClr val="163D38"/>
                 </a:solidFill>
                 <a:latin typeface="Arial"/>
                 <a:ea typeface="Arial"/>
@@ -4174,7 +5118,7 @@
           <p:cNvPr id="2" name="">
             <a:extLst xmlns:a="http://schemas.openxmlformats.org/drawingml/2006/main">
               <a:ext uri="{FF2B5EF4-FFF2-40B4-BE49-F238E27FC236}">
-                <a16:creationId xmlns:a16="http://schemas.microsoft.com/office/drawing/2014/main" id="{428C4AD8-B13C-4414-B6CD-BBAFDE360F62}"/>
+                <a16:creationId xmlns:a16="http://schemas.microsoft.com/office/drawing/2014/main" id="{61E78AC2-A551-4D08-9687-6D210EEC9AC5}"/>
               </a:ext>
             </a:extLst>
           </p:cNvPr>
@@ -4185,8 +5129,8 @@
         </p:nvSpPr>
         <p:spPr>
           <a:xfrm xmlns:a="http://schemas.openxmlformats.org/drawingml/2006/main">
-            <a:off x="685800" y="1485900"/>
-            <a:ext cx="5524500" cy="619125"/>
+            <a:off x="609600" y="1600200"/>
+            <a:ext cx="3238500" cy="1257300"/>
           </a:xfrm>
           <a:prstGeom xmlns:a="http://schemas.openxmlformats.org/drawingml/2006/main" prst="rect">
             <a:avLst/>
@@ -4200,9 +5144,9 @@
           <a:bodyPr xmlns:a="http://schemas.openxmlformats.org/drawingml/2006/main"/>
           <a:lstStyle xmlns:a="http://schemas.openxmlformats.org/drawingml/2006/main">
             <a:defPPr>
-              <a:defRPr sz="2400" b="1">
-                <a:solidFill>
-                  <a:srgbClr val="23423C"/>
+              <a:defRPr sz="3750" b="1">
+                <a:solidFill>
+                  <a:srgbClr val="163D38"/>
                 </a:solidFill>
                 <a:latin typeface="Arial"/>
                 <a:ea typeface="Arial"/>
@@ -4212,9 +5156,9 @@
           </a:lstStyle>
           <a:p xmlns:a="http://schemas.openxmlformats.org/drawingml/2006/main">
             <a:pPr>
-              <a:defRPr sz="2400" b="1">
-                <a:solidFill>
-                  <a:srgbClr val="23423C"/>
+              <a:defRPr sz="3750" b="1">
+                <a:solidFill>
+                  <a:srgbClr val="163D38"/>
                 </a:solidFill>
                 <a:latin typeface="Arial"/>
                 <a:ea typeface="Arial"/>
@@ -4222,15 +5166,38 @@
               </a:defRPr>
             </a:pPr>
             <a:r>
-              <a:rPr sz="2400" b="1">
-                <a:solidFill>
-                  <a:srgbClr val="23423C"/>
+              <a:rPr sz="3750" b="1">
+                <a:solidFill>
+                  <a:srgbClr val="163D38"/>
                 </a:solidFill>
                 <a:latin typeface="Arial"/>
                 <a:ea typeface="Arial"/>
                 <a:cs typeface="Arial"/>
               </a:rPr>
-              <a:t>One room, one hour, one booking</a:t>
+              <a:t>A room for</a:t>
+            </a:r>
+          </a:p>
+          <a:p xmlns:a="http://schemas.openxmlformats.org/drawingml/2006/main">
+            <a:pPr>
+              <a:defRPr sz="3750" b="1">
+                <a:solidFill>
+                  <a:srgbClr val="163D38"/>
+                </a:solidFill>
+                <a:latin typeface="Arial"/>
+                <a:ea typeface="Arial"/>
+                <a:cs typeface="Arial"/>
+              </a:defRPr>
+            </a:pPr>
+            <a:r>
+              <a:rPr sz="3750" b="1">
+                <a:solidFill>
+                  <a:srgbClr val="163D38"/>
+                </a:solidFill>
+                <a:latin typeface="Arial"/>
+                <a:ea typeface="Arial"/>
+                <a:cs typeface="Arial"/>
+              </a:rPr>
+              <a:t>one hour</a:t>
             </a:r>
           </a:p>
         </p:txBody>
@@ -4240,7 +5207,7 @@
           <p:cNvPr id="3" name="">
             <a:extLst xmlns:a="http://schemas.openxmlformats.org/drawingml/2006/main">
               <a:ext uri="{FF2B5EF4-FFF2-40B4-BE49-F238E27FC236}">
-                <a16:creationId xmlns:a16="http://schemas.microsoft.com/office/drawing/2014/main" id="{A5D70983-563D-4B73-BAFA-057777BA5538}"/>
+                <a16:creationId xmlns:a16="http://schemas.microsoft.com/office/drawing/2014/main" id="{2E88EB7A-B997-4189-88FF-0215D32716C6}"/>
               </a:ext>
             </a:extLst>
           </p:cNvPr>
@@ -4251,8 +5218,8 @@
         </p:nvSpPr>
         <p:spPr>
           <a:xfrm xmlns:a="http://schemas.openxmlformats.org/drawingml/2006/main">
-            <a:off x="685800" y="2324100"/>
-            <a:ext cx="4714875" cy="2190750"/>
+            <a:off x="647700" y="3143250"/>
+            <a:ext cx="3143250" cy="1066800"/>
           </a:xfrm>
           <a:prstGeom xmlns:a="http://schemas.openxmlformats.org/drawingml/2006/main" prst="rect">
             <a:avLst/>
@@ -4268,7 +5235,7 @@
             <a:defPPr>
               <a:defRPr sz="2175" b="0">
                 <a:solidFill>
-                  <a:srgbClr val="23423C"/>
+                  <a:srgbClr val="526963"/>
                 </a:solidFill>
                 <a:latin typeface="Arial"/>
                 <a:ea typeface="Arial"/>
@@ -4280,7 +5247,7 @@
             <a:pPr>
               <a:defRPr sz="2175" b="0">
                 <a:solidFill>
-                  <a:srgbClr val="23423C"/>
+                  <a:srgbClr val="526963"/>
                 </a:solidFill>
                 <a:latin typeface="Arial"/>
                 <a:ea typeface="Arial"/>
@@ -4290,13 +5257,36 @@
             <a:r>
               <a:rPr sz="2175" b="0">
                 <a:solidFill>
-                  <a:srgbClr val="23423C"/>
+                  <a:srgbClr val="526963"/>
                 </a:solidFill>
                 <a:latin typeface="Arial"/>
                 <a:ea typeface="Arial"/>
                 <a:cs typeface="Arial"/>
               </a:rPr>
-              <a:t>Students can reserve a room, change the time or cancel. Room capacity checks and a PostgreSQL unique constraint prevent invalid or overlapping bookings.</a:t>
+              <a:t>Book an available slot.</a:t>
+            </a:r>
+          </a:p>
+          <a:p xmlns:a="http://schemas.openxmlformats.org/drawingml/2006/main">
+            <a:pPr>
+              <a:defRPr sz="2175" b="0">
+                <a:solidFill>
+                  <a:srgbClr val="526963"/>
+                </a:solidFill>
+                <a:latin typeface="Arial"/>
+                <a:ea typeface="Arial"/>
+                <a:cs typeface="Arial"/>
+              </a:defRPr>
+            </a:pPr>
+            <a:r>
+              <a:rPr sz="2175" b="0">
+                <a:solidFill>
+                  <a:srgbClr val="526963"/>
+                </a:solidFill>
+                <a:latin typeface="Arial"/>
+                <a:ea typeface="Arial"/>
+                <a:cs typeface="Arial"/>
+              </a:rPr>
+              <a:t>Change or cancel it later.</a:t>
             </a:r>
           </a:p>
         </p:txBody>
@@ -4306,7 +5296,7 @@
           <p:cNvPr id="4" name="">
             <a:extLst xmlns:a="http://schemas.openxmlformats.org/drawingml/2006/main">
               <a:ext uri="{FF2B5EF4-FFF2-40B4-BE49-F238E27FC236}">
-                <a16:creationId xmlns:a16="http://schemas.microsoft.com/office/drawing/2014/main" id="{DF138C2B-3B8F-4636-87F9-4D01416E813F}"/>
+                <a16:creationId xmlns:a16="http://schemas.microsoft.com/office/drawing/2014/main" id="{00DC64B2-DFE1-4CF9-994A-09A3DCD28260}"/>
               </a:ext>
             </a:extLst>
           </p:cNvPr>
@@ -4317,8 +5307,8 @@
         </p:nvSpPr>
         <p:spPr>
           <a:xfrm xmlns:a="http://schemas.openxmlformats.org/drawingml/2006/main">
-            <a:off x="685800" y="5048250"/>
-            <a:ext cx="4714875" cy="857250"/>
+            <a:off x="647700" y="4895850"/>
+            <a:ext cx="3143250" cy="895350"/>
           </a:xfrm>
           <a:prstGeom xmlns:a="http://schemas.openxmlformats.org/drawingml/2006/main" prst="rect">
             <a:avLst/>
@@ -4332,9 +5322,9 @@
           <a:bodyPr xmlns:a="http://schemas.openxmlformats.org/drawingml/2006/main"/>
           <a:lstStyle xmlns:a="http://schemas.openxmlformats.org/drawingml/2006/main">
             <a:defPPr>
-              <a:defRPr sz="1800" b="0">
-                <a:solidFill>
-                  <a:srgbClr val="687B64"/>
+              <a:defRPr sz="1875" b="0">
+                <a:solidFill>
+                  <a:srgbClr val="163D38"/>
                 </a:solidFill>
                 <a:latin typeface="Arial"/>
                 <a:ea typeface="Arial"/>
@@ -4344,9 +5334,9 @@
           </a:lstStyle>
           <a:p xmlns:a="http://schemas.openxmlformats.org/drawingml/2006/main">
             <a:pPr>
-              <a:defRPr sz="1800" b="0">
-                <a:solidFill>
-                  <a:srgbClr val="687B64"/>
+              <a:defRPr sz="1875" b="0">
+                <a:solidFill>
+                  <a:srgbClr val="163D38"/>
                 </a:solidFill>
                 <a:latin typeface="Arial"/>
                 <a:ea typeface="Arial"/>
@@ -4354,15 +5344,38 @@
               </a:defRPr>
             </a:pPr>
             <a:r>
-              <a:rPr sz="1800" b="0">
-                <a:solidFill>
-                  <a:srgbClr val="687B64"/>
+              <a:rPr sz="1875" b="0">
+                <a:solidFill>
+                  <a:srgbClr val="163D38"/>
                 </a:solidFill>
                 <a:latin typeface="Arial"/>
                 <a:ea typeface="Arial"/>
                 <a:cs typeface="Arial"/>
               </a:rPr>
-              <a:t>Classroom data only. The app has no user authentication.</a:t>
+              <a:t>Room-capacity checks</a:t>
+            </a:r>
+          </a:p>
+          <a:p xmlns:a="http://schemas.openxmlformats.org/drawingml/2006/main">
+            <a:pPr>
+              <a:defRPr sz="1875" b="0">
+                <a:solidFill>
+                  <a:srgbClr val="163D38"/>
+                </a:solidFill>
+                <a:latin typeface="Arial"/>
+                <a:ea typeface="Arial"/>
+                <a:cs typeface="Arial"/>
+              </a:defRPr>
+            </a:pPr>
+            <a:r>
+              <a:rPr sz="1875" b="0">
+                <a:solidFill>
+                  <a:srgbClr val="163D38"/>
+                </a:solidFill>
+                <a:latin typeface="Arial"/>
+                <a:ea typeface="Arial"/>
+                <a:cs typeface="Arial"/>
+              </a:rPr>
+              <a:t>Duplicate-slot protection</a:t>
             </a:r>
           </a:p>
         </p:txBody>
@@ -4372,7 +5385,7 @@
           <p:cNvPr id="5" name="">
             <a:extLst xmlns:a="http://schemas.openxmlformats.org/drawingml/2006/main">
               <a:ext uri="{FF2B5EF4-FFF2-40B4-BE49-F238E27FC236}">
-                <a16:creationId xmlns:a16="http://schemas.microsoft.com/office/drawing/2014/main" id="{92E74E76-6A03-415F-BE73-390EC722A09B}"/>
+                <a16:creationId xmlns:a16="http://schemas.microsoft.com/office/drawing/2014/main" id="{5539C2CD-2A08-43B6-A1C7-882A6EF9C239}"/>
               </a:ext>
             </a:extLst>
           </p:cNvPr>
@@ -4382,13 +5395,13 @@
           <p:nvPr/>
         </p:nvPicPr>
         <p:blipFill>
-          <a:blip xmlns:r="http://schemas.openxmlformats.org/officeDocument/2006/relationships" xmlns:a="http://schemas.openxmlformats.org/drawingml/2006/main" r:embed="R7a745fccb7b844c4"/>
+          <a:blip xmlns:r="http://schemas.openxmlformats.org/officeDocument/2006/relationships" xmlns:a="http://schemas.openxmlformats.org/drawingml/2006/main" r:embed="R95f40028a0474aac"/>
           <a:stretch xmlns:a="http://schemas.openxmlformats.org/drawingml/2006/main"/>
         </p:blipFill>
         <p:spPr>
           <a:xfrm xmlns:a="http://schemas.openxmlformats.org/drawingml/2006/main">
-            <a:off x="6002821" y="1447800"/>
-            <a:ext cx="5234609" cy="4857750"/>
+            <a:off x="5086862" y="1276350"/>
+            <a:ext cx="5542527" cy="5143500"/>
           </a:xfrm>
           <a:prstGeom xmlns:a="http://schemas.openxmlformats.org/drawingml/2006/main" prst="rect">
             <a:avLst/>
@@ -4398,7 +5411,7 @@
     </p:spTree>
     <p:extLst>
       <p:ext uri="{BB962C8B-B14F-4D97-AF65-F5344CB8AC3E}">
-        <p14:creationId xmlns:p14="http://schemas.microsoft.com/office/powerpoint/2010/main" val="1805168408"/>
+        <p14:creationId xmlns:p14="http://schemas.microsoft.com/office/powerpoint/2010/main" val="1323773496"/>
       </p:ext>
     </p:extLst>
   </p:cSld>
@@ -4411,7 +5424,7 @@
     <p:bg>
       <p:bgPr>
         <a:solidFill xmlns:a="http://schemas.openxmlformats.org/drawingml/2006/main">
-          <a:srgbClr val="F5F4EF"/>
+          <a:srgbClr val="F8F5EE"/>
         </a:solidFill>
       </p:bgPr>
     </p:bg>
@@ -4426,10 +5439,10 @@
       </p:grpSpPr>
       <p:sp>
         <p:nvSpPr>
-          <p:cNvPr id="7" name="">
+          <p:cNvPr id="16" name="">
             <a:extLst xmlns:a="http://schemas.openxmlformats.org/drawingml/2006/main">
               <a:ext uri="{FF2B5EF4-FFF2-40B4-BE49-F238E27FC236}">
-                <a16:creationId xmlns:a16="http://schemas.microsoft.com/office/drawing/2014/main" id="{A1135823-D75A-449B-92E6-F7F3701AEEEE}"/>
+                <a16:creationId xmlns:a16="http://schemas.microsoft.com/office/drawing/2014/main" id="{A0572795-031E-48A3-B342-F8E37DE8883B}"/>
               </a:ext>
             </a:extLst>
           </p:cNvPr>
@@ -4440,8 +5453,8 @@
         </p:nvSpPr>
         <p:spPr>
           <a:xfrm xmlns:a="http://schemas.openxmlformats.org/drawingml/2006/main">
-            <a:off x="609600" y="476250"/>
-            <a:ext cx="10858500" cy="714375"/>
+            <a:off x="609600" y="381000"/>
+            <a:ext cx="10972800" cy="723900"/>
           </a:xfrm>
           <a:prstGeom xmlns:a="http://schemas.openxmlformats.org/drawingml/2006/main" prst="rect">
             <a:avLst/>
@@ -4455,9 +5468,9 @@
           <a:bodyPr xmlns:a="http://schemas.openxmlformats.org/drawingml/2006/main"/>
           <a:lstStyle xmlns:a="http://schemas.openxmlformats.org/drawingml/2006/main">
             <a:defPPr>
-              <a:defRPr sz="3300" b="1">
-                <a:solidFill>
-                  <a:srgbClr val="23423C"/>
+              <a:defRPr sz="3600" b="1">
+                <a:solidFill>
+                  <a:srgbClr val="163D38"/>
                 </a:solidFill>
                 <a:latin typeface="Arial"/>
                 <a:ea typeface="Arial"/>
@@ -4467,9 +5480,9 @@
           </a:lstStyle>
           <a:p xmlns:a="http://schemas.openxmlformats.org/drawingml/2006/main">
             <a:pPr>
-              <a:defRPr sz="3300" b="1">
-                <a:solidFill>
-                  <a:srgbClr val="23423C"/>
+              <a:defRPr sz="3600" b="1">
+                <a:solidFill>
+                  <a:srgbClr val="163D38"/>
                 </a:solidFill>
                 <a:latin typeface="Arial"/>
                 <a:ea typeface="Arial"/>
@@ -4477,15 +5490,15 @@
               </a:defRPr>
             </a:pPr>
             <a:r>
-              <a:rPr sz="3300" b="1">
-                <a:solidFill>
-                  <a:srgbClr val="23423C"/>
+              <a:rPr sz="3600" b="1">
+                <a:solidFill>
+                  <a:srgbClr val="163D38"/>
                 </a:solidFill>
                 <a:latin typeface="Arial"/>
                 <a:ea typeface="Arial"/>
                 <a:cs typeface="Arial"/>
               </a:rPr>
-              <a:t>Tech stack</a:t>
+              <a:t>Application architecture</a:t>
             </a:r>
           </a:p>
         </p:txBody>
@@ -4495,7 +5508,7 @@
           <p:cNvPr id="2" name="">
             <a:extLst xmlns:a="http://schemas.openxmlformats.org/drawingml/2006/main">
               <a:ext uri="{FF2B5EF4-FFF2-40B4-BE49-F238E27FC236}">
-                <a16:creationId xmlns:a16="http://schemas.microsoft.com/office/drawing/2014/main" id="{607F32FA-3DA6-4B87-AEEB-7BFD90990EBA}"/>
+                <a16:creationId xmlns:a16="http://schemas.microsoft.com/office/drawing/2014/main" id="{91FBB009-5E91-40B5-9BCA-AC426CF28FE9}"/>
               </a:ext>
             </a:extLst>
           </p:cNvPr>
@@ -4506,8 +5519,8 @@
         </p:nvSpPr>
         <p:spPr>
           <a:xfrm xmlns:a="http://schemas.openxmlformats.org/drawingml/2006/main">
-            <a:off x="685800" y="1524000"/>
-            <a:ext cx="10572750" cy="714375"/>
+            <a:off x="609600" y="1676400"/>
+            <a:ext cx="2286000" cy="571500"/>
           </a:xfrm>
           <a:prstGeom xmlns:a="http://schemas.openxmlformats.org/drawingml/2006/main" prst="rect">
             <a:avLst/>
@@ -4521,9 +5534,9 @@
           <a:bodyPr xmlns:a="http://schemas.openxmlformats.org/drawingml/2006/main"/>
           <a:lstStyle xmlns:a="http://schemas.openxmlformats.org/drawingml/2006/main">
             <a:defPPr>
-              <a:defRPr sz="2100" b="0">
-                <a:solidFill>
-                  <a:srgbClr val="23423C"/>
+              <a:defRPr sz="3300" b="1">
+                <a:solidFill>
+                  <a:srgbClr val="D76F3E"/>
                 </a:solidFill>
                 <a:latin typeface="Arial"/>
                 <a:ea typeface="Arial"/>
@@ -4533,9 +5546,9 @@
           </a:lstStyle>
           <a:p xmlns:a="http://schemas.openxmlformats.org/drawingml/2006/main">
             <a:pPr>
-              <a:defRPr sz="2100" b="0">
-                <a:solidFill>
-                  <a:srgbClr val="23423C"/>
+              <a:defRPr sz="3300" b="1">
+                <a:solidFill>
+                  <a:srgbClr val="D76F3E"/>
                 </a:solidFill>
                 <a:latin typeface="Arial"/>
                 <a:ea typeface="Arial"/>
@@ -4543,15 +5556,15 @@
               </a:defRPr>
             </a:pPr>
             <a:r>
-              <a:rPr sz="2100" b="0">
-                <a:solidFill>
-                  <a:srgbClr val="23423C"/>
+              <a:rPr sz="3300" b="1">
+                <a:solidFill>
+                  <a:srgbClr val="D76F3E"/>
                 </a:solidFill>
                 <a:latin typeface="Arial"/>
                 <a:ea typeface="Arial"/>
                 <a:cs typeface="Arial"/>
               </a:rPr>
-              <a:t>React and Vite serve the booking form through Nginx.</a:t>
+              <a:t>01</a:t>
             </a:r>
           </a:p>
         </p:txBody>
@@ -4561,7 +5574,7 @@
           <p:cNvPr id="3" name="">
             <a:extLst xmlns:a="http://schemas.openxmlformats.org/drawingml/2006/main">
               <a:ext uri="{FF2B5EF4-FFF2-40B4-BE49-F238E27FC236}">
-                <a16:creationId xmlns:a16="http://schemas.microsoft.com/office/drawing/2014/main" id="{C26B8C9B-664A-4864-B324-D29667D406E1}"/>
+                <a16:creationId xmlns:a16="http://schemas.microsoft.com/office/drawing/2014/main" id="{A7F53644-43BC-4476-903D-03583C4A2D89}"/>
               </a:ext>
             </a:extLst>
           </p:cNvPr>
@@ -4572,8 +5585,8 @@
         </p:nvSpPr>
         <p:spPr>
           <a:xfrm xmlns:a="http://schemas.openxmlformats.org/drawingml/2006/main">
-            <a:off x="685800" y="2400300"/>
-            <a:ext cx="10572750" cy="714375"/>
+            <a:off x="609600" y="2381250"/>
+            <a:ext cx="2343150" cy="619125"/>
           </a:xfrm>
           <a:prstGeom xmlns:a="http://schemas.openxmlformats.org/drawingml/2006/main" prst="rect">
             <a:avLst/>
@@ -4587,9 +5600,9 @@
           <a:bodyPr xmlns:a="http://schemas.openxmlformats.org/drawingml/2006/main"/>
           <a:lstStyle xmlns:a="http://schemas.openxmlformats.org/drawingml/2006/main">
             <a:defPPr>
-              <a:defRPr sz="2100" b="0">
-                <a:solidFill>
-                  <a:srgbClr val="23423C"/>
+              <a:defRPr sz="2325" b="1">
+                <a:solidFill>
+                  <a:srgbClr val="163D38"/>
                 </a:solidFill>
                 <a:latin typeface="Arial"/>
                 <a:ea typeface="Arial"/>
@@ -4599,9 +5612,9 @@
           </a:lstStyle>
           <a:p xmlns:a="http://schemas.openxmlformats.org/drawingml/2006/main">
             <a:pPr>
-              <a:defRPr sz="2100" b="0">
-                <a:solidFill>
-                  <a:srgbClr val="23423C"/>
+              <a:defRPr sz="2325" b="1">
+                <a:solidFill>
+                  <a:srgbClr val="163D38"/>
                 </a:solidFill>
                 <a:latin typeface="Arial"/>
                 <a:ea typeface="Arial"/>
@@ -4609,15 +5622,15 @@
               </a:defRPr>
             </a:pPr>
             <a:r>
-              <a:rPr sz="2100" b="0">
-                <a:solidFill>
-                  <a:srgbClr val="23423C"/>
+              <a:rPr sz="2325" b="1">
+                <a:solidFill>
+                  <a:srgbClr val="163D38"/>
                 </a:solidFill>
                 <a:latin typeface="Arial"/>
                 <a:ea typeface="Arial"/>
                 <a:cs typeface="Arial"/>
               </a:rPr>
-              <a:t>FastAPI handles CRUD, validation, health and metrics.</a:t>
+              <a:t>Browser</a:t>
             </a:r>
           </a:p>
         </p:txBody>
@@ -4627,7 +5640,7 @@
           <p:cNvPr id="4" name="">
             <a:extLst xmlns:a="http://schemas.openxmlformats.org/drawingml/2006/main">
               <a:ext uri="{FF2B5EF4-FFF2-40B4-BE49-F238E27FC236}">
-                <a16:creationId xmlns:a16="http://schemas.microsoft.com/office/drawing/2014/main" id="{AFEE944C-7C45-4FCB-8167-BD2C6373D5AB}"/>
+                <a16:creationId xmlns:a16="http://schemas.microsoft.com/office/drawing/2014/main" id="{D7DC18F9-748D-4A20-9E47-92CE3F09317A}"/>
               </a:ext>
             </a:extLst>
           </p:cNvPr>
@@ -4638,8 +5651,8 @@
         </p:nvSpPr>
         <p:spPr>
           <a:xfrm xmlns:a="http://schemas.openxmlformats.org/drawingml/2006/main">
-            <a:off x="685800" y="3276600"/>
-            <a:ext cx="10572750" cy="714375"/>
+            <a:off x="609600" y="3152775"/>
+            <a:ext cx="2343150" cy="1257300"/>
           </a:xfrm>
           <a:prstGeom xmlns:a="http://schemas.openxmlformats.org/drawingml/2006/main" prst="rect">
             <a:avLst/>
@@ -4653,9 +5666,9 @@
           <a:bodyPr xmlns:a="http://schemas.openxmlformats.org/drawingml/2006/main"/>
           <a:lstStyle xmlns:a="http://schemas.openxmlformats.org/drawingml/2006/main">
             <a:defPPr>
-              <a:defRPr sz="2100" b="0">
-                <a:solidFill>
-                  <a:srgbClr val="23423C"/>
+              <a:defRPr sz="1950" b="0">
+                <a:solidFill>
+                  <a:srgbClr val="526963"/>
                 </a:solidFill>
                 <a:latin typeface="Arial"/>
                 <a:ea typeface="Arial"/>
@@ -4665,9 +5678,9 @@
           </a:lstStyle>
           <a:p xmlns:a="http://schemas.openxmlformats.org/drawingml/2006/main">
             <a:pPr>
-              <a:defRPr sz="2100" b="0">
-                <a:solidFill>
-                  <a:srgbClr val="23423C"/>
+              <a:defRPr sz="1950" b="0">
+                <a:solidFill>
+                  <a:srgbClr val="526963"/>
                 </a:solidFill>
                 <a:latin typeface="Arial"/>
                 <a:ea typeface="Arial"/>
@@ -4675,15 +5688,38 @@
               </a:defRPr>
             </a:pPr>
             <a:r>
-              <a:rPr sz="2100" b="0">
-                <a:solidFill>
-                  <a:srgbClr val="23423C"/>
+              <a:rPr sz="1950" b="0">
+                <a:solidFill>
+                  <a:srgbClr val="526963"/>
                 </a:solidFill>
                 <a:latin typeface="Arial"/>
                 <a:ea typeface="Arial"/>
                 <a:cs typeface="Arial"/>
               </a:rPr>
-              <a:t>PostgreSQL stores bookings. Alembic manages the schema.</a:t>
+              <a:t>User interaction</a:t>
+            </a:r>
+          </a:p>
+          <a:p xmlns:a="http://schemas.openxmlformats.org/drawingml/2006/main">
+            <a:pPr>
+              <a:defRPr sz="1950" b="0">
+                <a:solidFill>
+                  <a:srgbClr val="526963"/>
+                </a:solidFill>
+                <a:latin typeface="Arial"/>
+                <a:ea typeface="Arial"/>
+                <a:cs typeface="Arial"/>
+              </a:defRPr>
+            </a:pPr>
+            <a:r>
+              <a:rPr sz="1950" b="0">
+                <a:solidFill>
+                  <a:srgbClr val="526963"/>
+                </a:solidFill>
+                <a:latin typeface="Arial"/>
+                <a:ea typeface="Arial"/>
+                <a:cs typeface="Arial"/>
+              </a:rPr>
+              <a:t>localhost:3000</a:t>
             </a:r>
           </a:p>
         </p:txBody>
@@ -4693,7 +5729,7 @@
           <p:cNvPr id="5" name="">
             <a:extLst xmlns:a="http://schemas.openxmlformats.org/drawingml/2006/main">
               <a:ext uri="{FF2B5EF4-FFF2-40B4-BE49-F238E27FC236}">
-                <a16:creationId xmlns:a16="http://schemas.microsoft.com/office/drawing/2014/main" id="{8E26A6A4-6B41-476E-86DD-26BE8E1F9530}"/>
+                <a16:creationId xmlns:a16="http://schemas.microsoft.com/office/drawing/2014/main" id="{8717C288-E221-4B50-AF97-CB80A9F7A4E9}"/>
               </a:ext>
             </a:extLst>
           </p:cNvPr>
@@ -4704,8 +5740,8 @@
         </p:nvSpPr>
         <p:spPr>
           <a:xfrm xmlns:a="http://schemas.openxmlformats.org/drawingml/2006/main">
-            <a:off x="685800" y="4152900"/>
-            <a:ext cx="10572750" cy="714375"/>
+            <a:off x="3476625" y="1676400"/>
+            <a:ext cx="2286000" cy="571500"/>
           </a:xfrm>
           <a:prstGeom xmlns:a="http://schemas.openxmlformats.org/drawingml/2006/main" prst="rect">
             <a:avLst/>
@@ -4719,9 +5755,9 @@
           <a:bodyPr xmlns:a="http://schemas.openxmlformats.org/drawingml/2006/main"/>
           <a:lstStyle xmlns:a="http://schemas.openxmlformats.org/drawingml/2006/main">
             <a:defPPr>
-              <a:defRPr sz="2100" b="0">
-                <a:solidFill>
-                  <a:srgbClr val="23423C"/>
+              <a:defRPr sz="3300" b="1">
+                <a:solidFill>
+                  <a:srgbClr val="D76F3E"/>
                 </a:solidFill>
                 <a:latin typeface="Arial"/>
                 <a:ea typeface="Arial"/>
@@ -4731,9 +5767,9 @@
           </a:lstStyle>
           <a:p xmlns:a="http://schemas.openxmlformats.org/drawingml/2006/main">
             <a:pPr>
-              <a:defRPr sz="2100" b="0">
-                <a:solidFill>
-                  <a:srgbClr val="23423C"/>
+              <a:defRPr sz="3300" b="1">
+                <a:solidFill>
+                  <a:srgbClr val="D76F3E"/>
                 </a:solidFill>
                 <a:latin typeface="Arial"/>
                 <a:ea typeface="Arial"/>
@@ -4741,15 +5777,15 @@
               </a:defRPr>
             </a:pPr>
             <a:r>
-              <a:rPr sz="2100" b="0">
-                <a:solidFill>
-                  <a:srgbClr val="23423C"/>
+              <a:rPr sz="3300" b="1">
+                <a:solidFill>
+                  <a:srgbClr val="D76F3E"/>
                 </a:solidFill>
                 <a:latin typeface="Arial"/>
                 <a:ea typeface="Arial"/>
                 <a:cs typeface="Arial"/>
               </a:rPr>
-              <a:t>Docker, GitHub Actions and Trivy build and check both images.</a:t>
+              <a:t>02</a:t>
             </a:r>
           </a:p>
         </p:txBody>
@@ -4759,7 +5795,7 @@
           <p:cNvPr id="6" name="">
             <a:extLst xmlns:a="http://schemas.openxmlformats.org/drawingml/2006/main">
               <a:ext uri="{FF2B5EF4-FFF2-40B4-BE49-F238E27FC236}">
-                <a16:creationId xmlns:a16="http://schemas.microsoft.com/office/drawing/2014/main" id="{E7AA6BA8-E6A0-47EA-AD00-EDC8E0DF9712}"/>
+                <a16:creationId xmlns:a16="http://schemas.microsoft.com/office/drawing/2014/main" id="{E2B1792B-0A44-48BB-96FA-23ABD76E8F79}"/>
               </a:ext>
             </a:extLst>
           </p:cNvPr>
@@ -4770,8 +5806,8 @@
         </p:nvSpPr>
         <p:spPr>
           <a:xfrm xmlns:a="http://schemas.openxmlformats.org/drawingml/2006/main">
-            <a:off x="685800" y="5029200"/>
-            <a:ext cx="10572750" cy="714375"/>
+            <a:off x="3476625" y="2381250"/>
+            <a:ext cx="2343150" cy="619125"/>
           </a:xfrm>
           <a:prstGeom xmlns:a="http://schemas.openxmlformats.org/drawingml/2006/main" prst="rect">
             <a:avLst/>
@@ -4785,9 +5821,9 @@
           <a:bodyPr xmlns:a="http://schemas.openxmlformats.org/drawingml/2006/main"/>
           <a:lstStyle xmlns:a="http://schemas.openxmlformats.org/drawingml/2006/main">
             <a:defPPr>
-              <a:defRPr sz="2100" b="0">
-                <a:solidFill>
-                  <a:srgbClr val="23423C"/>
+              <a:defRPr sz="2325" b="1">
+                <a:solidFill>
+                  <a:srgbClr val="163D38"/>
                 </a:solidFill>
                 <a:latin typeface="Arial"/>
                 <a:ea typeface="Arial"/>
@@ -4797,9 +5833,9 @@
           </a:lstStyle>
           <a:p xmlns:a="http://schemas.openxmlformats.org/drawingml/2006/main">
             <a:pPr>
-              <a:defRPr sz="2100" b="0">
-                <a:solidFill>
-                  <a:srgbClr val="23423C"/>
+              <a:defRPr sz="2325" b="1">
+                <a:solidFill>
+                  <a:srgbClr val="163D38"/>
                 </a:solidFill>
                 <a:latin typeface="Arial"/>
                 <a:ea typeface="Arial"/>
@@ -4807,15 +5843,678 @@
               </a:defRPr>
             </a:pPr>
             <a:r>
-              <a:rPr sz="2100" b="0">
-                <a:solidFill>
-                  <a:srgbClr val="23423C"/>
+              <a:rPr sz="2325" b="1">
+                <a:solidFill>
+                  <a:srgbClr val="163D38"/>
                 </a:solidFill>
                 <a:latin typeface="Arial"/>
                 <a:ea typeface="Arial"/>
                 <a:cs typeface="Arial"/>
               </a:rPr>
-              <a:t>Terraform, Kubernetes, Helm, Argo CD, Prometheus and Grafana.</a:t>
+              <a:t>Ingress / Nginx</a:t>
+            </a:r>
+          </a:p>
+        </p:txBody>
+      </p:sp>
+      <p:sp>
+        <p:nvSpPr>
+          <p:cNvPr id="7" name="">
+            <a:extLst xmlns:a="http://schemas.openxmlformats.org/drawingml/2006/main">
+              <a:ext uri="{FF2B5EF4-FFF2-40B4-BE49-F238E27FC236}">
+                <a16:creationId xmlns:a16="http://schemas.microsoft.com/office/drawing/2014/main" id="{E912E98E-FD1F-4F82-9CEE-6CFFB5872B56}"/>
+              </a:ext>
+            </a:extLst>
+          </p:cNvPr>
+          <p:cNvSpPr>
+            <a:spLocks xmlns:a="http://schemas.openxmlformats.org/drawingml/2006/main" noGrp="1"/>
+          </p:cNvSpPr>
+          <p:nvPr/>
+        </p:nvSpPr>
+        <p:spPr>
+          <a:xfrm xmlns:a="http://schemas.openxmlformats.org/drawingml/2006/main">
+            <a:off x="3476625" y="3152775"/>
+            <a:ext cx="2343150" cy="1257300"/>
+          </a:xfrm>
+          <a:prstGeom xmlns:a="http://schemas.openxmlformats.org/drawingml/2006/main" prst="rect">
+            <a:avLst/>
+          </a:prstGeom>
+          <a:noFill xmlns:a="http://schemas.openxmlformats.org/drawingml/2006/main"/>
+          <a:ln xmlns:a="http://schemas.openxmlformats.org/drawingml/2006/main" w="0">
+            <a:noFill/>
+          </a:ln>
+        </p:spPr>
+        <p:txBody>
+          <a:bodyPr xmlns:a="http://schemas.openxmlformats.org/drawingml/2006/main"/>
+          <a:lstStyle xmlns:a="http://schemas.openxmlformats.org/drawingml/2006/main">
+            <a:defPPr>
+              <a:defRPr sz="1950" b="0">
+                <a:solidFill>
+                  <a:srgbClr val="526963"/>
+                </a:solidFill>
+                <a:latin typeface="Arial"/>
+                <a:ea typeface="Arial"/>
+                <a:cs typeface="Arial"/>
+              </a:defRPr>
+            </a:defPPr>
+          </a:lstStyle>
+          <a:p xmlns:a="http://schemas.openxmlformats.org/drawingml/2006/main">
+            <a:pPr>
+              <a:defRPr sz="1950" b="0">
+                <a:solidFill>
+                  <a:srgbClr val="526963"/>
+                </a:solidFill>
+                <a:latin typeface="Arial"/>
+                <a:ea typeface="Arial"/>
+                <a:cs typeface="Arial"/>
+              </a:defRPr>
+            </a:pPr>
+            <a:r>
+              <a:rPr sz="1950" b="0">
+                <a:solidFill>
+                  <a:srgbClr val="526963"/>
+                </a:solidFill>
+                <a:latin typeface="Arial"/>
+                <a:ea typeface="Arial"/>
+                <a:cs typeface="Arial"/>
+              </a:rPr>
+              <a:t>/ serves React</a:t>
+            </a:r>
+          </a:p>
+          <a:p xmlns:a="http://schemas.openxmlformats.org/drawingml/2006/main">
+            <a:pPr>
+              <a:defRPr sz="1950" b="0">
+                <a:solidFill>
+                  <a:srgbClr val="526963"/>
+                </a:solidFill>
+                <a:latin typeface="Arial"/>
+                <a:ea typeface="Arial"/>
+                <a:cs typeface="Arial"/>
+              </a:defRPr>
+            </a:pPr>
+            <a:r>
+              <a:rPr sz="1950" b="0">
+                <a:solidFill>
+                  <a:srgbClr val="526963"/>
+                </a:solidFill>
+                <a:latin typeface="Arial"/>
+                <a:ea typeface="Arial"/>
+                <a:cs typeface="Arial"/>
+              </a:rPr>
+              <a:t>/api routes to backend</a:t>
+            </a:r>
+          </a:p>
+        </p:txBody>
+      </p:sp>
+      <p:sp>
+        <p:nvSpPr>
+          <p:cNvPr id="8" name="">
+            <a:extLst xmlns:a="http://schemas.openxmlformats.org/drawingml/2006/main">
+              <a:ext uri="{FF2B5EF4-FFF2-40B4-BE49-F238E27FC236}">
+                <a16:creationId xmlns:a16="http://schemas.microsoft.com/office/drawing/2014/main" id="{75501814-D635-4C6C-93D9-A106886280DA}"/>
+              </a:ext>
+            </a:extLst>
+          </p:cNvPr>
+          <p:cNvSpPr>
+            <a:spLocks xmlns:a="http://schemas.openxmlformats.org/drawingml/2006/main" noGrp="1"/>
+          </p:cNvSpPr>
+          <p:nvPr/>
+        </p:nvSpPr>
+        <p:spPr>
+          <a:xfrm xmlns:a="http://schemas.openxmlformats.org/drawingml/2006/main">
+            <a:off x="6343650" y="1676400"/>
+            <a:ext cx="2286000" cy="571500"/>
+          </a:xfrm>
+          <a:prstGeom xmlns:a="http://schemas.openxmlformats.org/drawingml/2006/main" prst="rect">
+            <a:avLst/>
+          </a:prstGeom>
+          <a:noFill xmlns:a="http://schemas.openxmlformats.org/drawingml/2006/main"/>
+          <a:ln xmlns:a="http://schemas.openxmlformats.org/drawingml/2006/main" w="0">
+            <a:noFill/>
+          </a:ln>
+        </p:spPr>
+        <p:txBody>
+          <a:bodyPr xmlns:a="http://schemas.openxmlformats.org/drawingml/2006/main"/>
+          <a:lstStyle xmlns:a="http://schemas.openxmlformats.org/drawingml/2006/main">
+            <a:defPPr>
+              <a:defRPr sz="3300" b="1">
+                <a:solidFill>
+                  <a:srgbClr val="D76F3E"/>
+                </a:solidFill>
+                <a:latin typeface="Arial"/>
+                <a:ea typeface="Arial"/>
+                <a:cs typeface="Arial"/>
+              </a:defRPr>
+            </a:defPPr>
+          </a:lstStyle>
+          <a:p xmlns:a="http://schemas.openxmlformats.org/drawingml/2006/main">
+            <a:pPr>
+              <a:defRPr sz="3300" b="1">
+                <a:solidFill>
+                  <a:srgbClr val="D76F3E"/>
+                </a:solidFill>
+                <a:latin typeface="Arial"/>
+                <a:ea typeface="Arial"/>
+                <a:cs typeface="Arial"/>
+              </a:defRPr>
+            </a:pPr>
+            <a:r>
+              <a:rPr sz="3300" b="1">
+                <a:solidFill>
+                  <a:srgbClr val="D76F3E"/>
+                </a:solidFill>
+                <a:latin typeface="Arial"/>
+                <a:ea typeface="Arial"/>
+                <a:cs typeface="Arial"/>
+              </a:rPr>
+              <a:t>03</a:t>
+            </a:r>
+          </a:p>
+        </p:txBody>
+      </p:sp>
+      <p:sp>
+        <p:nvSpPr>
+          <p:cNvPr id="9" name="">
+            <a:extLst xmlns:a="http://schemas.openxmlformats.org/drawingml/2006/main">
+              <a:ext uri="{FF2B5EF4-FFF2-40B4-BE49-F238E27FC236}">
+                <a16:creationId xmlns:a16="http://schemas.microsoft.com/office/drawing/2014/main" id="{192D2D54-7694-4F92-9ACE-3E35A707697B}"/>
+              </a:ext>
+            </a:extLst>
+          </p:cNvPr>
+          <p:cNvSpPr>
+            <a:spLocks xmlns:a="http://schemas.openxmlformats.org/drawingml/2006/main" noGrp="1"/>
+          </p:cNvSpPr>
+          <p:nvPr/>
+        </p:nvSpPr>
+        <p:spPr>
+          <a:xfrm xmlns:a="http://schemas.openxmlformats.org/drawingml/2006/main">
+            <a:off x="6343650" y="2381250"/>
+            <a:ext cx="2343150" cy="619125"/>
+          </a:xfrm>
+          <a:prstGeom xmlns:a="http://schemas.openxmlformats.org/drawingml/2006/main" prst="rect">
+            <a:avLst/>
+          </a:prstGeom>
+          <a:noFill xmlns:a="http://schemas.openxmlformats.org/drawingml/2006/main"/>
+          <a:ln xmlns:a="http://schemas.openxmlformats.org/drawingml/2006/main" w="0">
+            <a:noFill/>
+          </a:ln>
+        </p:spPr>
+        <p:txBody>
+          <a:bodyPr xmlns:a="http://schemas.openxmlformats.org/drawingml/2006/main"/>
+          <a:lstStyle xmlns:a="http://schemas.openxmlformats.org/drawingml/2006/main">
+            <a:defPPr>
+              <a:defRPr sz="2325" b="1">
+                <a:solidFill>
+                  <a:srgbClr val="163D38"/>
+                </a:solidFill>
+                <a:latin typeface="Arial"/>
+                <a:ea typeface="Arial"/>
+                <a:cs typeface="Arial"/>
+              </a:defRPr>
+            </a:defPPr>
+          </a:lstStyle>
+          <a:p xmlns:a="http://schemas.openxmlformats.org/drawingml/2006/main">
+            <a:pPr>
+              <a:defRPr sz="2325" b="1">
+                <a:solidFill>
+                  <a:srgbClr val="163D38"/>
+                </a:solidFill>
+                <a:latin typeface="Arial"/>
+                <a:ea typeface="Arial"/>
+                <a:cs typeface="Arial"/>
+              </a:defRPr>
+            </a:pPr>
+            <a:r>
+              <a:rPr sz="2325" b="1">
+                <a:solidFill>
+                  <a:srgbClr val="163D38"/>
+                </a:solidFill>
+                <a:latin typeface="Arial"/>
+                <a:ea typeface="Arial"/>
+                <a:cs typeface="Arial"/>
+              </a:rPr>
+              <a:t>FastAPI</a:t>
+            </a:r>
+          </a:p>
+        </p:txBody>
+      </p:sp>
+      <p:sp>
+        <p:nvSpPr>
+          <p:cNvPr id="10" name="">
+            <a:extLst xmlns:a="http://schemas.openxmlformats.org/drawingml/2006/main">
+              <a:ext uri="{FF2B5EF4-FFF2-40B4-BE49-F238E27FC236}">
+                <a16:creationId xmlns:a16="http://schemas.microsoft.com/office/drawing/2014/main" id="{2DD43FBF-3450-4751-867B-ED8C490E4C68}"/>
+              </a:ext>
+            </a:extLst>
+          </p:cNvPr>
+          <p:cNvSpPr>
+            <a:spLocks xmlns:a="http://schemas.openxmlformats.org/drawingml/2006/main" noGrp="1"/>
+          </p:cNvSpPr>
+          <p:nvPr/>
+        </p:nvSpPr>
+        <p:spPr>
+          <a:xfrm xmlns:a="http://schemas.openxmlformats.org/drawingml/2006/main">
+            <a:off x="6343650" y="3152775"/>
+            <a:ext cx="2343150" cy="1257300"/>
+          </a:xfrm>
+          <a:prstGeom xmlns:a="http://schemas.openxmlformats.org/drawingml/2006/main" prst="rect">
+            <a:avLst/>
+          </a:prstGeom>
+          <a:noFill xmlns:a="http://schemas.openxmlformats.org/drawingml/2006/main"/>
+          <a:ln xmlns:a="http://schemas.openxmlformats.org/drawingml/2006/main" w="0">
+            <a:noFill/>
+          </a:ln>
+        </p:spPr>
+        <p:txBody>
+          <a:bodyPr xmlns:a="http://schemas.openxmlformats.org/drawingml/2006/main"/>
+          <a:lstStyle xmlns:a="http://schemas.openxmlformats.org/drawingml/2006/main">
+            <a:defPPr>
+              <a:defRPr sz="1950" b="0">
+                <a:solidFill>
+                  <a:srgbClr val="526963"/>
+                </a:solidFill>
+                <a:latin typeface="Arial"/>
+                <a:ea typeface="Arial"/>
+                <a:cs typeface="Arial"/>
+              </a:defRPr>
+            </a:defPPr>
+          </a:lstStyle>
+          <a:p xmlns:a="http://schemas.openxmlformats.org/drawingml/2006/main">
+            <a:pPr>
+              <a:defRPr sz="1950" b="0">
+                <a:solidFill>
+                  <a:srgbClr val="526963"/>
+                </a:solidFill>
+                <a:latin typeface="Arial"/>
+                <a:ea typeface="Arial"/>
+                <a:cs typeface="Arial"/>
+              </a:defRPr>
+            </a:pPr>
+            <a:r>
+              <a:rPr sz="1950" b="0">
+                <a:solidFill>
+                  <a:srgbClr val="526963"/>
+                </a:solidFill>
+                <a:latin typeface="Arial"/>
+                <a:ea typeface="Arial"/>
+                <a:cs typeface="Arial"/>
+              </a:rPr>
+              <a:t>Validation and CRUD</a:t>
+            </a:r>
+          </a:p>
+          <a:p xmlns:a="http://schemas.openxmlformats.org/drawingml/2006/main">
+            <a:pPr>
+              <a:defRPr sz="1950" b="0">
+                <a:solidFill>
+                  <a:srgbClr val="526963"/>
+                </a:solidFill>
+                <a:latin typeface="Arial"/>
+                <a:ea typeface="Arial"/>
+                <a:cs typeface="Arial"/>
+              </a:defRPr>
+            </a:pPr>
+            <a:r>
+              <a:rPr sz="1950" b="0">
+                <a:solidFill>
+                  <a:srgbClr val="526963"/>
+                </a:solidFill>
+                <a:latin typeface="Arial"/>
+                <a:ea typeface="Arial"/>
+                <a:cs typeface="Arial"/>
+              </a:rPr>
+              <a:t>Health and metrics</a:t>
+            </a:r>
+          </a:p>
+        </p:txBody>
+      </p:sp>
+      <p:sp>
+        <p:nvSpPr>
+          <p:cNvPr id="11" name="">
+            <a:extLst xmlns:a="http://schemas.openxmlformats.org/drawingml/2006/main">
+              <a:ext uri="{FF2B5EF4-FFF2-40B4-BE49-F238E27FC236}">
+                <a16:creationId xmlns:a16="http://schemas.microsoft.com/office/drawing/2014/main" id="{DDE665B7-9926-46F0-9D5B-80B853582497}"/>
+              </a:ext>
+            </a:extLst>
+          </p:cNvPr>
+          <p:cNvSpPr>
+            <a:spLocks xmlns:a="http://schemas.openxmlformats.org/drawingml/2006/main" noGrp="1"/>
+          </p:cNvSpPr>
+          <p:nvPr/>
+        </p:nvSpPr>
+        <p:spPr>
+          <a:xfrm xmlns:a="http://schemas.openxmlformats.org/drawingml/2006/main">
+            <a:off x="9210675" y="1676400"/>
+            <a:ext cx="2286000" cy="571500"/>
+          </a:xfrm>
+          <a:prstGeom xmlns:a="http://schemas.openxmlformats.org/drawingml/2006/main" prst="rect">
+            <a:avLst/>
+          </a:prstGeom>
+          <a:noFill xmlns:a="http://schemas.openxmlformats.org/drawingml/2006/main"/>
+          <a:ln xmlns:a="http://schemas.openxmlformats.org/drawingml/2006/main" w="0">
+            <a:noFill/>
+          </a:ln>
+        </p:spPr>
+        <p:txBody>
+          <a:bodyPr xmlns:a="http://schemas.openxmlformats.org/drawingml/2006/main"/>
+          <a:lstStyle xmlns:a="http://schemas.openxmlformats.org/drawingml/2006/main">
+            <a:defPPr>
+              <a:defRPr sz="3300" b="1">
+                <a:solidFill>
+                  <a:srgbClr val="D76F3E"/>
+                </a:solidFill>
+                <a:latin typeface="Arial"/>
+                <a:ea typeface="Arial"/>
+                <a:cs typeface="Arial"/>
+              </a:defRPr>
+            </a:defPPr>
+          </a:lstStyle>
+          <a:p xmlns:a="http://schemas.openxmlformats.org/drawingml/2006/main">
+            <a:pPr>
+              <a:defRPr sz="3300" b="1">
+                <a:solidFill>
+                  <a:srgbClr val="D76F3E"/>
+                </a:solidFill>
+                <a:latin typeface="Arial"/>
+                <a:ea typeface="Arial"/>
+                <a:cs typeface="Arial"/>
+              </a:defRPr>
+            </a:pPr>
+            <a:r>
+              <a:rPr sz="3300" b="1">
+                <a:solidFill>
+                  <a:srgbClr val="D76F3E"/>
+                </a:solidFill>
+                <a:latin typeface="Arial"/>
+                <a:ea typeface="Arial"/>
+                <a:cs typeface="Arial"/>
+              </a:rPr>
+              <a:t>04</a:t>
+            </a:r>
+          </a:p>
+        </p:txBody>
+      </p:sp>
+      <p:sp>
+        <p:nvSpPr>
+          <p:cNvPr id="12" name="">
+            <a:extLst xmlns:a="http://schemas.openxmlformats.org/drawingml/2006/main">
+              <a:ext uri="{FF2B5EF4-FFF2-40B4-BE49-F238E27FC236}">
+                <a16:creationId xmlns:a16="http://schemas.microsoft.com/office/drawing/2014/main" id="{7DB7AE60-D008-408D-8E7C-691B94319F7E}"/>
+              </a:ext>
+            </a:extLst>
+          </p:cNvPr>
+          <p:cNvSpPr>
+            <a:spLocks xmlns:a="http://schemas.openxmlformats.org/drawingml/2006/main" noGrp="1"/>
+          </p:cNvSpPr>
+          <p:nvPr/>
+        </p:nvSpPr>
+        <p:spPr>
+          <a:xfrm xmlns:a="http://schemas.openxmlformats.org/drawingml/2006/main">
+            <a:off x="9210675" y="2381250"/>
+            <a:ext cx="2343150" cy="619125"/>
+          </a:xfrm>
+          <a:prstGeom xmlns:a="http://schemas.openxmlformats.org/drawingml/2006/main" prst="rect">
+            <a:avLst/>
+          </a:prstGeom>
+          <a:noFill xmlns:a="http://schemas.openxmlformats.org/drawingml/2006/main"/>
+          <a:ln xmlns:a="http://schemas.openxmlformats.org/drawingml/2006/main" w="0">
+            <a:noFill/>
+          </a:ln>
+        </p:spPr>
+        <p:txBody>
+          <a:bodyPr xmlns:a="http://schemas.openxmlformats.org/drawingml/2006/main"/>
+          <a:lstStyle xmlns:a="http://schemas.openxmlformats.org/drawingml/2006/main">
+            <a:defPPr>
+              <a:defRPr sz="2325" b="1">
+                <a:solidFill>
+                  <a:srgbClr val="163D38"/>
+                </a:solidFill>
+                <a:latin typeface="Arial"/>
+                <a:ea typeface="Arial"/>
+                <a:cs typeface="Arial"/>
+              </a:defRPr>
+            </a:defPPr>
+          </a:lstStyle>
+          <a:p xmlns:a="http://schemas.openxmlformats.org/drawingml/2006/main">
+            <a:pPr>
+              <a:defRPr sz="2325" b="1">
+                <a:solidFill>
+                  <a:srgbClr val="163D38"/>
+                </a:solidFill>
+                <a:latin typeface="Arial"/>
+                <a:ea typeface="Arial"/>
+                <a:cs typeface="Arial"/>
+              </a:defRPr>
+            </a:pPr>
+            <a:r>
+              <a:rPr sz="2325" b="1">
+                <a:solidFill>
+                  <a:srgbClr val="163D38"/>
+                </a:solidFill>
+                <a:latin typeface="Arial"/>
+                <a:ea typeface="Arial"/>
+                <a:cs typeface="Arial"/>
+              </a:rPr>
+              <a:t>PostgreSQL</a:t>
+            </a:r>
+          </a:p>
+        </p:txBody>
+      </p:sp>
+      <p:sp>
+        <p:nvSpPr>
+          <p:cNvPr id="13" name="">
+            <a:extLst xmlns:a="http://schemas.openxmlformats.org/drawingml/2006/main">
+              <a:ext uri="{FF2B5EF4-FFF2-40B4-BE49-F238E27FC236}">
+                <a16:creationId xmlns:a16="http://schemas.microsoft.com/office/drawing/2014/main" id="{BDB9B62F-2F0C-462F-AD52-D3639A982F18}"/>
+              </a:ext>
+            </a:extLst>
+          </p:cNvPr>
+          <p:cNvSpPr>
+            <a:spLocks xmlns:a="http://schemas.openxmlformats.org/drawingml/2006/main" noGrp="1"/>
+          </p:cNvSpPr>
+          <p:nvPr/>
+        </p:nvSpPr>
+        <p:spPr>
+          <a:xfrm xmlns:a="http://schemas.openxmlformats.org/drawingml/2006/main">
+            <a:off x="9210675" y="3152775"/>
+            <a:ext cx="2343150" cy="1257300"/>
+          </a:xfrm>
+          <a:prstGeom xmlns:a="http://schemas.openxmlformats.org/drawingml/2006/main" prst="rect">
+            <a:avLst/>
+          </a:prstGeom>
+          <a:noFill xmlns:a="http://schemas.openxmlformats.org/drawingml/2006/main"/>
+          <a:ln xmlns:a="http://schemas.openxmlformats.org/drawingml/2006/main" w="0">
+            <a:noFill/>
+          </a:ln>
+        </p:spPr>
+        <p:txBody>
+          <a:bodyPr xmlns:a="http://schemas.openxmlformats.org/drawingml/2006/main"/>
+          <a:lstStyle xmlns:a="http://schemas.openxmlformats.org/drawingml/2006/main">
+            <a:defPPr>
+              <a:defRPr sz="1950" b="0">
+                <a:solidFill>
+                  <a:srgbClr val="526963"/>
+                </a:solidFill>
+                <a:latin typeface="Arial"/>
+                <a:ea typeface="Arial"/>
+                <a:cs typeface="Arial"/>
+              </a:defRPr>
+            </a:defPPr>
+          </a:lstStyle>
+          <a:p xmlns:a="http://schemas.openxmlformats.org/drawingml/2006/main">
+            <a:pPr>
+              <a:defRPr sz="1950" b="0">
+                <a:solidFill>
+                  <a:srgbClr val="526963"/>
+                </a:solidFill>
+                <a:latin typeface="Arial"/>
+                <a:ea typeface="Arial"/>
+                <a:cs typeface="Arial"/>
+              </a:defRPr>
+            </a:pPr>
+            <a:r>
+              <a:rPr sz="1950" b="0">
+                <a:solidFill>
+                  <a:srgbClr val="526963"/>
+                </a:solidFill>
+                <a:latin typeface="Arial"/>
+                <a:ea typeface="Arial"/>
+                <a:cs typeface="Arial"/>
+              </a:rPr>
+              <a:t>Bookings and constraints</a:t>
+            </a:r>
+          </a:p>
+          <a:p xmlns:a="http://schemas.openxmlformats.org/drawingml/2006/main">
+            <a:pPr>
+              <a:defRPr sz="1950" b="0">
+                <a:solidFill>
+                  <a:srgbClr val="526963"/>
+                </a:solidFill>
+                <a:latin typeface="Arial"/>
+                <a:ea typeface="Arial"/>
+                <a:cs typeface="Arial"/>
+              </a:defRPr>
+            </a:pPr>
+            <a:r>
+              <a:rPr sz="1950" b="0">
+                <a:solidFill>
+                  <a:srgbClr val="526963"/>
+                </a:solidFill>
+                <a:latin typeface="Arial"/>
+                <a:ea typeface="Arial"/>
+                <a:cs typeface="Arial"/>
+              </a:rPr>
+              <a:t>Persistent volume</a:t>
+            </a:r>
+          </a:p>
+        </p:txBody>
+      </p:sp>
+      <p:sp>
+        <p:nvSpPr>
+          <p:cNvPr id="14" name="">
+            <a:extLst xmlns:a="http://schemas.openxmlformats.org/drawingml/2006/main">
+              <a:ext uri="{FF2B5EF4-FFF2-40B4-BE49-F238E27FC236}">
+                <a16:creationId xmlns:a16="http://schemas.microsoft.com/office/drawing/2014/main" id="{2F5CE70E-A172-4473-B34B-DDCB1EAB86F7}"/>
+              </a:ext>
+            </a:extLst>
+          </p:cNvPr>
+          <p:cNvSpPr>
+            <a:spLocks xmlns:a="http://schemas.openxmlformats.org/drawingml/2006/main" noGrp="1"/>
+          </p:cNvSpPr>
+          <p:nvPr/>
+        </p:nvSpPr>
+        <p:spPr>
+          <a:xfrm xmlns:a="http://schemas.openxmlformats.org/drawingml/2006/main">
+            <a:off x="628650" y="4914900"/>
+            <a:ext cx="2857500" cy="476250"/>
+          </a:xfrm>
+          <a:prstGeom xmlns:a="http://schemas.openxmlformats.org/drawingml/2006/main" prst="rect">
+            <a:avLst/>
+          </a:prstGeom>
+          <a:noFill xmlns:a="http://schemas.openxmlformats.org/drawingml/2006/main"/>
+          <a:ln xmlns:a="http://schemas.openxmlformats.org/drawingml/2006/main" w="0">
+            <a:noFill/>
+          </a:ln>
+        </p:spPr>
+        <p:txBody>
+          <a:bodyPr xmlns:a="http://schemas.openxmlformats.org/drawingml/2006/main"/>
+          <a:lstStyle xmlns:a="http://schemas.openxmlformats.org/drawingml/2006/main">
+            <a:defPPr>
+              <a:defRPr sz="2400" b="1">
+                <a:solidFill>
+                  <a:srgbClr val="163D38"/>
+                </a:solidFill>
+                <a:latin typeface="Arial"/>
+                <a:ea typeface="Arial"/>
+                <a:cs typeface="Arial"/>
+              </a:defRPr>
+            </a:defPPr>
+          </a:lstStyle>
+          <a:p xmlns:a="http://schemas.openxmlformats.org/drawingml/2006/main">
+            <a:pPr>
+              <a:defRPr sz="2400" b="1">
+                <a:solidFill>
+                  <a:srgbClr val="163D38"/>
+                </a:solidFill>
+                <a:latin typeface="Arial"/>
+                <a:ea typeface="Arial"/>
+                <a:cs typeface="Arial"/>
+              </a:defRPr>
+            </a:pPr>
+            <a:r>
+              <a:rPr sz="2400" b="1">
+                <a:solidFill>
+                  <a:srgbClr val="163D38"/>
+                </a:solidFill>
+                <a:latin typeface="Arial"/>
+                <a:ea typeface="Arial"/>
+                <a:cs typeface="Arial"/>
+              </a:rPr>
+              <a:t>Monitoring</a:t>
+            </a:r>
+          </a:p>
+        </p:txBody>
+      </p:sp>
+      <p:sp>
+        <p:nvSpPr>
+          <p:cNvPr id="15" name="">
+            <a:extLst xmlns:a="http://schemas.openxmlformats.org/drawingml/2006/main">
+              <a:ext uri="{FF2B5EF4-FFF2-40B4-BE49-F238E27FC236}">
+                <a16:creationId xmlns:a16="http://schemas.microsoft.com/office/drawing/2014/main" id="{C414EEC7-32DE-485B-83A1-4DF16B614EB9}"/>
+              </a:ext>
+            </a:extLst>
+          </p:cNvPr>
+          <p:cNvSpPr>
+            <a:spLocks xmlns:a="http://schemas.openxmlformats.org/drawingml/2006/main" noGrp="1"/>
+          </p:cNvSpPr>
+          <p:nvPr/>
+        </p:nvSpPr>
+        <p:spPr>
+          <a:xfrm xmlns:a="http://schemas.openxmlformats.org/drawingml/2006/main">
+            <a:off x="628650" y="5562600"/>
+            <a:ext cx="10763250" cy="628650"/>
+          </a:xfrm>
+          <a:prstGeom xmlns:a="http://schemas.openxmlformats.org/drawingml/2006/main" prst="rect">
+            <a:avLst/>
+          </a:prstGeom>
+          <a:noFill xmlns:a="http://schemas.openxmlformats.org/drawingml/2006/main"/>
+          <a:ln xmlns:a="http://schemas.openxmlformats.org/drawingml/2006/main" w="0">
+            <a:noFill/>
+          </a:ln>
+        </p:spPr>
+        <p:txBody>
+          <a:bodyPr xmlns:a="http://schemas.openxmlformats.org/drawingml/2006/main"/>
+          <a:lstStyle xmlns:a="http://schemas.openxmlformats.org/drawingml/2006/main">
+            <a:defPPr>
+              <a:defRPr sz="2250" b="0">
+                <a:solidFill>
+                  <a:srgbClr val="526963"/>
+                </a:solidFill>
+                <a:latin typeface="Arial"/>
+                <a:ea typeface="Arial"/>
+                <a:cs typeface="Arial"/>
+              </a:defRPr>
+            </a:defPPr>
+          </a:lstStyle>
+          <a:p xmlns:a="http://schemas.openxmlformats.org/drawingml/2006/main">
+            <a:pPr>
+              <a:defRPr sz="2250" b="0">
+                <a:solidFill>
+                  <a:srgbClr val="526963"/>
+                </a:solidFill>
+                <a:latin typeface="Arial"/>
+                <a:ea typeface="Arial"/>
+                <a:cs typeface="Arial"/>
+              </a:defRPr>
+            </a:pPr>
+            <a:r>
+              <a:rPr sz="2250" b="0">
+                <a:solidFill>
+                  <a:srgbClr val="526963"/>
+                </a:solidFill>
+                <a:latin typeface="Arial"/>
+                <a:ea typeface="Arial"/>
+                <a:cs typeface="Arial"/>
+              </a:rPr>
+              <a:t>FastAPI /metrics     Prometheus scrape     Grafana dashboard</a:t>
             </a:r>
           </a:p>
         </p:txBody>
@@ -4823,7 +6522,7 @@
     </p:spTree>
     <p:extLst>
       <p:ext uri="{BB962C8B-B14F-4D97-AF65-F5344CB8AC3E}">
-        <p14:creationId xmlns:p14="http://schemas.microsoft.com/office/powerpoint/2010/main" val="189595365"/>
+        <p14:creationId xmlns:p14="http://schemas.microsoft.com/office/powerpoint/2010/main" val="721649166"/>
       </p:ext>
     </p:extLst>
   </p:cSld>
@@ -4836,7 +6535,7 @@
     <p:bg>
       <p:bgPr>
         <a:solidFill xmlns:a="http://schemas.openxmlformats.org/drawingml/2006/main">
-          <a:srgbClr val="F5F4EF"/>
+          <a:srgbClr val="F8F5EE"/>
         </a:solidFill>
       </p:bgPr>
     </p:bg>
@@ -4849,179 +6548,24 @@
       <p:grpSpPr>
         <a:xfrm xmlns:a="http://schemas.openxmlformats.org/drawingml/2006/main"/>
       </p:grpSpPr>
-      <p:cxnSp>
-        <p:nvCxnSpPr>
-          <p:cNvPr id="12" name="">
+      <p:sp>
+        <p:nvSpPr>
+          <p:cNvPr id="20" name="">
             <a:extLst xmlns:a="http://schemas.openxmlformats.org/drawingml/2006/main">
               <a:ext uri="{FF2B5EF4-FFF2-40B4-BE49-F238E27FC236}">
-                <a16:creationId xmlns:a16="http://schemas.microsoft.com/office/drawing/2014/main" id="{798E9A42-23EA-471D-AF06-CF7BAC6CCFF4}"/>
+                <a16:creationId xmlns:a16="http://schemas.microsoft.com/office/drawing/2014/main" id="{71A646A9-9DAF-4C3C-AD86-A79C988DFFA1}"/>
               </a:ext>
             </a:extLst>
           </p:cNvPr>
-          <p:cNvCxnSpPr>
-            <a:stCxn xmlns:a="http://schemas.openxmlformats.org/drawingml/2006/main" id="9" idx="3"/>
-            <a:endCxn xmlns:a="http://schemas.openxmlformats.org/drawingml/2006/main" id="10" idx="1"/>
-          </p:cNvCxnSpPr>
+          <p:cNvSpPr>
+            <a:spLocks xmlns:a="http://schemas.openxmlformats.org/drawingml/2006/main" noGrp="1"/>
+          </p:cNvSpPr>
           <p:nvPr/>
-        </p:nvCxnSpPr>
+        </p:nvSpPr>
         <p:spPr>
           <a:xfrm xmlns:a="http://schemas.openxmlformats.org/drawingml/2006/main">
-            <a:off x="8334375" y="4572000"/>
-            <a:ext cx="857250" cy="0"/>
-          </a:xfrm>
-          <a:prstGeom xmlns:a="http://schemas.openxmlformats.org/drawingml/2006/main" prst="straightConnector1">
-            <a:avLst/>
-          </a:prstGeom>
-          <a:ln xmlns:a="http://schemas.openxmlformats.org/drawingml/2006/main" w="19050">
-            <a:solidFill>
-              <a:srgbClr val="687B64"/>
-            </a:solidFill>
-            <a:tailEnd type="arrow" w="med" len="med"/>
-          </a:ln>
-        </p:spPr>
-      </p:cxnSp>
-      <p:cxnSp>
-        <p:nvCxnSpPr>
-          <p:cNvPr id="11" name="">
-            <a:extLst xmlns:a="http://schemas.openxmlformats.org/drawingml/2006/main">
-              <a:ext uri="{FF2B5EF4-FFF2-40B4-BE49-F238E27FC236}">
-                <a16:creationId xmlns:a16="http://schemas.microsoft.com/office/drawing/2014/main" id="{4A661CE4-B812-451A-99E9-E3469B2305B1}"/>
-              </a:ext>
-            </a:extLst>
-          </p:cNvPr>
-          <p:cNvCxnSpPr>
-            <a:stCxn xmlns:a="http://schemas.openxmlformats.org/drawingml/2006/main" id="4" idx="2"/>
-            <a:endCxn xmlns:a="http://schemas.openxmlformats.org/drawingml/2006/main" id="9" idx="0"/>
-          </p:cNvCxnSpPr>
-          <p:nvPr/>
-        </p:nvCxnSpPr>
-        <p:spPr>
-          <a:xfrm xmlns:a="http://schemas.openxmlformats.org/drawingml/2006/main" flipH="1">
-            <a:off x="7286625" y="2762250"/>
-            <a:ext cx="95250" cy="1381125"/>
-          </a:xfrm>
-          <a:prstGeom xmlns:a="http://schemas.openxmlformats.org/drawingml/2006/main" prst="straightConnector1">
-            <a:avLst/>
-          </a:prstGeom>
-          <a:ln xmlns:a="http://schemas.openxmlformats.org/drawingml/2006/main" w="19050">
-            <a:solidFill>
-              <a:srgbClr val="687B64"/>
-            </a:solidFill>
-            <a:tailEnd type="arrow" w="med" len="med"/>
-          </a:ln>
-        </p:spPr>
-      </p:cxnSp>
-      <p:cxnSp>
-        <p:nvCxnSpPr>
-          <p:cNvPr id="8" name="">
-            <a:extLst xmlns:a="http://schemas.openxmlformats.org/drawingml/2006/main">
-              <a:ext uri="{FF2B5EF4-FFF2-40B4-BE49-F238E27FC236}">
-                <a16:creationId xmlns:a16="http://schemas.microsoft.com/office/drawing/2014/main" id="{F6822AE1-232D-402A-A76A-B439AC9E923D}"/>
-              </a:ext>
-            </a:extLst>
-          </p:cNvPr>
-          <p:cNvCxnSpPr>
-            <a:stCxn xmlns:a="http://schemas.openxmlformats.org/drawingml/2006/main" id="4" idx="3"/>
-            <a:endCxn xmlns:a="http://schemas.openxmlformats.org/drawingml/2006/main" id="5" idx="1"/>
-          </p:cNvCxnSpPr>
-          <p:nvPr/>
-        </p:nvCxnSpPr>
-        <p:spPr>
-          <a:xfrm xmlns:a="http://schemas.openxmlformats.org/drawingml/2006/main">
-            <a:off x="8429625" y="2333625"/>
-            <a:ext cx="762000" cy="0"/>
-          </a:xfrm>
-          <a:prstGeom xmlns:a="http://schemas.openxmlformats.org/drawingml/2006/main" prst="straightConnector1">
-            <a:avLst/>
-          </a:prstGeom>
-          <a:ln xmlns:a="http://schemas.openxmlformats.org/drawingml/2006/main" w="19050">
-            <a:solidFill>
-              <a:srgbClr val="687B64"/>
-            </a:solidFill>
-            <a:tailEnd type="arrow" w="med" len="med"/>
-          </a:ln>
-        </p:spPr>
-      </p:cxnSp>
-      <p:cxnSp>
-        <p:nvCxnSpPr>
-          <p:cNvPr id="7" name="">
-            <a:extLst xmlns:a="http://schemas.openxmlformats.org/drawingml/2006/main">
-              <a:ext uri="{FF2B5EF4-FFF2-40B4-BE49-F238E27FC236}">
-                <a16:creationId xmlns:a16="http://schemas.microsoft.com/office/drawing/2014/main" id="{BCC0596A-3104-4762-B2CC-C9CB7BB4A423}"/>
-              </a:ext>
-            </a:extLst>
-          </p:cNvPr>
-          <p:cNvCxnSpPr>
-            <a:stCxn xmlns:a="http://schemas.openxmlformats.org/drawingml/2006/main" id="3" idx="3"/>
-            <a:endCxn xmlns:a="http://schemas.openxmlformats.org/drawingml/2006/main" id="4" idx="1"/>
-          </p:cNvCxnSpPr>
-          <p:nvPr/>
-        </p:nvCxnSpPr>
-        <p:spPr>
-          <a:xfrm xmlns:a="http://schemas.openxmlformats.org/drawingml/2006/main">
-            <a:off x="5572125" y="2333625"/>
-            <a:ext cx="762000" cy="0"/>
-          </a:xfrm>
-          <a:prstGeom xmlns:a="http://schemas.openxmlformats.org/drawingml/2006/main" prst="straightConnector1">
-            <a:avLst/>
-          </a:prstGeom>
-          <a:ln xmlns:a="http://schemas.openxmlformats.org/drawingml/2006/main" w="19050">
-            <a:solidFill>
-              <a:srgbClr val="687B64"/>
-            </a:solidFill>
-            <a:tailEnd type="arrow" w="med" len="med"/>
-          </a:ln>
-        </p:spPr>
-      </p:cxnSp>
-      <p:cxnSp>
-        <p:nvCxnSpPr>
-          <p:cNvPr id="6" name="">
-            <a:extLst xmlns:a="http://schemas.openxmlformats.org/drawingml/2006/main">
-              <a:ext uri="{FF2B5EF4-FFF2-40B4-BE49-F238E27FC236}">
-                <a16:creationId xmlns:a16="http://schemas.microsoft.com/office/drawing/2014/main" id="{45C07E88-D2E0-44A7-B7D4-439C78359D26}"/>
-              </a:ext>
-            </a:extLst>
-          </p:cNvPr>
-          <p:cNvCxnSpPr>
-            <a:stCxn xmlns:a="http://schemas.openxmlformats.org/drawingml/2006/main" id="2" idx="3"/>
-            <a:endCxn xmlns:a="http://schemas.openxmlformats.org/drawingml/2006/main" id="3" idx="1"/>
-          </p:cNvCxnSpPr>
-          <p:nvPr/>
-        </p:nvCxnSpPr>
-        <p:spPr>
-          <a:xfrm xmlns:a="http://schemas.openxmlformats.org/drawingml/2006/main">
-            <a:off x="2714625" y="2333625"/>
-            <a:ext cx="762000" cy="0"/>
-          </a:xfrm>
-          <a:prstGeom xmlns:a="http://schemas.openxmlformats.org/drawingml/2006/main" prst="straightConnector1">
-            <a:avLst/>
-          </a:prstGeom>
-          <a:ln xmlns:a="http://schemas.openxmlformats.org/drawingml/2006/main" w="19050">
-            <a:solidFill>
-              <a:srgbClr val="687B64"/>
-            </a:solidFill>
-            <a:tailEnd type="arrow" w="med" len="med"/>
-          </a:ln>
-        </p:spPr>
-      </p:cxnSp>
-      <p:sp>
-        <p:nvSpPr>
-          <p:cNvPr id="14" name="">
-            <a:extLst xmlns:a="http://schemas.openxmlformats.org/drawingml/2006/main">
-              <a:ext uri="{FF2B5EF4-FFF2-40B4-BE49-F238E27FC236}">
-                <a16:creationId xmlns:a16="http://schemas.microsoft.com/office/drawing/2014/main" id="{77877752-1696-4AE5-BE3C-2A71DE3DA601}"/>
-              </a:ext>
-            </a:extLst>
-          </p:cNvPr>
-          <p:cNvSpPr>
-            <a:spLocks xmlns:a="http://schemas.openxmlformats.org/drawingml/2006/main" noGrp="1"/>
-          </p:cNvSpPr>
-          <p:nvPr/>
-        </p:nvSpPr>
-        <p:spPr>
-          <a:xfrm xmlns:a="http://schemas.openxmlformats.org/drawingml/2006/main">
-            <a:off x="609600" y="476250"/>
-            <a:ext cx="10858500" cy="714375"/>
+            <a:off x="609600" y="381000"/>
+            <a:ext cx="10972800" cy="723900"/>
           </a:xfrm>
           <a:prstGeom xmlns:a="http://schemas.openxmlformats.org/drawingml/2006/main" prst="rect">
             <a:avLst/>
@@ -5035,9 +6579,9 @@
           <a:bodyPr xmlns:a="http://schemas.openxmlformats.org/drawingml/2006/main"/>
           <a:lstStyle xmlns:a="http://schemas.openxmlformats.org/drawingml/2006/main">
             <a:defPPr>
-              <a:defRPr sz="3300" b="1">
-                <a:solidFill>
-                  <a:srgbClr val="23423C"/>
+              <a:defRPr sz="3600" b="1">
+                <a:solidFill>
+                  <a:srgbClr val="163D38"/>
                 </a:solidFill>
                 <a:latin typeface="Arial"/>
                 <a:ea typeface="Arial"/>
@@ -5047,9 +6591,9 @@
           </a:lstStyle>
           <a:p xmlns:a="http://schemas.openxmlformats.org/drawingml/2006/main">
             <a:pPr>
-              <a:defRPr sz="3300" b="1">
-                <a:solidFill>
-                  <a:srgbClr val="23423C"/>
+              <a:defRPr sz="3600" b="1">
+                <a:solidFill>
+                  <a:srgbClr val="163D38"/>
                 </a:solidFill>
                 <a:latin typeface="Arial"/>
                 <a:ea typeface="Arial"/>
@@ -5057,15 +6601,15 @@
               </a:defRPr>
             </a:pPr>
             <a:r>
-              <a:rPr sz="3300" b="1">
-                <a:solidFill>
-                  <a:srgbClr val="23423C"/>
+              <a:rPr sz="3600" b="1">
+                <a:solidFill>
+                  <a:srgbClr val="163D38"/>
                 </a:solidFill>
                 <a:latin typeface="Arial"/>
                 <a:ea typeface="Arial"/>
                 <a:cs typeface="Arial"/>
               </a:rPr>
-              <a:t>Application architecture</a:t>
+              <a:t>Stack and source</a:t>
             </a:r>
           </a:p>
         </p:txBody>
@@ -5075,7 +6619,7 @@
           <p:cNvPr id="2" name="">
             <a:extLst xmlns:a="http://schemas.openxmlformats.org/drawingml/2006/main">
               <a:ext uri="{FF2B5EF4-FFF2-40B4-BE49-F238E27FC236}">
-                <a16:creationId xmlns:a16="http://schemas.microsoft.com/office/drawing/2014/main" id="{FD1C34C7-6DC5-4CB5-8925-9D07780E0626}"/>
+                <a16:creationId xmlns:a16="http://schemas.microsoft.com/office/drawing/2014/main" id="{6336D1FF-A599-4F4F-81AF-6C799DB59021}"/>
               </a:ext>
             </a:extLst>
           </p:cNvPr>
@@ -5086,428 +6630,8 @@
         </p:nvSpPr>
         <p:spPr>
           <a:xfrm xmlns:a="http://schemas.openxmlformats.org/drawingml/2006/main">
-            <a:off x="619125" y="1905000"/>
-            <a:ext cx="2095500" cy="857250"/>
-          </a:xfrm>
-          <a:prstGeom xmlns:a="http://schemas.openxmlformats.org/drawingml/2006/main" prst="rect">
-            <a:avLst/>
-          </a:prstGeom>
-          <a:solidFill xmlns:a="http://schemas.openxmlformats.org/drawingml/2006/main">
-            <a:srgbClr val="E5EBDF"/>
-          </a:solidFill>
-          <a:ln xmlns:a="http://schemas.openxmlformats.org/drawingml/2006/main" w="14288">
-            <a:solidFill>
-              <a:srgbClr val="8B9E7E"/>
-            </a:solidFill>
-          </a:ln>
-        </p:spPr>
-        <p:txBody>
-          <a:bodyPr xmlns:a="http://schemas.openxmlformats.org/drawingml/2006/main"/>
-          <a:lstStyle xmlns:a="http://schemas.openxmlformats.org/drawingml/2006/main">
-            <a:defPPr algn="ctr">
-              <a:defRPr sz="1950" b="1">
-                <a:solidFill>
-                  <a:srgbClr val="23423C"/>
-                </a:solidFill>
-                <a:latin typeface="Arial"/>
-                <a:ea typeface="Arial"/>
-                <a:cs typeface="Arial"/>
-              </a:defRPr>
-            </a:defPPr>
-          </a:lstStyle>
-          <a:p xmlns:a="http://schemas.openxmlformats.org/drawingml/2006/main">
-            <a:pPr algn="ctr">
-              <a:defRPr sz="1950" b="1">
-                <a:solidFill>
-                  <a:srgbClr val="23423C"/>
-                </a:solidFill>
-                <a:latin typeface="Arial"/>
-                <a:ea typeface="Arial"/>
-                <a:cs typeface="Arial"/>
-              </a:defRPr>
-            </a:pPr>
-            <a:r>
-              <a:rPr sz="1950" b="1">
-                <a:solidFill>
-                  <a:srgbClr val="23423C"/>
-                </a:solidFill>
-                <a:latin typeface="Arial"/>
-                <a:ea typeface="Arial"/>
-                <a:cs typeface="Arial"/>
-              </a:rPr>
-              <a:t>Browser</a:t>
-            </a:r>
-          </a:p>
-        </p:txBody>
-      </p:sp>
-      <p:sp>
-        <p:nvSpPr>
-          <p:cNvPr id="3" name="">
-            <a:extLst xmlns:a="http://schemas.openxmlformats.org/drawingml/2006/main">
-              <a:ext uri="{FF2B5EF4-FFF2-40B4-BE49-F238E27FC236}">
-                <a16:creationId xmlns:a16="http://schemas.microsoft.com/office/drawing/2014/main" id="{DE2A23AB-0312-4B5A-99AC-40F8C85D606B}"/>
-              </a:ext>
-            </a:extLst>
-          </p:cNvPr>
-          <p:cNvSpPr>
-            <a:spLocks xmlns:a="http://schemas.openxmlformats.org/drawingml/2006/main" noGrp="1"/>
-          </p:cNvSpPr>
-          <p:nvPr/>
-        </p:nvSpPr>
-        <p:spPr>
-          <a:xfrm xmlns:a="http://schemas.openxmlformats.org/drawingml/2006/main">
-            <a:off x="3476625" y="1905000"/>
-            <a:ext cx="2095500" cy="857250"/>
-          </a:xfrm>
-          <a:prstGeom xmlns:a="http://schemas.openxmlformats.org/drawingml/2006/main" prst="rect">
-            <a:avLst/>
-          </a:prstGeom>
-          <a:solidFill xmlns:a="http://schemas.openxmlformats.org/drawingml/2006/main">
-            <a:srgbClr val="E5EBDF"/>
-          </a:solidFill>
-          <a:ln xmlns:a="http://schemas.openxmlformats.org/drawingml/2006/main" w="14288">
-            <a:solidFill>
-              <a:srgbClr val="8B9E7E"/>
-            </a:solidFill>
-          </a:ln>
-        </p:spPr>
-        <p:txBody>
-          <a:bodyPr xmlns:a="http://schemas.openxmlformats.org/drawingml/2006/main"/>
-          <a:lstStyle xmlns:a="http://schemas.openxmlformats.org/drawingml/2006/main">
-            <a:defPPr algn="ctr">
-              <a:defRPr sz="1950" b="1">
-                <a:solidFill>
-                  <a:srgbClr val="23423C"/>
-                </a:solidFill>
-                <a:latin typeface="Arial"/>
-                <a:ea typeface="Arial"/>
-                <a:cs typeface="Arial"/>
-              </a:defRPr>
-            </a:defPPr>
-          </a:lstStyle>
-          <a:p xmlns:a="http://schemas.openxmlformats.org/drawingml/2006/main">
-            <a:pPr algn="ctr">
-              <a:defRPr sz="1950" b="1">
-                <a:solidFill>
-                  <a:srgbClr val="23423C"/>
-                </a:solidFill>
-                <a:latin typeface="Arial"/>
-                <a:ea typeface="Arial"/>
-                <a:cs typeface="Arial"/>
-              </a:defRPr>
-            </a:pPr>
-            <a:r>
-              <a:rPr sz="1950" b="1">
-                <a:solidFill>
-                  <a:srgbClr val="23423C"/>
-                </a:solidFill>
-                <a:latin typeface="Arial"/>
-                <a:ea typeface="Arial"/>
-                <a:cs typeface="Arial"/>
-              </a:rPr>
-              <a:t>Ingress / Nginx</a:t>
-            </a:r>
-          </a:p>
-        </p:txBody>
-      </p:sp>
-      <p:sp>
-        <p:nvSpPr>
-          <p:cNvPr id="4" name="">
-            <a:extLst xmlns:a="http://schemas.openxmlformats.org/drawingml/2006/main">
-              <a:ext uri="{FF2B5EF4-FFF2-40B4-BE49-F238E27FC236}">
-                <a16:creationId xmlns:a16="http://schemas.microsoft.com/office/drawing/2014/main" id="{6D7C4DCF-05D4-400C-B88B-633E3509DD48}"/>
-              </a:ext>
-            </a:extLst>
-          </p:cNvPr>
-          <p:cNvSpPr>
-            <a:spLocks xmlns:a="http://schemas.openxmlformats.org/drawingml/2006/main" noGrp="1"/>
-          </p:cNvSpPr>
-          <p:nvPr/>
-        </p:nvSpPr>
-        <p:spPr>
-          <a:xfrm xmlns:a="http://schemas.openxmlformats.org/drawingml/2006/main">
-            <a:off x="6334125" y="1905000"/>
-            <a:ext cx="2095500" cy="857250"/>
-          </a:xfrm>
-          <a:prstGeom xmlns:a="http://schemas.openxmlformats.org/drawingml/2006/main" prst="rect">
-            <a:avLst/>
-          </a:prstGeom>
-          <a:solidFill xmlns:a="http://schemas.openxmlformats.org/drawingml/2006/main">
-            <a:srgbClr val="E5EBDF"/>
-          </a:solidFill>
-          <a:ln xmlns:a="http://schemas.openxmlformats.org/drawingml/2006/main" w="14288">
-            <a:solidFill>
-              <a:srgbClr val="8B9E7E"/>
-            </a:solidFill>
-          </a:ln>
-        </p:spPr>
-        <p:txBody>
-          <a:bodyPr xmlns:a="http://schemas.openxmlformats.org/drawingml/2006/main"/>
-          <a:lstStyle xmlns:a="http://schemas.openxmlformats.org/drawingml/2006/main">
-            <a:defPPr algn="ctr">
-              <a:defRPr sz="1950" b="1">
-                <a:solidFill>
-                  <a:srgbClr val="23423C"/>
-                </a:solidFill>
-                <a:latin typeface="Arial"/>
-                <a:ea typeface="Arial"/>
-                <a:cs typeface="Arial"/>
-              </a:defRPr>
-            </a:defPPr>
-          </a:lstStyle>
-          <a:p xmlns:a="http://schemas.openxmlformats.org/drawingml/2006/main">
-            <a:pPr algn="ctr">
-              <a:defRPr sz="1950" b="1">
-                <a:solidFill>
-                  <a:srgbClr val="23423C"/>
-                </a:solidFill>
-                <a:latin typeface="Arial"/>
-                <a:ea typeface="Arial"/>
-                <a:cs typeface="Arial"/>
-              </a:defRPr>
-            </a:pPr>
-            <a:r>
-              <a:rPr sz="1950" b="1">
-                <a:solidFill>
-                  <a:srgbClr val="23423C"/>
-                </a:solidFill>
-                <a:latin typeface="Arial"/>
-                <a:ea typeface="Arial"/>
-                <a:cs typeface="Arial"/>
-              </a:rPr>
-              <a:t>FastAPI</a:t>
-            </a:r>
-          </a:p>
-        </p:txBody>
-      </p:sp>
-      <p:sp>
-        <p:nvSpPr>
-          <p:cNvPr id="5" name="">
-            <a:extLst xmlns:a="http://schemas.openxmlformats.org/drawingml/2006/main">
-              <a:ext uri="{FF2B5EF4-FFF2-40B4-BE49-F238E27FC236}">
-                <a16:creationId xmlns:a16="http://schemas.microsoft.com/office/drawing/2014/main" id="{E1A29186-5D37-44FB-BC93-7CCD838D9E31}"/>
-              </a:ext>
-            </a:extLst>
-          </p:cNvPr>
-          <p:cNvSpPr>
-            <a:spLocks xmlns:a="http://schemas.openxmlformats.org/drawingml/2006/main" noGrp="1"/>
-          </p:cNvSpPr>
-          <p:nvPr/>
-        </p:nvSpPr>
-        <p:spPr>
-          <a:xfrm xmlns:a="http://schemas.openxmlformats.org/drawingml/2006/main">
-            <a:off x="9191625" y="1905000"/>
-            <a:ext cx="2095500" cy="857250"/>
-          </a:xfrm>
-          <a:prstGeom xmlns:a="http://schemas.openxmlformats.org/drawingml/2006/main" prst="rect">
-            <a:avLst/>
-          </a:prstGeom>
-          <a:solidFill xmlns:a="http://schemas.openxmlformats.org/drawingml/2006/main">
-            <a:srgbClr val="E5EBDF"/>
-          </a:solidFill>
-          <a:ln xmlns:a="http://schemas.openxmlformats.org/drawingml/2006/main" w="14288">
-            <a:solidFill>
-              <a:srgbClr val="8B9E7E"/>
-            </a:solidFill>
-          </a:ln>
-        </p:spPr>
-        <p:txBody>
-          <a:bodyPr xmlns:a="http://schemas.openxmlformats.org/drawingml/2006/main"/>
-          <a:lstStyle xmlns:a="http://schemas.openxmlformats.org/drawingml/2006/main">
-            <a:defPPr algn="ctr">
-              <a:defRPr sz="1950" b="1">
-                <a:solidFill>
-                  <a:srgbClr val="23423C"/>
-                </a:solidFill>
-                <a:latin typeface="Arial"/>
-                <a:ea typeface="Arial"/>
-                <a:cs typeface="Arial"/>
-              </a:defRPr>
-            </a:defPPr>
-          </a:lstStyle>
-          <a:p xmlns:a="http://schemas.openxmlformats.org/drawingml/2006/main">
-            <a:pPr algn="ctr">
-              <a:defRPr sz="1950" b="1">
-                <a:solidFill>
-                  <a:srgbClr val="23423C"/>
-                </a:solidFill>
-                <a:latin typeface="Arial"/>
-                <a:ea typeface="Arial"/>
-                <a:cs typeface="Arial"/>
-              </a:defRPr>
-            </a:pPr>
-            <a:r>
-              <a:rPr sz="1950" b="1">
-                <a:solidFill>
-                  <a:srgbClr val="23423C"/>
-                </a:solidFill>
-                <a:latin typeface="Arial"/>
-                <a:ea typeface="Arial"/>
-                <a:cs typeface="Arial"/>
-              </a:rPr>
-              <a:t>PostgreSQL</a:t>
-            </a:r>
-          </a:p>
-        </p:txBody>
-      </p:sp>
-      <p:sp>
-        <p:nvSpPr>
-          <p:cNvPr id="9" name="">
-            <a:extLst xmlns:a="http://schemas.openxmlformats.org/drawingml/2006/main">
-              <a:ext uri="{FF2B5EF4-FFF2-40B4-BE49-F238E27FC236}">
-                <a16:creationId xmlns:a16="http://schemas.microsoft.com/office/drawing/2014/main" id="{47A99919-869F-40C5-B514-912EE26C2152}"/>
-              </a:ext>
-            </a:extLst>
-          </p:cNvPr>
-          <p:cNvSpPr>
-            <a:spLocks xmlns:a="http://schemas.openxmlformats.org/drawingml/2006/main" noGrp="1"/>
-          </p:cNvSpPr>
-          <p:nvPr/>
-        </p:nvSpPr>
-        <p:spPr>
-          <a:xfrm xmlns:a="http://schemas.openxmlformats.org/drawingml/2006/main">
-            <a:off x="6238875" y="4143375"/>
-            <a:ext cx="2095500" cy="857250"/>
-          </a:xfrm>
-          <a:prstGeom xmlns:a="http://schemas.openxmlformats.org/drawingml/2006/main" prst="rect">
-            <a:avLst/>
-          </a:prstGeom>
-          <a:solidFill xmlns:a="http://schemas.openxmlformats.org/drawingml/2006/main">
-            <a:srgbClr val="E5EBDF"/>
-          </a:solidFill>
-          <a:ln xmlns:a="http://schemas.openxmlformats.org/drawingml/2006/main" w="14288">
-            <a:solidFill>
-              <a:srgbClr val="8B9E7E"/>
-            </a:solidFill>
-          </a:ln>
-        </p:spPr>
-        <p:txBody>
-          <a:bodyPr xmlns:a="http://schemas.openxmlformats.org/drawingml/2006/main"/>
-          <a:lstStyle xmlns:a="http://schemas.openxmlformats.org/drawingml/2006/main">
-            <a:defPPr algn="ctr">
-              <a:defRPr sz="1950" b="1">
-                <a:solidFill>
-                  <a:srgbClr val="23423C"/>
-                </a:solidFill>
-                <a:latin typeface="Arial"/>
-                <a:ea typeface="Arial"/>
-                <a:cs typeface="Arial"/>
-              </a:defRPr>
-            </a:defPPr>
-          </a:lstStyle>
-          <a:p xmlns:a="http://schemas.openxmlformats.org/drawingml/2006/main">
-            <a:pPr algn="ctr">
-              <a:defRPr sz="1950" b="1">
-                <a:solidFill>
-                  <a:srgbClr val="23423C"/>
-                </a:solidFill>
-                <a:latin typeface="Arial"/>
-                <a:ea typeface="Arial"/>
-                <a:cs typeface="Arial"/>
-              </a:defRPr>
-            </a:pPr>
-            <a:r>
-              <a:rPr sz="1950" b="1">
-                <a:solidFill>
-                  <a:srgbClr val="23423C"/>
-                </a:solidFill>
-                <a:latin typeface="Arial"/>
-                <a:ea typeface="Arial"/>
-                <a:cs typeface="Arial"/>
-              </a:rPr>
-              <a:t>Prometheus</a:t>
-            </a:r>
-          </a:p>
-        </p:txBody>
-      </p:sp>
-      <p:sp>
-        <p:nvSpPr>
-          <p:cNvPr id="10" name="">
-            <a:extLst xmlns:a="http://schemas.openxmlformats.org/drawingml/2006/main">
-              <a:ext uri="{FF2B5EF4-FFF2-40B4-BE49-F238E27FC236}">
-                <a16:creationId xmlns:a16="http://schemas.microsoft.com/office/drawing/2014/main" id="{6E3C735E-2E77-4183-B5B5-682D0CDD32EE}"/>
-              </a:ext>
-            </a:extLst>
-          </p:cNvPr>
-          <p:cNvSpPr>
-            <a:spLocks xmlns:a="http://schemas.openxmlformats.org/drawingml/2006/main" noGrp="1"/>
-          </p:cNvSpPr>
-          <p:nvPr/>
-        </p:nvSpPr>
-        <p:spPr>
-          <a:xfrm xmlns:a="http://schemas.openxmlformats.org/drawingml/2006/main">
-            <a:off x="9191625" y="4143375"/>
-            <a:ext cx="2095500" cy="857250"/>
-          </a:xfrm>
-          <a:prstGeom xmlns:a="http://schemas.openxmlformats.org/drawingml/2006/main" prst="rect">
-            <a:avLst/>
-          </a:prstGeom>
-          <a:solidFill xmlns:a="http://schemas.openxmlformats.org/drawingml/2006/main">
-            <a:srgbClr val="E5EBDF"/>
-          </a:solidFill>
-          <a:ln xmlns:a="http://schemas.openxmlformats.org/drawingml/2006/main" w="14288">
-            <a:solidFill>
-              <a:srgbClr val="8B9E7E"/>
-            </a:solidFill>
-          </a:ln>
-        </p:spPr>
-        <p:txBody>
-          <a:bodyPr xmlns:a="http://schemas.openxmlformats.org/drawingml/2006/main"/>
-          <a:lstStyle xmlns:a="http://schemas.openxmlformats.org/drawingml/2006/main">
-            <a:defPPr algn="ctr">
-              <a:defRPr sz="1950" b="1">
-                <a:solidFill>
-                  <a:srgbClr val="23423C"/>
-                </a:solidFill>
-                <a:latin typeface="Arial"/>
-                <a:ea typeface="Arial"/>
-                <a:cs typeface="Arial"/>
-              </a:defRPr>
-            </a:defPPr>
-          </a:lstStyle>
-          <a:p xmlns:a="http://schemas.openxmlformats.org/drawingml/2006/main">
-            <a:pPr algn="ctr">
-              <a:defRPr sz="1950" b="1">
-                <a:solidFill>
-                  <a:srgbClr val="23423C"/>
-                </a:solidFill>
-                <a:latin typeface="Arial"/>
-                <a:ea typeface="Arial"/>
-                <a:cs typeface="Arial"/>
-              </a:defRPr>
-            </a:pPr>
-            <a:r>
-              <a:rPr sz="1950" b="1">
-                <a:solidFill>
-                  <a:srgbClr val="23423C"/>
-                </a:solidFill>
-                <a:latin typeface="Arial"/>
-                <a:ea typeface="Arial"/>
-                <a:cs typeface="Arial"/>
-              </a:rPr>
-              <a:t>Grafana</a:t>
-            </a:r>
-          </a:p>
-        </p:txBody>
-      </p:sp>
-      <p:sp>
-        <p:nvSpPr>
-          <p:cNvPr id="13" name="">
-            <a:extLst xmlns:a="http://schemas.openxmlformats.org/drawingml/2006/main">
-              <a:ext uri="{FF2B5EF4-FFF2-40B4-BE49-F238E27FC236}">
-                <a16:creationId xmlns:a16="http://schemas.microsoft.com/office/drawing/2014/main" id="{2E242D25-C7DD-40CC-B8F6-C64F070CF072}"/>
-              </a:ext>
-            </a:extLst>
-          </p:cNvPr>
-          <p:cNvSpPr>
-            <a:spLocks xmlns:a="http://schemas.openxmlformats.org/drawingml/2006/main" noGrp="1"/>
-          </p:cNvSpPr>
-          <p:nvPr/>
-        </p:nvSpPr>
-        <p:spPr>
-          <a:xfrm xmlns:a="http://schemas.openxmlformats.org/drawingml/2006/main">
-            <a:off x="685800" y="5524500"/>
-            <a:ext cx="10668000" cy="762000"/>
+            <a:off x="619125" y="1476375"/>
+            <a:ext cx="2076450" cy="476250"/>
           </a:xfrm>
           <a:prstGeom xmlns:a="http://schemas.openxmlformats.org/drawingml/2006/main" prst="rect">
             <a:avLst/>
@@ -5521,9 +6645,9 @@
           <a:bodyPr xmlns:a="http://schemas.openxmlformats.org/drawingml/2006/main"/>
           <a:lstStyle xmlns:a="http://schemas.openxmlformats.org/drawingml/2006/main">
             <a:defPPr>
-              <a:defRPr sz="2025" b="0">
-                <a:solidFill>
-                  <a:srgbClr val="23423C"/>
+              <a:defRPr sz="2100" b="1">
+                <a:solidFill>
+                  <a:srgbClr val="163D38"/>
                 </a:solidFill>
                 <a:latin typeface="Arial"/>
                 <a:ea typeface="Arial"/>
@@ -5533,9 +6657,75 @@
           </a:lstStyle>
           <a:p xmlns:a="http://schemas.openxmlformats.org/drawingml/2006/main">
             <a:pPr>
+              <a:defRPr sz="2100" b="1">
+                <a:solidFill>
+                  <a:srgbClr val="163D38"/>
+                </a:solidFill>
+                <a:latin typeface="Arial"/>
+                <a:ea typeface="Arial"/>
+                <a:cs typeface="Arial"/>
+              </a:defRPr>
+            </a:pPr>
+            <a:r>
+              <a:rPr sz="2100" b="1">
+                <a:solidFill>
+                  <a:srgbClr val="163D38"/>
+                </a:solidFill>
+                <a:latin typeface="Arial"/>
+                <a:ea typeface="Arial"/>
+                <a:cs typeface="Arial"/>
+              </a:rPr>
+              <a:t>Interface</a:t>
+            </a:r>
+          </a:p>
+        </p:txBody>
+      </p:sp>
+      <p:sp>
+        <p:nvSpPr>
+          <p:cNvPr id="3" name="">
+            <a:extLst xmlns:a="http://schemas.openxmlformats.org/drawingml/2006/main">
+              <a:ext uri="{FF2B5EF4-FFF2-40B4-BE49-F238E27FC236}">
+                <a16:creationId xmlns:a16="http://schemas.microsoft.com/office/drawing/2014/main" id="{B8B3F2F6-F3E5-4DA7-B02B-37DFADA853CB}"/>
+              </a:ext>
+            </a:extLst>
+          </p:cNvPr>
+          <p:cNvSpPr>
+            <a:spLocks xmlns:a="http://schemas.openxmlformats.org/drawingml/2006/main" noGrp="1"/>
+          </p:cNvSpPr>
+          <p:nvPr/>
+        </p:nvSpPr>
+        <p:spPr>
+          <a:xfrm xmlns:a="http://schemas.openxmlformats.org/drawingml/2006/main">
+            <a:off x="2857500" y="1476375"/>
+            <a:ext cx="8572500" cy="400050"/>
+          </a:xfrm>
+          <a:prstGeom xmlns:a="http://schemas.openxmlformats.org/drawingml/2006/main" prst="rect">
+            <a:avLst/>
+          </a:prstGeom>
+          <a:noFill xmlns:a="http://schemas.openxmlformats.org/drawingml/2006/main"/>
+          <a:ln xmlns:a="http://schemas.openxmlformats.org/drawingml/2006/main" w="0">
+            <a:noFill/>
+          </a:ln>
+        </p:spPr>
+        <p:txBody>
+          <a:bodyPr xmlns:a="http://schemas.openxmlformats.org/drawingml/2006/main"/>
+          <a:lstStyle xmlns:a="http://schemas.openxmlformats.org/drawingml/2006/main">
+            <a:defPPr>
               <a:defRPr sz="2025" b="0">
                 <a:solidFill>
-                  <a:srgbClr val="23423C"/>
+                  <a:srgbClr val="163D38"/>
+                </a:solidFill>
+                <a:latin typeface="Arial"/>
+                <a:ea typeface="Arial"/>
+                <a:cs typeface="Arial"/>
+              </a:defRPr>
+            </a:defPPr>
+          </a:lstStyle>
+          <a:p xmlns:a="http://schemas.openxmlformats.org/drawingml/2006/main">
+            <a:pPr>
+              <a:defRPr sz="2025" b="0">
+                <a:solidFill>
+                  <a:srgbClr val="163D38"/>
                 </a:solidFill>
                 <a:latin typeface="Arial"/>
                 <a:ea typeface="Arial"/>
@@ -5545,13 +6735,1069 @@
             <a:r>
               <a:rPr sz="2025" b="0">
                 <a:solidFill>
-                  <a:srgbClr val="23423C"/>
+                  <a:srgbClr val="163D38"/>
                 </a:solidFill>
                 <a:latin typeface="Arial"/>
                 <a:ea typeface="Arial"/>
                 <a:cs typeface="Arial"/>
               </a:rPr>
-              <a:t>Frontend requests use /api. The database stays behind an internal Service and a PVC.</a:t>
+              <a:t>React, Vite, Nginx</a:t>
+            </a:r>
+          </a:p>
+        </p:txBody>
+      </p:sp>
+      <p:sp>
+        <p:nvSpPr>
+          <p:cNvPr id="4" name="">
+            <a:extLst xmlns:a="http://schemas.openxmlformats.org/drawingml/2006/main">
+              <a:ext uri="{FF2B5EF4-FFF2-40B4-BE49-F238E27FC236}">
+                <a16:creationId xmlns:a16="http://schemas.microsoft.com/office/drawing/2014/main" id="{CE9C5AA9-94B9-40F9-BA7A-C826E4B02ED2}"/>
+              </a:ext>
+            </a:extLst>
+          </p:cNvPr>
+          <p:cNvSpPr>
+            <a:spLocks xmlns:a="http://schemas.openxmlformats.org/drawingml/2006/main" noGrp="1"/>
+          </p:cNvSpPr>
+          <p:nvPr/>
+        </p:nvSpPr>
+        <p:spPr>
+          <a:xfrm xmlns:a="http://schemas.openxmlformats.org/drawingml/2006/main">
+            <a:off x="2857500" y="1838325"/>
+            <a:ext cx="8572500" cy="304800"/>
+          </a:xfrm>
+          <a:prstGeom xmlns:a="http://schemas.openxmlformats.org/drawingml/2006/main" prst="rect">
+            <a:avLst/>
+          </a:prstGeom>
+          <a:noFill xmlns:a="http://schemas.openxmlformats.org/drawingml/2006/main"/>
+          <a:ln xmlns:a="http://schemas.openxmlformats.org/drawingml/2006/main" w="0">
+            <a:noFill/>
+          </a:ln>
+        </p:spPr>
+        <p:txBody>
+          <a:bodyPr xmlns:a="http://schemas.openxmlformats.org/drawingml/2006/main"/>
+          <a:lstStyle xmlns:a="http://schemas.openxmlformats.org/drawingml/2006/main">
+            <a:defPPr>
+              <a:defRPr sz="1575" b="0">
+                <a:solidFill>
+                  <a:srgbClr val="526963"/>
+                </a:solidFill>
+                <a:latin typeface="Arial"/>
+                <a:ea typeface="Arial"/>
+                <a:cs typeface="Arial"/>
+              </a:defRPr>
+            </a:defPPr>
+          </a:lstStyle>
+          <a:p xmlns:a="http://schemas.openxmlformats.org/drawingml/2006/main">
+            <a:pPr>
+              <a:defRPr sz="1575" b="0">
+                <a:solidFill>
+                  <a:srgbClr val="526963"/>
+                </a:solidFill>
+                <a:latin typeface="Arial"/>
+                <a:ea typeface="Arial"/>
+                <a:cs typeface="Arial"/>
+              </a:defRPr>
+            </a:pPr>
+            <a:r>
+              <a:rPr sz="1575" b="0">
+                <a:solidFill>
+                  <a:srgbClr val="526963"/>
+                </a:solidFill>
+                <a:latin typeface="Arial"/>
+                <a:ea typeface="Arial"/>
+                <a:cs typeface="Arial"/>
+              </a:rPr>
+              <a:t>project/frontend/</a:t>
+            </a:r>
+          </a:p>
+        </p:txBody>
+      </p:sp>
+      <p:sp>
+        <p:nvSpPr>
+          <p:cNvPr id="5" name="">
+            <a:extLst xmlns:a="http://schemas.openxmlformats.org/drawingml/2006/main">
+              <a:ext uri="{FF2B5EF4-FFF2-40B4-BE49-F238E27FC236}">
+                <a16:creationId xmlns:a16="http://schemas.microsoft.com/office/drawing/2014/main" id="{B659A230-FDC4-4311-80CA-2FABBAB92D89}"/>
+              </a:ext>
+            </a:extLst>
+          </p:cNvPr>
+          <p:cNvSpPr>
+            <a:spLocks xmlns:a="http://schemas.openxmlformats.org/drawingml/2006/main" noGrp="1"/>
+          </p:cNvSpPr>
+          <p:nvPr/>
+        </p:nvSpPr>
+        <p:spPr>
+          <a:xfrm xmlns:a="http://schemas.openxmlformats.org/drawingml/2006/main">
+            <a:off x="619125" y="2266950"/>
+            <a:ext cx="2076450" cy="476250"/>
+          </a:xfrm>
+          <a:prstGeom xmlns:a="http://schemas.openxmlformats.org/drawingml/2006/main" prst="rect">
+            <a:avLst/>
+          </a:prstGeom>
+          <a:noFill xmlns:a="http://schemas.openxmlformats.org/drawingml/2006/main"/>
+          <a:ln xmlns:a="http://schemas.openxmlformats.org/drawingml/2006/main" w="0">
+            <a:noFill/>
+          </a:ln>
+        </p:spPr>
+        <p:txBody>
+          <a:bodyPr xmlns:a="http://schemas.openxmlformats.org/drawingml/2006/main"/>
+          <a:lstStyle xmlns:a="http://schemas.openxmlformats.org/drawingml/2006/main">
+            <a:defPPr>
+              <a:defRPr sz="2100" b="1">
+                <a:solidFill>
+                  <a:srgbClr val="163D38"/>
+                </a:solidFill>
+                <a:latin typeface="Arial"/>
+                <a:ea typeface="Arial"/>
+                <a:cs typeface="Arial"/>
+              </a:defRPr>
+            </a:defPPr>
+          </a:lstStyle>
+          <a:p xmlns:a="http://schemas.openxmlformats.org/drawingml/2006/main">
+            <a:pPr>
+              <a:defRPr sz="2100" b="1">
+                <a:solidFill>
+                  <a:srgbClr val="163D38"/>
+                </a:solidFill>
+                <a:latin typeface="Arial"/>
+                <a:ea typeface="Arial"/>
+                <a:cs typeface="Arial"/>
+              </a:defRPr>
+            </a:pPr>
+            <a:r>
+              <a:rPr sz="2100" b="1">
+                <a:solidFill>
+                  <a:srgbClr val="163D38"/>
+                </a:solidFill>
+                <a:latin typeface="Arial"/>
+                <a:ea typeface="Arial"/>
+                <a:cs typeface="Arial"/>
+              </a:rPr>
+              <a:t>API and data</a:t>
+            </a:r>
+          </a:p>
+        </p:txBody>
+      </p:sp>
+      <p:sp>
+        <p:nvSpPr>
+          <p:cNvPr id="6" name="">
+            <a:extLst xmlns:a="http://schemas.openxmlformats.org/drawingml/2006/main">
+              <a:ext uri="{FF2B5EF4-FFF2-40B4-BE49-F238E27FC236}">
+                <a16:creationId xmlns:a16="http://schemas.microsoft.com/office/drawing/2014/main" id="{8A6C7CED-9E81-431C-88A3-56BD8BC3B2B1}"/>
+              </a:ext>
+            </a:extLst>
+          </p:cNvPr>
+          <p:cNvSpPr>
+            <a:spLocks xmlns:a="http://schemas.openxmlformats.org/drawingml/2006/main" noGrp="1"/>
+          </p:cNvSpPr>
+          <p:nvPr/>
+        </p:nvSpPr>
+        <p:spPr>
+          <a:xfrm xmlns:a="http://schemas.openxmlformats.org/drawingml/2006/main">
+            <a:off x="2857500" y="2266950"/>
+            <a:ext cx="8572500" cy="400050"/>
+          </a:xfrm>
+          <a:prstGeom xmlns:a="http://schemas.openxmlformats.org/drawingml/2006/main" prst="rect">
+            <a:avLst/>
+          </a:prstGeom>
+          <a:noFill xmlns:a="http://schemas.openxmlformats.org/drawingml/2006/main"/>
+          <a:ln xmlns:a="http://schemas.openxmlformats.org/drawingml/2006/main" w="0">
+            <a:noFill/>
+          </a:ln>
+        </p:spPr>
+        <p:txBody>
+          <a:bodyPr xmlns:a="http://schemas.openxmlformats.org/drawingml/2006/main"/>
+          <a:lstStyle xmlns:a="http://schemas.openxmlformats.org/drawingml/2006/main">
+            <a:defPPr>
+              <a:defRPr sz="2025" b="0">
+                <a:solidFill>
+                  <a:srgbClr val="163D38"/>
+                </a:solidFill>
+                <a:latin typeface="Arial"/>
+                <a:ea typeface="Arial"/>
+                <a:cs typeface="Arial"/>
+              </a:defRPr>
+            </a:defPPr>
+          </a:lstStyle>
+          <a:p xmlns:a="http://schemas.openxmlformats.org/drawingml/2006/main">
+            <a:pPr>
+              <a:defRPr sz="2025" b="0">
+                <a:solidFill>
+                  <a:srgbClr val="163D38"/>
+                </a:solidFill>
+                <a:latin typeface="Arial"/>
+                <a:ea typeface="Arial"/>
+                <a:cs typeface="Arial"/>
+              </a:defRPr>
+            </a:pPr>
+            <a:r>
+              <a:rPr sz="2025" b="0">
+                <a:solidFill>
+                  <a:srgbClr val="163D38"/>
+                </a:solidFill>
+                <a:latin typeface="Arial"/>
+                <a:ea typeface="Arial"/>
+                <a:cs typeface="Arial"/>
+              </a:rPr>
+              <a:t>FastAPI, SQLAlchemy, Alembic, PostgreSQL</a:t>
+            </a:r>
+          </a:p>
+        </p:txBody>
+      </p:sp>
+      <p:sp>
+        <p:nvSpPr>
+          <p:cNvPr id="7" name="">
+            <a:extLst xmlns:a="http://schemas.openxmlformats.org/drawingml/2006/main">
+              <a:ext uri="{FF2B5EF4-FFF2-40B4-BE49-F238E27FC236}">
+                <a16:creationId xmlns:a16="http://schemas.microsoft.com/office/drawing/2014/main" id="{D38C8605-A694-44F2-A123-2AA07D3053FD}"/>
+              </a:ext>
+            </a:extLst>
+          </p:cNvPr>
+          <p:cNvSpPr>
+            <a:spLocks xmlns:a="http://schemas.openxmlformats.org/drawingml/2006/main" noGrp="1"/>
+          </p:cNvSpPr>
+          <p:nvPr/>
+        </p:nvSpPr>
+        <p:spPr>
+          <a:xfrm xmlns:a="http://schemas.openxmlformats.org/drawingml/2006/main">
+            <a:off x="2857500" y="2628900"/>
+            <a:ext cx="8572500" cy="304800"/>
+          </a:xfrm>
+          <a:prstGeom xmlns:a="http://schemas.openxmlformats.org/drawingml/2006/main" prst="rect">
+            <a:avLst/>
+          </a:prstGeom>
+          <a:noFill xmlns:a="http://schemas.openxmlformats.org/drawingml/2006/main"/>
+          <a:ln xmlns:a="http://schemas.openxmlformats.org/drawingml/2006/main" w="0">
+            <a:noFill/>
+          </a:ln>
+        </p:spPr>
+        <p:txBody>
+          <a:bodyPr xmlns:a="http://schemas.openxmlformats.org/drawingml/2006/main"/>
+          <a:lstStyle xmlns:a="http://schemas.openxmlformats.org/drawingml/2006/main">
+            <a:defPPr>
+              <a:defRPr sz="1575" b="0">
+                <a:solidFill>
+                  <a:srgbClr val="526963"/>
+                </a:solidFill>
+                <a:latin typeface="Arial"/>
+                <a:ea typeface="Arial"/>
+                <a:cs typeface="Arial"/>
+              </a:defRPr>
+            </a:defPPr>
+          </a:lstStyle>
+          <a:p xmlns:a="http://schemas.openxmlformats.org/drawingml/2006/main">
+            <a:pPr>
+              <a:defRPr sz="1575" b="0">
+                <a:solidFill>
+                  <a:srgbClr val="526963"/>
+                </a:solidFill>
+                <a:latin typeface="Arial"/>
+                <a:ea typeface="Arial"/>
+                <a:cs typeface="Arial"/>
+              </a:defRPr>
+            </a:pPr>
+            <a:r>
+              <a:rPr sz="1575" b="0">
+                <a:solidFill>
+                  <a:srgbClr val="526963"/>
+                </a:solidFill>
+                <a:latin typeface="Arial"/>
+                <a:ea typeface="Arial"/>
+                <a:cs typeface="Arial"/>
+              </a:rPr>
+              <a:t>project/backend/</a:t>
+            </a:r>
+          </a:p>
+        </p:txBody>
+      </p:sp>
+      <p:sp>
+        <p:nvSpPr>
+          <p:cNvPr id="8" name="">
+            <a:extLst xmlns:a="http://schemas.openxmlformats.org/drawingml/2006/main">
+              <a:ext uri="{FF2B5EF4-FFF2-40B4-BE49-F238E27FC236}">
+                <a16:creationId xmlns:a16="http://schemas.microsoft.com/office/drawing/2014/main" id="{A8E120FE-AA8E-4DBF-AA08-313522009C1B}"/>
+              </a:ext>
+            </a:extLst>
+          </p:cNvPr>
+          <p:cNvSpPr>
+            <a:spLocks xmlns:a="http://schemas.openxmlformats.org/drawingml/2006/main" noGrp="1"/>
+          </p:cNvSpPr>
+          <p:nvPr/>
+        </p:nvSpPr>
+        <p:spPr>
+          <a:xfrm xmlns:a="http://schemas.openxmlformats.org/drawingml/2006/main">
+            <a:off x="619125" y="3057525"/>
+            <a:ext cx="2076450" cy="476250"/>
+          </a:xfrm>
+          <a:prstGeom xmlns:a="http://schemas.openxmlformats.org/drawingml/2006/main" prst="rect">
+            <a:avLst/>
+          </a:prstGeom>
+          <a:noFill xmlns:a="http://schemas.openxmlformats.org/drawingml/2006/main"/>
+          <a:ln xmlns:a="http://schemas.openxmlformats.org/drawingml/2006/main" w="0">
+            <a:noFill/>
+          </a:ln>
+        </p:spPr>
+        <p:txBody>
+          <a:bodyPr xmlns:a="http://schemas.openxmlformats.org/drawingml/2006/main"/>
+          <a:lstStyle xmlns:a="http://schemas.openxmlformats.org/drawingml/2006/main">
+            <a:defPPr>
+              <a:defRPr sz="2100" b="1">
+                <a:solidFill>
+                  <a:srgbClr val="163D38"/>
+                </a:solidFill>
+                <a:latin typeface="Arial"/>
+                <a:ea typeface="Arial"/>
+                <a:cs typeface="Arial"/>
+              </a:defRPr>
+            </a:defPPr>
+          </a:lstStyle>
+          <a:p xmlns:a="http://schemas.openxmlformats.org/drawingml/2006/main">
+            <a:pPr>
+              <a:defRPr sz="2100" b="1">
+                <a:solidFill>
+                  <a:srgbClr val="163D38"/>
+                </a:solidFill>
+                <a:latin typeface="Arial"/>
+                <a:ea typeface="Arial"/>
+                <a:cs typeface="Arial"/>
+              </a:defRPr>
+            </a:pPr>
+            <a:r>
+              <a:rPr sz="2100" b="1">
+                <a:solidFill>
+                  <a:srgbClr val="163D38"/>
+                </a:solidFill>
+                <a:latin typeface="Arial"/>
+                <a:ea typeface="Arial"/>
+                <a:cs typeface="Arial"/>
+              </a:rPr>
+              <a:t>Packaging</a:t>
+            </a:r>
+          </a:p>
+        </p:txBody>
+      </p:sp>
+      <p:sp>
+        <p:nvSpPr>
+          <p:cNvPr id="9" name="">
+            <a:extLst xmlns:a="http://schemas.openxmlformats.org/drawingml/2006/main">
+              <a:ext uri="{FF2B5EF4-FFF2-40B4-BE49-F238E27FC236}">
+                <a16:creationId xmlns:a16="http://schemas.microsoft.com/office/drawing/2014/main" id="{33643ADD-FAC6-454C-A22B-89225189CE74}"/>
+              </a:ext>
+            </a:extLst>
+          </p:cNvPr>
+          <p:cNvSpPr>
+            <a:spLocks xmlns:a="http://schemas.openxmlformats.org/drawingml/2006/main" noGrp="1"/>
+          </p:cNvSpPr>
+          <p:nvPr/>
+        </p:nvSpPr>
+        <p:spPr>
+          <a:xfrm xmlns:a="http://schemas.openxmlformats.org/drawingml/2006/main">
+            <a:off x="2857500" y="3057525"/>
+            <a:ext cx="8572500" cy="400050"/>
+          </a:xfrm>
+          <a:prstGeom xmlns:a="http://schemas.openxmlformats.org/drawingml/2006/main" prst="rect">
+            <a:avLst/>
+          </a:prstGeom>
+          <a:noFill xmlns:a="http://schemas.openxmlformats.org/drawingml/2006/main"/>
+          <a:ln xmlns:a="http://schemas.openxmlformats.org/drawingml/2006/main" w="0">
+            <a:noFill/>
+          </a:ln>
+        </p:spPr>
+        <p:txBody>
+          <a:bodyPr xmlns:a="http://schemas.openxmlformats.org/drawingml/2006/main"/>
+          <a:lstStyle xmlns:a="http://schemas.openxmlformats.org/drawingml/2006/main">
+            <a:defPPr>
+              <a:defRPr sz="2025" b="0">
+                <a:solidFill>
+                  <a:srgbClr val="163D38"/>
+                </a:solidFill>
+                <a:latin typeface="Arial"/>
+                <a:ea typeface="Arial"/>
+                <a:cs typeface="Arial"/>
+              </a:defRPr>
+            </a:defPPr>
+          </a:lstStyle>
+          <a:p xmlns:a="http://schemas.openxmlformats.org/drawingml/2006/main">
+            <a:pPr>
+              <a:defRPr sz="2025" b="0">
+                <a:solidFill>
+                  <a:srgbClr val="163D38"/>
+                </a:solidFill>
+                <a:latin typeface="Arial"/>
+                <a:ea typeface="Arial"/>
+                <a:cs typeface="Arial"/>
+              </a:defRPr>
+            </a:pPr>
+            <a:r>
+              <a:rPr sz="2025" b="0">
+                <a:solidFill>
+                  <a:srgbClr val="163D38"/>
+                </a:solidFill>
+                <a:latin typeface="Arial"/>
+                <a:ea typeface="Arial"/>
+                <a:cs typeface="Arial"/>
+              </a:rPr>
+              <a:t>Docker Compose, non-root application images</a:t>
+            </a:r>
+          </a:p>
+        </p:txBody>
+      </p:sp>
+      <p:sp>
+        <p:nvSpPr>
+          <p:cNvPr id="10" name="">
+            <a:extLst xmlns:a="http://schemas.openxmlformats.org/drawingml/2006/main">
+              <a:ext uri="{FF2B5EF4-FFF2-40B4-BE49-F238E27FC236}">
+                <a16:creationId xmlns:a16="http://schemas.microsoft.com/office/drawing/2014/main" id="{2C9495DD-E288-4678-AD5D-33153820F499}"/>
+              </a:ext>
+            </a:extLst>
+          </p:cNvPr>
+          <p:cNvSpPr>
+            <a:spLocks xmlns:a="http://schemas.openxmlformats.org/drawingml/2006/main" noGrp="1"/>
+          </p:cNvSpPr>
+          <p:nvPr/>
+        </p:nvSpPr>
+        <p:spPr>
+          <a:xfrm xmlns:a="http://schemas.openxmlformats.org/drawingml/2006/main">
+            <a:off x="2857500" y="3419475"/>
+            <a:ext cx="8572500" cy="304800"/>
+          </a:xfrm>
+          <a:prstGeom xmlns:a="http://schemas.openxmlformats.org/drawingml/2006/main" prst="rect">
+            <a:avLst/>
+          </a:prstGeom>
+          <a:noFill xmlns:a="http://schemas.openxmlformats.org/drawingml/2006/main"/>
+          <a:ln xmlns:a="http://schemas.openxmlformats.org/drawingml/2006/main" w="0">
+            <a:noFill/>
+          </a:ln>
+        </p:spPr>
+        <p:txBody>
+          <a:bodyPr xmlns:a="http://schemas.openxmlformats.org/drawingml/2006/main"/>
+          <a:lstStyle xmlns:a="http://schemas.openxmlformats.org/drawingml/2006/main">
+            <a:defPPr>
+              <a:defRPr sz="1575" b="0">
+                <a:solidFill>
+                  <a:srgbClr val="526963"/>
+                </a:solidFill>
+                <a:latin typeface="Arial"/>
+                <a:ea typeface="Arial"/>
+                <a:cs typeface="Arial"/>
+              </a:defRPr>
+            </a:defPPr>
+          </a:lstStyle>
+          <a:p xmlns:a="http://schemas.openxmlformats.org/drawingml/2006/main">
+            <a:pPr>
+              <a:defRPr sz="1575" b="0">
+                <a:solidFill>
+                  <a:srgbClr val="526963"/>
+                </a:solidFill>
+                <a:latin typeface="Arial"/>
+                <a:ea typeface="Arial"/>
+                <a:cs typeface="Arial"/>
+              </a:defRPr>
+            </a:pPr>
+            <a:r>
+              <a:rPr sz="1575" b="0">
+                <a:solidFill>
+                  <a:srgbClr val="526963"/>
+                </a:solidFill>
+                <a:latin typeface="Arial"/>
+                <a:ea typeface="Arial"/>
+                <a:cs typeface="Arial"/>
+              </a:rPr>
+              <a:t>project/docker-compose.yml</a:t>
+            </a:r>
+          </a:p>
+        </p:txBody>
+      </p:sp>
+      <p:sp>
+        <p:nvSpPr>
+          <p:cNvPr id="11" name="">
+            <a:extLst xmlns:a="http://schemas.openxmlformats.org/drawingml/2006/main">
+              <a:ext uri="{FF2B5EF4-FFF2-40B4-BE49-F238E27FC236}">
+                <a16:creationId xmlns:a16="http://schemas.microsoft.com/office/drawing/2014/main" id="{620F1977-5214-478C-BBC3-C38D751235F4}"/>
+              </a:ext>
+            </a:extLst>
+          </p:cNvPr>
+          <p:cNvSpPr>
+            <a:spLocks xmlns:a="http://schemas.openxmlformats.org/drawingml/2006/main" noGrp="1"/>
+          </p:cNvSpPr>
+          <p:nvPr/>
+        </p:nvSpPr>
+        <p:spPr>
+          <a:xfrm xmlns:a="http://schemas.openxmlformats.org/drawingml/2006/main">
+            <a:off x="619125" y="3848100"/>
+            <a:ext cx="2076450" cy="476250"/>
+          </a:xfrm>
+          <a:prstGeom xmlns:a="http://schemas.openxmlformats.org/drawingml/2006/main" prst="rect">
+            <a:avLst/>
+          </a:prstGeom>
+          <a:noFill xmlns:a="http://schemas.openxmlformats.org/drawingml/2006/main"/>
+          <a:ln xmlns:a="http://schemas.openxmlformats.org/drawingml/2006/main" w="0">
+            <a:noFill/>
+          </a:ln>
+        </p:spPr>
+        <p:txBody>
+          <a:bodyPr xmlns:a="http://schemas.openxmlformats.org/drawingml/2006/main"/>
+          <a:lstStyle xmlns:a="http://schemas.openxmlformats.org/drawingml/2006/main">
+            <a:defPPr>
+              <a:defRPr sz="2100" b="1">
+                <a:solidFill>
+                  <a:srgbClr val="163D38"/>
+                </a:solidFill>
+                <a:latin typeface="Arial"/>
+                <a:ea typeface="Arial"/>
+                <a:cs typeface="Arial"/>
+              </a:defRPr>
+            </a:defPPr>
+          </a:lstStyle>
+          <a:p xmlns:a="http://schemas.openxmlformats.org/drawingml/2006/main">
+            <a:pPr>
+              <a:defRPr sz="2100" b="1">
+                <a:solidFill>
+                  <a:srgbClr val="163D38"/>
+                </a:solidFill>
+                <a:latin typeface="Arial"/>
+                <a:ea typeface="Arial"/>
+                <a:cs typeface="Arial"/>
+              </a:defRPr>
+            </a:pPr>
+            <a:r>
+              <a:rPr sz="2100" b="1">
+                <a:solidFill>
+                  <a:srgbClr val="163D38"/>
+                </a:solidFill>
+                <a:latin typeface="Arial"/>
+                <a:ea typeface="Arial"/>
+                <a:cs typeface="Arial"/>
+              </a:rPr>
+              <a:t>Checks</a:t>
+            </a:r>
+          </a:p>
+        </p:txBody>
+      </p:sp>
+      <p:sp>
+        <p:nvSpPr>
+          <p:cNvPr id="12" name="">
+            <a:extLst xmlns:a="http://schemas.openxmlformats.org/drawingml/2006/main">
+              <a:ext uri="{FF2B5EF4-FFF2-40B4-BE49-F238E27FC236}">
+                <a16:creationId xmlns:a16="http://schemas.microsoft.com/office/drawing/2014/main" id="{0607711D-2882-431E-A0E5-F63BBBB8504B}"/>
+              </a:ext>
+            </a:extLst>
+          </p:cNvPr>
+          <p:cNvSpPr>
+            <a:spLocks xmlns:a="http://schemas.openxmlformats.org/drawingml/2006/main" noGrp="1"/>
+          </p:cNvSpPr>
+          <p:nvPr/>
+        </p:nvSpPr>
+        <p:spPr>
+          <a:xfrm xmlns:a="http://schemas.openxmlformats.org/drawingml/2006/main">
+            <a:off x="2857500" y="3848100"/>
+            <a:ext cx="8572500" cy="400050"/>
+          </a:xfrm>
+          <a:prstGeom xmlns:a="http://schemas.openxmlformats.org/drawingml/2006/main" prst="rect">
+            <a:avLst/>
+          </a:prstGeom>
+          <a:noFill xmlns:a="http://schemas.openxmlformats.org/drawingml/2006/main"/>
+          <a:ln xmlns:a="http://schemas.openxmlformats.org/drawingml/2006/main" w="0">
+            <a:noFill/>
+          </a:ln>
+        </p:spPr>
+        <p:txBody>
+          <a:bodyPr xmlns:a="http://schemas.openxmlformats.org/drawingml/2006/main"/>
+          <a:lstStyle xmlns:a="http://schemas.openxmlformats.org/drawingml/2006/main">
+            <a:defPPr>
+              <a:defRPr sz="2025" b="0">
+                <a:solidFill>
+                  <a:srgbClr val="163D38"/>
+                </a:solidFill>
+                <a:latin typeface="Arial"/>
+                <a:ea typeface="Arial"/>
+                <a:cs typeface="Arial"/>
+              </a:defRPr>
+            </a:defPPr>
+          </a:lstStyle>
+          <a:p xmlns:a="http://schemas.openxmlformats.org/drawingml/2006/main">
+            <a:pPr>
+              <a:defRPr sz="2025" b="0">
+                <a:solidFill>
+                  <a:srgbClr val="163D38"/>
+                </a:solidFill>
+                <a:latin typeface="Arial"/>
+                <a:ea typeface="Arial"/>
+                <a:cs typeface="Arial"/>
+              </a:defRPr>
+            </a:pPr>
+            <a:r>
+              <a:rPr sz="2025" b="0">
+                <a:solidFill>
+                  <a:srgbClr val="163D38"/>
+                </a:solidFill>
+                <a:latin typeface="Arial"/>
+                <a:ea typeface="Arial"/>
+                <a:cs typeface="Arial"/>
+              </a:rPr>
+              <a:t>Pytest, Ruff, Bandit, Gitleaks, Trivy</a:t>
+            </a:r>
+          </a:p>
+        </p:txBody>
+      </p:sp>
+      <p:sp>
+        <p:nvSpPr>
+          <p:cNvPr id="13" name="">
+            <a:extLst xmlns:a="http://schemas.openxmlformats.org/drawingml/2006/main">
+              <a:ext uri="{FF2B5EF4-FFF2-40B4-BE49-F238E27FC236}">
+                <a16:creationId xmlns:a16="http://schemas.microsoft.com/office/drawing/2014/main" id="{10B5A95E-F1A8-4FEC-AB01-51BF79C0EF8D}"/>
+              </a:ext>
+            </a:extLst>
+          </p:cNvPr>
+          <p:cNvSpPr>
+            <a:spLocks xmlns:a="http://schemas.openxmlformats.org/drawingml/2006/main" noGrp="1"/>
+          </p:cNvSpPr>
+          <p:nvPr/>
+        </p:nvSpPr>
+        <p:spPr>
+          <a:xfrm xmlns:a="http://schemas.openxmlformats.org/drawingml/2006/main">
+            <a:off x="2857500" y="4210050"/>
+            <a:ext cx="8572500" cy="304800"/>
+          </a:xfrm>
+          <a:prstGeom xmlns:a="http://schemas.openxmlformats.org/drawingml/2006/main" prst="rect">
+            <a:avLst/>
+          </a:prstGeom>
+          <a:noFill xmlns:a="http://schemas.openxmlformats.org/drawingml/2006/main"/>
+          <a:ln xmlns:a="http://schemas.openxmlformats.org/drawingml/2006/main" w="0">
+            <a:noFill/>
+          </a:ln>
+        </p:spPr>
+        <p:txBody>
+          <a:bodyPr xmlns:a="http://schemas.openxmlformats.org/drawingml/2006/main"/>
+          <a:lstStyle xmlns:a="http://schemas.openxmlformats.org/drawingml/2006/main">
+            <a:defPPr>
+              <a:defRPr sz="1575" b="0">
+                <a:solidFill>
+                  <a:srgbClr val="526963"/>
+                </a:solidFill>
+                <a:latin typeface="Arial"/>
+                <a:ea typeface="Arial"/>
+                <a:cs typeface="Arial"/>
+              </a:defRPr>
+            </a:defPPr>
+          </a:lstStyle>
+          <a:p xmlns:a="http://schemas.openxmlformats.org/drawingml/2006/main">
+            <a:pPr>
+              <a:defRPr sz="1575" b="0">
+                <a:solidFill>
+                  <a:srgbClr val="526963"/>
+                </a:solidFill>
+                <a:latin typeface="Arial"/>
+                <a:ea typeface="Arial"/>
+                <a:cs typeface="Arial"/>
+              </a:defRPr>
+            </a:pPr>
+            <a:r>
+              <a:rPr sz="1575" b="0">
+                <a:solidFill>
+                  <a:srgbClr val="526963"/>
+                </a:solidFill>
+                <a:latin typeface="Arial"/>
+                <a:ea typeface="Arial"/>
+                <a:cs typeface="Arial"/>
+              </a:rPr>
+              <a:t>GitHub Actions workflow</a:t>
+            </a:r>
+          </a:p>
+        </p:txBody>
+      </p:sp>
+      <p:sp>
+        <p:nvSpPr>
+          <p:cNvPr id="14" name="">
+            <a:extLst xmlns:a="http://schemas.openxmlformats.org/drawingml/2006/main">
+              <a:ext uri="{FF2B5EF4-FFF2-40B4-BE49-F238E27FC236}">
+                <a16:creationId xmlns:a16="http://schemas.microsoft.com/office/drawing/2014/main" id="{116C74FE-19AC-457A-9338-5828BAD72A69}"/>
+              </a:ext>
+            </a:extLst>
+          </p:cNvPr>
+          <p:cNvSpPr>
+            <a:spLocks xmlns:a="http://schemas.openxmlformats.org/drawingml/2006/main" noGrp="1"/>
+          </p:cNvSpPr>
+          <p:nvPr/>
+        </p:nvSpPr>
+        <p:spPr>
+          <a:xfrm xmlns:a="http://schemas.openxmlformats.org/drawingml/2006/main">
+            <a:off x="619125" y="4638675"/>
+            <a:ext cx="2076450" cy="476250"/>
+          </a:xfrm>
+          <a:prstGeom xmlns:a="http://schemas.openxmlformats.org/drawingml/2006/main" prst="rect">
+            <a:avLst/>
+          </a:prstGeom>
+          <a:noFill xmlns:a="http://schemas.openxmlformats.org/drawingml/2006/main"/>
+          <a:ln xmlns:a="http://schemas.openxmlformats.org/drawingml/2006/main" w="0">
+            <a:noFill/>
+          </a:ln>
+        </p:spPr>
+        <p:txBody>
+          <a:bodyPr xmlns:a="http://schemas.openxmlformats.org/drawingml/2006/main"/>
+          <a:lstStyle xmlns:a="http://schemas.openxmlformats.org/drawingml/2006/main">
+            <a:defPPr>
+              <a:defRPr sz="2100" b="1">
+                <a:solidFill>
+                  <a:srgbClr val="163D38"/>
+                </a:solidFill>
+                <a:latin typeface="Arial"/>
+                <a:ea typeface="Arial"/>
+                <a:cs typeface="Arial"/>
+              </a:defRPr>
+            </a:defPPr>
+          </a:lstStyle>
+          <a:p xmlns:a="http://schemas.openxmlformats.org/drawingml/2006/main">
+            <a:pPr>
+              <a:defRPr sz="2100" b="1">
+                <a:solidFill>
+                  <a:srgbClr val="163D38"/>
+                </a:solidFill>
+                <a:latin typeface="Arial"/>
+                <a:ea typeface="Arial"/>
+                <a:cs typeface="Arial"/>
+              </a:defRPr>
+            </a:pPr>
+            <a:r>
+              <a:rPr sz="2100" b="1">
+                <a:solidFill>
+                  <a:srgbClr val="163D38"/>
+                </a:solidFill>
+                <a:latin typeface="Arial"/>
+                <a:ea typeface="Arial"/>
+                <a:cs typeface="Arial"/>
+              </a:rPr>
+              <a:t>Deployment</a:t>
+            </a:r>
+          </a:p>
+        </p:txBody>
+      </p:sp>
+      <p:sp>
+        <p:nvSpPr>
+          <p:cNvPr id="15" name="">
+            <a:extLst xmlns:a="http://schemas.openxmlformats.org/drawingml/2006/main">
+              <a:ext uri="{FF2B5EF4-FFF2-40B4-BE49-F238E27FC236}">
+                <a16:creationId xmlns:a16="http://schemas.microsoft.com/office/drawing/2014/main" id="{94F43DAE-D7B2-4A3C-BC72-5B06253797D5}"/>
+              </a:ext>
+            </a:extLst>
+          </p:cNvPr>
+          <p:cNvSpPr>
+            <a:spLocks xmlns:a="http://schemas.openxmlformats.org/drawingml/2006/main" noGrp="1"/>
+          </p:cNvSpPr>
+          <p:nvPr/>
+        </p:nvSpPr>
+        <p:spPr>
+          <a:xfrm xmlns:a="http://schemas.openxmlformats.org/drawingml/2006/main">
+            <a:off x="2857500" y="4638675"/>
+            <a:ext cx="8572500" cy="400050"/>
+          </a:xfrm>
+          <a:prstGeom xmlns:a="http://schemas.openxmlformats.org/drawingml/2006/main" prst="rect">
+            <a:avLst/>
+          </a:prstGeom>
+          <a:noFill xmlns:a="http://schemas.openxmlformats.org/drawingml/2006/main"/>
+          <a:ln xmlns:a="http://schemas.openxmlformats.org/drawingml/2006/main" w="0">
+            <a:noFill/>
+          </a:ln>
+        </p:spPr>
+        <p:txBody>
+          <a:bodyPr xmlns:a="http://schemas.openxmlformats.org/drawingml/2006/main"/>
+          <a:lstStyle xmlns:a="http://schemas.openxmlformats.org/drawingml/2006/main">
+            <a:defPPr>
+              <a:defRPr sz="2025" b="0">
+                <a:solidFill>
+                  <a:srgbClr val="163D38"/>
+                </a:solidFill>
+                <a:latin typeface="Arial"/>
+                <a:ea typeface="Arial"/>
+                <a:cs typeface="Arial"/>
+              </a:defRPr>
+            </a:defPPr>
+          </a:lstStyle>
+          <a:p xmlns:a="http://schemas.openxmlformats.org/drawingml/2006/main">
+            <a:pPr>
+              <a:defRPr sz="2025" b="0">
+                <a:solidFill>
+                  <a:srgbClr val="163D38"/>
+                </a:solidFill>
+                <a:latin typeface="Arial"/>
+                <a:ea typeface="Arial"/>
+                <a:cs typeface="Arial"/>
+              </a:defRPr>
+            </a:pPr>
+            <a:r>
+              <a:rPr sz="2025" b="0">
+                <a:solidFill>
+                  <a:srgbClr val="163D38"/>
+                </a:solidFill>
+                <a:latin typeface="Arial"/>
+                <a:ea typeface="Arial"/>
+                <a:cs typeface="Arial"/>
+              </a:rPr>
+              <a:t>Terraform, EKS, Helm, Argo CD</a:t>
+            </a:r>
+          </a:p>
+        </p:txBody>
+      </p:sp>
+      <p:sp>
+        <p:nvSpPr>
+          <p:cNvPr id="16" name="">
+            <a:extLst xmlns:a="http://schemas.openxmlformats.org/drawingml/2006/main">
+              <a:ext uri="{FF2B5EF4-FFF2-40B4-BE49-F238E27FC236}">
+                <a16:creationId xmlns:a16="http://schemas.microsoft.com/office/drawing/2014/main" id="{CDE0158C-E3DD-4460-8CAE-D6D1D8476631}"/>
+              </a:ext>
+            </a:extLst>
+          </p:cNvPr>
+          <p:cNvSpPr>
+            <a:spLocks xmlns:a="http://schemas.openxmlformats.org/drawingml/2006/main" noGrp="1"/>
+          </p:cNvSpPr>
+          <p:nvPr/>
+        </p:nvSpPr>
+        <p:spPr>
+          <a:xfrm xmlns:a="http://schemas.openxmlformats.org/drawingml/2006/main">
+            <a:off x="2857500" y="5000625"/>
+            <a:ext cx="8572500" cy="304800"/>
+          </a:xfrm>
+          <a:prstGeom xmlns:a="http://schemas.openxmlformats.org/drawingml/2006/main" prst="rect">
+            <a:avLst/>
+          </a:prstGeom>
+          <a:noFill xmlns:a="http://schemas.openxmlformats.org/drawingml/2006/main"/>
+          <a:ln xmlns:a="http://schemas.openxmlformats.org/drawingml/2006/main" w="0">
+            <a:noFill/>
+          </a:ln>
+        </p:spPr>
+        <p:txBody>
+          <a:bodyPr xmlns:a="http://schemas.openxmlformats.org/drawingml/2006/main"/>
+          <a:lstStyle xmlns:a="http://schemas.openxmlformats.org/drawingml/2006/main">
+            <a:defPPr>
+              <a:defRPr sz="1575" b="0">
+                <a:solidFill>
+                  <a:srgbClr val="526963"/>
+                </a:solidFill>
+                <a:latin typeface="Arial"/>
+                <a:ea typeface="Arial"/>
+                <a:cs typeface="Arial"/>
+              </a:defRPr>
+            </a:defPPr>
+          </a:lstStyle>
+          <a:p xmlns:a="http://schemas.openxmlformats.org/drawingml/2006/main">
+            <a:pPr>
+              <a:defRPr sz="1575" b="0">
+                <a:solidFill>
+                  <a:srgbClr val="526963"/>
+                </a:solidFill>
+                <a:latin typeface="Arial"/>
+                <a:ea typeface="Arial"/>
+                <a:cs typeface="Arial"/>
+              </a:defRPr>
+            </a:pPr>
+            <a:r>
+              <a:rPr sz="1575" b="0">
+                <a:solidFill>
+                  <a:srgbClr val="526963"/>
+                </a:solidFill>
+                <a:latin typeface="Arial"/>
+                <a:ea typeface="Arial"/>
+                <a:cs typeface="Arial"/>
+              </a:rPr>
+              <a:t>project/terraform/ and helm/</a:t>
+            </a:r>
+          </a:p>
+        </p:txBody>
+      </p:sp>
+      <p:sp>
+        <p:nvSpPr>
+          <p:cNvPr id="17" name="">
+            <a:extLst xmlns:a="http://schemas.openxmlformats.org/drawingml/2006/main">
+              <a:ext uri="{FF2B5EF4-FFF2-40B4-BE49-F238E27FC236}">
+                <a16:creationId xmlns:a16="http://schemas.microsoft.com/office/drawing/2014/main" id="{525E76B4-087E-43DC-8E6E-A0DEB5275210}"/>
+              </a:ext>
+            </a:extLst>
+          </p:cNvPr>
+          <p:cNvSpPr>
+            <a:spLocks xmlns:a="http://schemas.openxmlformats.org/drawingml/2006/main" noGrp="1"/>
+          </p:cNvSpPr>
+          <p:nvPr/>
+        </p:nvSpPr>
+        <p:spPr>
+          <a:xfrm xmlns:a="http://schemas.openxmlformats.org/drawingml/2006/main">
+            <a:off x="619125" y="5429250"/>
+            <a:ext cx="2076450" cy="476250"/>
+          </a:xfrm>
+          <a:prstGeom xmlns:a="http://schemas.openxmlformats.org/drawingml/2006/main" prst="rect">
+            <a:avLst/>
+          </a:prstGeom>
+          <a:noFill xmlns:a="http://schemas.openxmlformats.org/drawingml/2006/main"/>
+          <a:ln xmlns:a="http://schemas.openxmlformats.org/drawingml/2006/main" w="0">
+            <a:noFill/>
+          </a:ln>
+        </p:spPr>
+        <p:txBody>
+          <a:bodyPr xmlns:a="http://schemas.openxmlformats.org/drawingml/2006/main"/>
+          <a:lstStyle xmlns:a="http://schemas.openxmlformats.org/drawingml/2006/main">
+            <a:defPPr>
+              <a:defRPr sz="2100" b="1">
+                <a:solidFill>
+                  <a:srgbClr val="163D38"/>
+                </a:solidFill>
+                <a:latin typeface="Arial"/>
+                <a:ea typeface="Arial"/>
+                <a:cs typeface="Arial"/>
+              </a:defRPr>
+            </a:defPPr>
+          </a:lstStyle>
+          <a:p xmlns:a="http://schemas.openxmlformats.org/drawingml/2006/main">
+            <a:pPr>
+              <a:defRPr sz="2100" b="1">
+                <a:solidFill>
+                  <a:srgbClr val="163D38"/>
+                </a:solidFill>
+                <a:latin typeface="Arial"/>
+                <a:ea typeface="Arial"/>
+                <a:cs typeface="Arial"/>
+              </a:defRPr>
+            </a:pPr>
+            <a:r>
+              <a:rPr sz="2100" b="1">
+                <a:solidFill>
+                  <a:srgbClr val="163D38"/>
+                </a:solidFill>
+                <a:latin typeface="Arial"/>
+                <a:ea typeface="Arial"/>
+                <a:cs typeface="Arial"/>
+              </a:rPr>
+              <a:t>Monitoring</a:t>
+            </a:r>
+          </a:p>
+        </p:txBody>
+      </p:sp>
+      <p:sp>
+        <p:nvSpPr>
+          <p:cNvPr id="18" name="">
+            <a:extLst xmlns:a="http://schemas.openxmlformats.org/drawingml/2006/main">
+              <a:ext uri="{FF2B5EF4-FFF2-40B4-BE49-F238E27FC236}">
+                <a16:creationId xmlns:a16="http://schemas.microsoft.com/office/drawing/2014/main" id="{1D14C8D5-626A-4D7F-8D5C-109F32B4F3F2}"/>
+              </a:ext>
+            </a:extLst>
+          </p:cNvPr>
+          <p:cNvSpPr>
+            <a:spLocks xmlns:a="http://schemas.openxmlformats.org/drawingml/2006/main" noGrp="1"/>
+          </p:cNvSpPr>
+          <p:nvPr/>
+        </p:nvSpPr>
+        <p:spPr>
+          <a:xfrm xmlns:a="http://schemas.openxmlformats.org/drawingml/2006/main">
+            <a:off x="2857500" y="5429250"/>
+            <a:ext cx="8572500" cy="400050"/>
+          </a:xfrm>
+          <a:prstGeom xmlns:a="http://schemas.openxmlformats.org/drawingml/2006/main" prst="rect">
+            <a:avLst/>
+          </a:prstGeom>
+          <a:noFill xmlns:a="http://schemas.openxmlformats.org/drawingml/2006/main"/>
+          <a:ln xmlns:a="http://schemas.openxmlformats.org/drawingml/2006/main" w="0">
+            <a:noFill/>
+          </a:ln>
+        </p:spPr>
+        <p:txBody>
+          <a:bodyPr xmlns:a="http://schemas.openxmlformats.org/drawingml/2006/main"/>
+          <a:lstStyle xmlns:a="http://schemas.openxmlformats.org/drawingml/2006/main">
+            <a:defPPr>
+              <a:defRPr sz="2025" b="0">
+                <a:solidFill>
+                  <a:srgbClr val="163D38"/>
+                </a:solidFill>
+                <a:latin typeface="Arial"/>
+                <a:ea typeface="Arial"/>
+                <a:cs typeface="Arial"/>
+              </a:defRPr>
+            </a:defPPr>
+          </a:lstStyle>
+          <a:p xmlns:a="http://schemas.openxmlformats.org/drawingml/2006/main">
+            <a:pPr>
+              <a:defRPr sz="2025" b="0">
+                <a:solidFill>
+                  <a:srgbClr val="163D38"/>
+                </a:solidFill>
+                <a:latin typeface="Arial"/>
+                <a:ea typeface="Arial"/>
+                <a:cs typeface="Arial"/>
+              </a:defRPr>
+            </a:pPr>
+            <a:r>
+              <a:rPr sz="2025" b="0">
+                <a:solidFill>
+                  <a:srgbClr val="163D38"/>
+                </a:solidFill>
+                <a:latin typeface="Arial"/>
+                <a:ea typeface="Arial"/>
+                <a:cs typeface="Arial"/>
+              </a:rPr>
+              <a:t>Prometheus, Grafana, ServiceMonitor</a:t>
+            </a:r>
+          </a:p>
+        </p:txBody>
+      </p:sp>
+      <p:sp>
+        <p:nvSpPr>
+          <p:cNvPr id="19" name="">
+            <a:extLst xmlns:a="http://schemas.openxmlformats.org/drawingml/2006/main">
+              <a:ext uri="{FF2B5EF4-FFF2-40B4-BE49-F238E27FC236}">
+                <a16:creationId xmlns:a16="http://schemas.microsoft.com/office/drawing/2014/main" id="{4E7E86E1-7918-4DB1-B62F-75ED5B4A99F0}"/>
+              </a:ext>
+            </a:extLst>
+          </p:cNvPr>
+          <p:cNvSpPr>
+            <a:spLocks xmlns:a="http://schemas.openxmlformats.org/drawingml/2006/main" noGrp="1"/>
+          </p:cNvSpPr>
+          <p:nvPr/>
+        </p:nvSpPr>
+        <p:spPr>
+          <a:xfrm xmlns:a="http://schemas.openxmlformats.org/drawingml/2006/main">
+            <a:off x="2857500" y="5791200"/>
+            <a:ext cx="8572500" cy="304800"/>
+          </a:xfrm>
+          <a:prstGeom xmlns:a="http://schemas.openxmlformats.org/drawingml/2006/main" prst="rect">
+            <a:avLst/>
+          </a:prstGeom>
+          <a:noFill xmlns:a="http://schemas.openxmlformats.org/drawingml/2006/main"/>
+          <a:ln xmlns:a="http://schemas.openxmlformats.org/drawingml/2006/main" w="0">
+            <a:noFill/>
+          </a:ln>
+        </p:spPr>
+        <p:txBody>
+          <a:bodyPr xmlns:a="http://schemas.openxmlformats.org/drawingml/2006/main"/>
+          <a:lstStyle xmlns:a="http://schemas.openxmlformats.org/drawingml/2006/main">
+            <a:defPPr>
+              <a:defRPr sz="1575" b="0">
+                <a:solidFill>
+                  <a:srgbClr val="526963"/>
+                </a:solidFill>
+                <a:latin typeface="Arial"/>
+                <a:ea typeface="Arial"/>
+                <a:cs typeface="Arial"/>
+              </a:defRPr>
+            </a:defPPr>
+          </a:lstStyle>
+          <a:p xmlns:a="http://schemas.openxmlformats.org/drawingml/2006/main">
+            <a:pPr>
+              <a:defRPr sz="1575" b="0">
+                <a:solidFill>
+                  <a:srgbClr val="526963"/>
+                </a:solidFill>
+                <a:latin typeface="Arial"/>
+                <a:ea typeface="Arial"/>
+                <a:cs typeface="Arial"/>
+              </a:defRPr>
+            </a:pPr>
+            <a:r>
+              <a:rPr sz="1575" b="0">
+                <a:solidFill>
+                  <a:srgbClr val="526963"/>
+                </a:solidFill>
+                <a:latin typeface="Arial"/>
+                <a:ea typeface="Arial"/>
+                <a:cs typeface="Arial"/>
+              </a:rPr>
+              <a:t>project/monitoring/</a:t>
             </a:r>
           </a:p>
         </p:txBody>
@@ -5559,7 +7805,7 @@
     </p:spTree>
     <p:extLst>
       <p:ext uri="{BB962C8B-B14F-4D97-AF65-F5344CB8AC3E}">
-        <p14:creationId xmlns:p14="http://schemas.microsoft.com/office/powerpoint/2010/main" val="17264579"/>
+        <p14:creationId xmlns:p14="http://schemas.microsoft.com/office/powerpoint/2010/main" val="568802439"/>
       </p:ext>
     </p:extLst>
   </p:cSld>
@@ -5572,7 +7818,7 @@
     <p:bg>
       <p:bgPr>
         <a:solidFill xmlns:a="http://schemas.openxmlformats.org/drawingml/2006/main">
-          <a:srgbClr val="F5F4EF"/>
+          <a:srgbClr val="F8F5EE"/>
         </a:solidFill>
       </p:bgPr>
     </p:bg>
@@ -5590,7 +7836,7 @@
           <p:cNvPr id="7" name="">
             <a:extLst xmlns:a="http://schemas.openxmlformats.org/drawingml/2006/main">
               <a:ext uri="{FF2B5EF4-FFF2-40B4-BE49-F238E27FC236}">
-                <a16:creationId xmlns:a16="http://schemas.microsoft.com/office/drawing/2014/main" id="{BC443065-2253-4647-AFEC-CBF983C650B4}"/>
+                <a16:creationId xmlns:a16="http://schemas.microsoft.com/office/drawing/2014/main" id="{2BFC1340-42C3-4A73-8FEE-9D65E4A6582B}"/>
               </a:ext>
             </a:extLst>
           </p:cNvPr>
@@ -5601,8 +7847,8 @@
         </p:nvSpPr>
         <p:spPr>
           <a:xfrm xmlns:a="http://schemas.openxmlformats.org/drawingml/2006/main">
-            <a:off x="609600" y="476250"/>
-            <a:ext cx="10858500" cy="714375"/>
+            <a:off x="609600" y="381000"/>
+            <a:ext cx="10972800" cy="723900"/>
           </a:xfrm>
           <a:prstGeom xmlns:a="http://schemas.openxmlformats.org/drawingml/2006/main" prst="rect">
             <a:avLst/>
@@ -5616,9 +7862,9 @@
           <a:bodyPr xmlns:a="http://schemas.openxmlformats.org/drawingml/2006/main"/>
           <a:lstStyle xmlns:a="http://schemas.openxmlformats.org/drawingml/2006/main">
             <a:defPPr>
-              <a:defRPr sz="3300" b="1">
-                <a:solidFill>
-                  <a:srgbClr val="23423C"/>
+              <a:defRPr sz="3600" b="1">
+                <a:solidFill>
+                  <a:srgbClr val="163D38"/>
                 </a:solidFill>
                 <a:latin typeface="Arial"/>
                 <a:ea typeface="Arial"/>
@@ -5628,9 +7874,9 @@
           </a:lstStyle>
           <a:p xmlns:a="http://schemas.openxmlformats.org/drawingml/2006/main">
             <a:pPr>
-              <a:defRPr sz="3300" b="1">
-                <a:solidFill>
-                  <a:srgbClr val="23423C"/>
+              <a:defRPr sz="3600" b="1">
+                <a:solidFill>
+                  <a:srgbClr val="163D38"/>
                 </a:solidFill>
                 <a:latin typeface="Arial"/>
                 <a:ea typeface="Arial"/>
@@ -5638,9 +7884,9 @@
               </a:defRPr>
             </a:pPr>
             <a:r>
-              <a:rPr sz="3300" b="1">
-                <a:solidFill>
-                  <a:srgbClr val="23423C"/>
+              <a:rPr sz="3600" b="1">
+                <a:solidFill>
+                  <a:srgbClr val="163D38"/>
                 </a:solidFill>
                 <a:latin typeface="Arial"/>
                 <a:ea typeface="Arial"/>
@@ -5656,7 +7902,7 @@
           <p:cNvPr id="2" name="">
             <a:extLst xmlns:a="http://schemas.openxmlformats.org/drawingml/2006/main">
               <a:ext uri="{FF2B5EF4-FFF2-40B4-BE49-F238E27FC236}">
-                <a16:creationId xmlns:a16="http://schemas.microsoft.com/office/drawing/2014/main" id="{8E33FE95-67D5-4FF3-85D7-AF8D3365ECC4}"/>
+                <a16:creationId xmlns:a16="http://schemas.microsoft.com/office/drawing/2014/main" id="{182AF53E-AC78-4AAE-A591-B6C3A902229A}"/>
               </a:ext>
             </a:extLst>
           </p:cNvPr>
@@ -5667,8 +7913,8 @@
         </p:nvSpPr>
         <p:spPr>
           <a:xfrm xmlns:a="http://schemas.openxmlformats.org/drawingml/2006/main">
-            <a:off x="685800" y="1476375"/>
-            <a:ext cx="10572750" cy="714375"/>
+            <a:off x="609600" y="1647825"/>
+            <a:ext cx="2571750" cy="1476375"/>
           </a:xfrm>
           <a:prstGeom xmlns:a="http://schemas.openxmlformats.org/drawingml/2006/main" prst="rect">
             <a:avLst/>
@@ -5682,9 +7928,9 @@
           <a:bodyPr xmlns:a="http://schemas.openxmlformats.org/drawingml/2006/main"/>
           <a:lstStyle xmlns:a="http://schemas.openxmlformats.org/drawingml/2006/main">
             <a:defPPr>
-              <a:defRPr sz="2100" b="0">
-                <a:solidFill>
-                  <a:srgbClr val="23423C"/>
+              <a:defRPr sz="9900" b="1">
+                <a:solidFill>
+                  <a:srgbClr val="D76F3E"/>
                 </a:solidFill>
                 <a:latin typeface="Arial"/>
                 <a:ea typeface="Arial"/>
@@ -5694,9 +7940,9 @@
           </a:lstStyle>
           <a:p xmlns:a="http://schemas.openxmlformats.org/drawingml/2006/main">
             <a:pPr>
-              <a:defRPr sz="2100" b="0">
-                <a:solidFill>
-                  <a:srgbClr val="23423C"/>
+              <a:defRPr sz="9900" b="1">
+                <a:solidFill>
+                  <a:srgbClr val="D76F3E"/>
                 </a:solidFill>
                 <a:latin typeface="Arial"/>
                 <a:ea typeface="Arial"/>
@@ -5704,15 +7950,15 @@
               </a:defRPr>
             </a:pPr>
             <a:r>
-              <a:rPr sz="2100" b="0">
-                <a:solidFill>
-                  <a:srgbClr val="23423C"/>
+              <a:rPr sz="9900" b="1">
+                <a:solidFill>
+                  <a:srgbClr val="D76F3E"/>
                 </a:solidFill>
                 <a:latin typeface="Arial"/>
                 <a:ea typeface="Arial"/>
                 <a:cs typeface="Arial"/>
               </a:rPr>
-              <a:t>16 API tests use a separate in-memory database.</a:t>
+              <a:t>16</a:t>
             </a:r>
           </a:p>
         </p:txBody>
@@ -5722,7 +7968,7 @@
           <p:cNvPr id="3" name="">
             <a:extLst xmlns:a="http://schemas.openxmlformats.org/drawingml/2006/main">
               <a:ext uri="{FF2B5EF4-FFF2-40B4-BE49-F238E27FC236}">
-                <a16:creationId xmlns:a16="http://schemas.microsoft.com/office/drawing/2014/main" id="{5E4E8085-E037-4912-A89A-802C31834EDD}"/>
+                <a16:creationId xmlns:a16="http://schemas.microsoft.com/office/drawing/2014/main" id="{D5B2B90D-6BD1-4244-A3DA-802030A7D624}"/>
               </a:ext>
             </a:extLst>
           </p:cNvPr>
@@ -5733,8 +7979,8 @@
         </p:nvSpPr>
         <p:spPr>
           <a:xfrm xmlns:a="http://schemas.openxmlformats.org/drawingml/2006/main">
-            <a:off x="685800" y="2352675"/>
-            <a:ext cx="10572750" cy="714375"/>
+            <a:off x="685800" y="3190875"/>
+            <a:ext cx="2762250" cy="619125"/>
           </a:xfrm>
           <a:prstGeom xmlns:a="http://schemas.openxmlformats.org/drawingml/2006/main" prst="rect">
             <a:avLst/>
@@ -5748,9 +7994,9 @@
           <a:bodyPr xmlns:a="http://schemas.openxmlformats.org/drawingml/2006/main"/>
           <a:lstStyle xmlns:a="http://schemas.openxmlformats.org/drawingml/2006/main">
             <a:defPPr>
-              <a:defRPr sz="2100" b="0">
-                <a:solidFill>
-                  <a:srgbClr val="23423C"/>
+              <a:defRPr sz="2625" b="1">
+                <a:solidFill>
+                  <a:srgbClr val="163D38"/>
                 </a:solidFill>
                 <a:latin typeface="Arial"/>
                 <a:ea typeface="Arial"/>
@@ -5760,9 +8006,9 @@
           </a:lstStyle>
           <a:p xmlns:a="http://schemas.openxmlformats.org/drawingml/2006/main">
             <a:pPr>
-              <a:defRPr sz="2100" b="0">
-                <a:solidFill>
-                  <a:srgbClr val="23423C"/>
+              <a:defRPr sz="2625" b="1">
+                <a:solidFill>
+                  <a:srgbClr val="163D38"/>
                 </a:solidFill>
                 <a:latin typeface="Arial"/>
                 <a:ea typeface="Arial"/>
@@ -5770,15 +8016,15 @@
               </a:defRPr>
             </a:pPr>
             <a:r>
-              <a:rPr sz="2100" b="0">
-                <a:solidFill>
-                  <a:srgbClr val="23423C"/>
+              <a:rPr sz="2625" b="1">
+                <a:solidFill>
+                  <a:srgbClr val="163D38"/>
                 </a:solidFill>
                 <a:latin typeface="Arial"/>
                 <a:ea typeface="Arial"/>
                 <a:cs typeface="Arial"/>
               </a:rPr>
-              <a:t>CRUD, missing records, room capacity and invalid input have coverage.</a:t>
+              <a:t>API tests</a:t>
             </a:r>
           </a:p>
         </p:txBody>
@@ -5788,7 +8034,7 @@
           <p:cNvPr id="4" name="">
             <a:extLst xmlns:a="http://schemas.openxmlformats.org/drawingml/2006/main">
               <a:ext uri="{FF2B5EF4-FFF2-40B4-BE49-F238E27FC236}">
-                <a16:creationId xmlns:a16="http://schemas.microsoft.com/office/drawing/2014/main" id="{F6CB3D08-DF0E-4CE0-AECD-26D929A64D6B}"/>
+                <a16:creationId xmlns:a16="http://schemas.microsoft.com/office/drawing/2014/main" id="{5B16E504-F18F-4E73-83FA-E238EA18DEC5}"/>
               </a:ext>
             </a:extLst>
           </p:cNvPr>
@@ -5799,8 +8045,8 @@
         </p:nvSpPr>
         <p:spPr>
           <a:xfrm xmlns:a="http://schemas.openxmlformats.org/drawingml/2006/main">
-            <a:off x="685800" y="3228975"/>
-            <a:ext cx="10572750" cy="714375"/>
+            <a:off x="685800" y="4095750"/>
+            <a:ext cx="2952750" cy="1562100"/>
           </a:xfrm>
           <a:prstGeom xmlns:a="http://schemas.openxmlformats.org/drawingml/2006/main" prst="rect">
             <a:avLst/>
@@ -5814,9 +8060,9 @@
           <a:bodyPr xmlns:a="http://schemas.openxmlformats.org/drawingml/2006/main"/>
           <a:lstStyle xmlns:a="http://schemas.openxmlformats.org/drawingml/2006/main">
             <a:defPPr>
-              <a:defRPr sz="2100" b="0">
-                <a:solidFill>
-                  <a:srgbClr val="23423C"/>
+              <a:defRPr sz="1950" b="0">
+                <a:solidFill>
+                  <a:srgbClr val="526963"/>
                 </a:solidFill>
                 <a:latin typeface="Arial"/>
                 <a:ea typeface="Arial"/>
@@ -5826,9 +8072,9 @@
           </a:lstStyle>
           <a:p xmlns:a="http://schemas.openxmlformats.org/drawingml/2006/main">
             <a:pPr>
-              <a:defRPr sz="2100" b="0">
-                <a:solidFill>
-                  <a:srgbClr val="23423C"/>
+              <a:defRPr sz="1950" b="0">
+                <a:solidFill>
+                  <a:srgbClr val="526963"/>
                 </a:solidFill>
                 <a:latin typeface="Arial"/>
                 <a:ea typeface="Arial"/>
@@ -5836,37 +8082,111 @@
               </a:defRPr>
             </a:pPr>
             <a:r>
-              <a:rPr sz="2100" b="0">
-                <a:solidFill>
-                  <a:srgbClr val="23423C"/>
+              <a:rPr sz="1950" b="0">
+                <a:solidFill>
+                  <a:srgbClr val="526963"/>
                 </a:solidFill>
                 <a:latin typeface="Arial"/>
                 <a:ea typeface="Arial"/>
                 <a:cs typeface="Arial"/>
               </a:rPr>
-              <a:t>A real PostgreSQL integration check sends simultaneous POST requests.</a:t>
-            </a:r>
-          </a:p>
-        </p:txBody>
-      </p:sp>
-      <p:sp>
-        <p:nvSpPr>
+              <a:t>Isolated test database</a:t>
+            </a:r>
+          </a:p>
+          <a:p xmlns:a="http://schemas.openxmlformats.org/drawingml/2006/main">
+            <a:pPr>
+              <a:defRPr sz="1950" b="0">
+                <a:solidFill>
+                  <a:srgbClr val="526963"/>
+                </a:solidFill>
+                <a:latin typeface="Arial"/>
+                <a:ea typeface="Arial"/>
+                <a:cs typeface="Arial"/>
+              </a:defRPr>
+            </a:pPr>
+            <a:r>
+              <a:rPr sz="1950" b="0">
+                <a:solidFill>
+                  <a:srgbClr val="526963"/>
+                </a:solidFill>
+                <a:latin typeface="Arial"/>
+                <a:ea typeface="Arial"/>
+                <a:cs typeface="Arial"/>
+              </a:rPr>
+              <a:t>CRUD and validation</a:t>
+            </a:r>
+          </a:p>
+          <a:p xmlns:a="http://schemas.openxmlformats.org/drawingml/2006/main">
+            <a:pPr>
+              <a:defRPr sz="1950" b="0">
+                <a:solidFill>
+                  <a:srgbClr val="526963"/>
+                </a:solidFill>
+                <a:latin typeface="Arial"/>
+                <a:ea typeface="Arial"/>
+                <a:cs typeface="Arial"/>
+              </a:defRPr>
+            </a:pPr>
+            <a:r>
+              <a:rPr sz="1950" b="0">
+                <a:solidFill>
+                  <a:srgbClr val="526963"/>
+                </a:solidFill>
+                <a:latin typeface="Arial"/>
+                <a:ea typeface="Arial"/>
+                <a:cs typeface="Arial"/>
+              </a:rPr>
+              <a:t>Real PostgreSQL race check</a:t>
+            </a:r>
+          </a:p>
+        </p:txBody>
+      </p:sp>
+      <p:pic>
+        <p:nvPicPr>
           <p:cNvPr id="5" name="">
             <a:extLst xmlns:a="http://schemas.openxmlformats.org/drawingml/2006/main">
               <a:ext uri="{FF2B5EF4-FFF2-40B4-BE49-F238E27FC236}">
-                <a16:creationId xmlns:a16="http://schemas.microsoft.com/office/drawing/2014/main" id="{34B0F4C6-06DA-49FE-A78E-54F06C2F7C80}"/>
+                <a16:creationId xmlns:a16="http://schemas.microsoft.com/office/drawing/2014/main" id="{FB60C031-8513-47F7-9CAC-66E2896685D1}"/>
               </a:ext>
             </a:extLst>
           </p:cNvPr>
-          <p:cNvSpPr>
-            <a:spLocks xmlns:a="http://schemas.openxmlformats.org/drawingml/2006/main" noGrp="1"/>
-          </p:cNvSpPr>
+          <p:cNvPicPr>
+            <a:picLocks xmlns:a="http://schemas.openxmlformats.org/drawingml/2006/main" noChangeAspect="1"/>
+          </p:cNvPicPr>
           <p:nvPr/>
-        </p:nvSpPr>
+        </p:nvPicPr>
+        <p:blipFill>
+          <a:blip xmlns:r="http://schemas.openxmlformats.org/officeDocument/2006/relationships" xmlns:a="http://schemas.openxmlformats.org/drawingml/2006/main" r:embed="R6c519192f98c4f20"/>
+          <a:stretch xmlns:a="http://schemas.openxmlformats.org/drawingml/2006/main"/>
+        </p:blipFill>
         <p:spPr>
           <a:xfrm xmlns:a="http://schemas.openxmlformats.org/drawingml/2006/main">
-            <a:off x="685800" y="4105275"/>
-            <a:ext cx="10572750" cy="714375"/>
+            <a:off x="3762375" y="1481733"/>
+            <a:ext cx="7905750" cy="4446984"/>
+          </a:xfrm>
+          <a:prstGeom xmlns:a="http://schemas.openxmlformats.org/drawingml/2006/main" prst="rect">
+            <a:avLst/>
+          </a:prstGeom>
+        </p:spPr>
+      </p:pic>
+      <p:sp>
+        <p:nvSpPr>
+          <p:cNvPr id="6" name="">
+            <a:extLst xmlns:a="http://schemas.openxmlformats.org/drawingml/2006/main">
+              <a:ext uri="{FF2B5EF4-FFF2-40B4-BE49-F238E27FC236}">
+                <a16:creationId xmlns:a16="http://schemas.microsoft.com/office/drawing/2014/main" id="{3941962C-52B5-429F-99F5-7E44E08C2515}"/>
+              </a:ext>
+            </a:extLst>
+          </p:cNvPr>
+          <p:cNvSpPr>
+            <a:spLocks xmlns:a="http://schemas.openxmlformats.org/drawingml/2006/main" noGrp="1"/>
+          </p:cNvSpPr>
+          <p:nvPr/>
+        </p:nvSpPr>
+        <p:spPr>
+          <a:xfrm xmlns:a="http://schemas.openxmlformats.org/drawingml/2006/main">
+            <a:off x="3857625" y="6143625"/>
+            <a:ext cx="7715250" cy="381000"/>
           </a:xfrm>
           <a:prstGeom xmlns:a="http://schemas.openxmlformats.org/drawingml/2006/main" prst="rect">
             <a:avLst/>
@@ -5880,9 +8200,9 @@
           <a:bodyPr xmlns:a="http://schemas.openxmlformats.org/drawingml/2006/main"/>
           <a:lstStyle xmlns:a="http://schemas.openxmlformats.org/drawingml/2006/main">
             <a:defPPr>
-              <a:defRPr sz="2100" b="0">
-                <a:solidFill>
-                  <a:srgbClr val="23423C"/>
+              <a:defRPr sz="1875" b="1">
+                <a:solidFill>
+                  <a:srgbClr val="163D38"/>
                 </a:solidFill>
                 <a:latin typeface="Arial"/>
                 <a:ea typeface="Arial"/>
@@ -5892,9 +8212,9 @@
           </a:lstStyle>
           <a:p xmlns:a="http://schemas.openxmlformats.org/drawingml/2006/main">
             <a:pPr>
-              <a:defRPr sz="2100" b="0">
-                <a:solidFill>
-                  <a:srgbClr val="23423C"/>
+              <a:defRPr sz="1875" b="1">
+                <a:solidFill>
+                  <a:srgbClr val="163D38"/>
                 </a:solidFill>
                 <a:latin typeface="Arial"/>
                 <a:ea typeface="Arial"/>
@@ -5902,81 +8222,15 @@
               </a:defRPr>
             </a:pPr>
             <a:r>
-              <a:rPr sz="2100" b="0">
-                <a:solidFill>
-                  <a:srgbClr val="23423C"/>
+              <a:rPr sz="1875" b="1">
+                <a:solidFill>
+                  <a:srgbClr val="163D38"/>
                 </a:solidFill>
                 <a:latin typeface="Arial"/>
                 <a:ea typeface="Arial"/>
                 <a:cs typeface="Arial"/>
               </a:rPr>
-              <a:t>One request gets 201. The competing request gets 409.</a:t>
-            </a:r>
-          </a:p>
-        </p:txBody>
-      </p:sp>
-      <p:sp>
-        <p:nvSpPr>
-          <p:cNvPr id="6" name="">
-            <a:extLst xmlns:a="http://schemas.openxmlformats.org/drawingml/2006/main">
-              <a:ext uri="{FF2B5EF4-FFF2-40B4-BE49-F238E27FC236}">
-                <a16:creationId xmlns:a16="http://schemas.microsoft.com/office/drawing/2014/main" id="{6E6FF5B7-297A-4AD2-A549-6E3FAA4FC3E2}"/>
-              </a:ext>
-            </a:extLst>
-          </p:cNvPr>
-          <p:cNvSpPr>
-            <a:spLocks xmlns:a="http://schemas.openxmlformats.org/drawingml/2006/main" noGrp="1"/>
-          </p:cNvSpPr>
-          <p:nvPr/>
-        </p:nvSpPr>
-        <p:spPr>
-          <a:xfrm xmlns:a="http://schemas.openxmlformats.org/drawingml/2006/main">
-            <a:off x="685800" y="4981575"/>
-            <a:ext cx="10572750" cy="714375"/>
-          </a:xfrm>
-          <a:prstGeom xmlns:a="http://schemas.openxmlformats.org/drawingml/2006/main" prst="rect">
-            <a:avLst/>
-          </a:prstGeom>
-          <a:noFill xmlns:a="http://schemas.openxmlformats.org/drawingml/2006/main"/>
-          <a:ln xmlns:a="http://schemas.openxmlformats.org/drawingml/2006/main" w="0">
-            <a:noFill/>
-          </a:ln>
-        </p:spPr>
-        <p:txBody>
-          <a:bodyPr xmlns:a="http://schemas.openxmlformats.org/drawingml/2006/main"/>
-          <a:lstStyle xmlns:a="http://schemas.openxmlformats.org/drawingml/2006/main">
-            <a:defPPr>
-              <a:defRPr sz="2100" b="0">
-                <a:solidFill>
-                  <a:srgbClr val="23423C"/>
-                </a:solidFill>
-                <a:latin typeface="Arial"/>
-                <a:ea typeface="Arial"/>
-                <a:cs typeface="Arial"/>
-              </a:defRPr>
-            </a:defPPr>
-          </a:lstStyle>
-          <a:p xmlns:a="http://schemas.openxmlformats.org/drawingml/2006/main">
-            <a:pPr>
-              <a:defRPr sz="2100" b="0">
-                <a:solidFill>
-                  <a:srgbClr val="23423C"/>
-                </a:solidFill>
-                <a:latin typeface="Arial"/>
-                <a:ea typeface="Arial"/>
-                <a:cs typeface="Arial"/>
-              </a:defRPr>
-            </a:pPr>
-            <a:r>
-              <a:rPr sz="2100" b="0">
-                <a:solidFill>
-                  <a:srgbClr val="23423C"/>
-                </a:solidFill>
-                <a:latin typeface="Arial"/>
-                <a:ea typeface="Arial"/>
-                <a:cs typeface="Arial"/>
-              </a:rPr>
-              <a:t>Readiness reports a database failure without breaking the liveness check.</a:t>
+              <a:t>Concurrent booking requests: one 201, one 409</a:t>
             </a:r>
           </a:p>
         </p:txBody>
@@ -5984,7 +8238,7 @@
     </p:spTree>
     <p:extLst>
       <p:ext uri="{BB962C8B-B14F-4D97-AF65-F5344CB8AC3E}">
-        <p14:creationId xmlns:p14="http://schemas.microsoft.com/office/powerpoint/2010/main" val="770971727"/>
+        <p14:creationId xmlns:p14="http://schemas.microsoft.com/office/powerpoint/2010/main" val="810146932"/>
       </p:ext>
     </p:extLst>
   </p:cSld>
@@ -5997,7 +8251,7 @@
     <p:bg>
       <p:bgPr>
         <a:solidFill xmlns:a="http://schemas.openxmlformats.org/drawingml/2006/main">
-          <a:srgbClr val="F5F4EF"/>
+          <a:srgbClr val="F8F5EE"/>
         </a:solidFill>
       </p:bgPr>
     </p:bg>
@@ -6010,117 +8264,24 @@
       <p:grpSpPr>
         <a:xfrm xmlns:a="http://schemas.openxmlformats.org/drawingml/2006/main"/>
       </p:grpSpPr>
-      <p:cxnSp>
-        <p:nvCxnSpPr>
-          <p:cNvPr id="8" name="">
+      <p:sp>
+        <p:nvSpPr>
+          <p:cNvPr id="7" name="">
             <a:extLst xmlns:a="http://schemas.openxmlformats.org/drawingml/2006/main">
               <a:ext uri="{FF2B5EF4-FFF2-40B4-BE49-F238E27FC236}">
-                <a16:creationId xmlns:a16="http://schemas.microsoft.com/office/drawing/2014/main" id="{60950D77-E980-47B1-A064-DD0A8D7F8B0D}"/>
+                <a16:creationId xmlns:a16="http://schemas.microsoft.com/office/drawing/2014/main" id="{13110F16-B1F6-4E51-8BAD-51A15F3FA6D4}"/>
               </a:ext>
             </a:extLst>
           </p:cNvPr>
-          <p:cNvCxnSpPr>
-            <a:stCxn xmlns:a="http://schemas.openxmlformats.org/drawingml/2006/main" id="4" idx="3"/>
-            <a:endCxn xmlns:a="http://schemas.openxmlformats.org/drawingml/2006/main" id="5" idx="1"/>
-          </p:cNvCxnSpPr>
+          <p:cNvSpPr>
+            <a:spLocks xmlns:a="http://schemas.openxmlformats.org/drawingml/2006/main" noGrp="1"/>
+          </p:cNvSpPr>
           <p:nvPr/>
-        </p:nvCxnSpPr>
+        </p:nvSpPr>
         <p:spPr>
           <a:xfrm xmlns:a="http://schemas.openxmlformats.org/drawingml/2006/main">
-            <a:off x="8620125" y="2333625"/>
-            <a:ext cx="571500" cy="0"/>
-          </a:xfrm>
-          <a:prstGeom xmlns:a="http://schemas.openxmlformats.org/drawingml/2006/main" prst="straightConnector1">
-            <a:avLst/>
-          </a:prstGeom>
-          <a:ln xmlns:a="http://schemas.openxmlformats.org/drawingml/2006/main" w="19050">
-            <a:solidFill>
-              <a:srgbClr val="687B64"/>
-            </a:solidFill>
-            <a:tailEnd type="arrow" w="med" len="med"/>
-          </a:ln>
-        </p:spPr>
-      </p:cxnSp>
-      <p:cxnSp>
-        <p:nvCxnSpPr>
-          <p:cNvPr id="7" name="">
-            <a:extLst xmlns:a="http://schemas.openxmlformats.org/drawingml/2006/main">
-              <a:ext uri="{FF2B5EF4-FFF2-40B4-BE49-F238E27FC236}">
-                <a16:creationId xmlns:a16="http://schemas.microsoft.com/office/drawing/2014/main" id="{C87CD749-9595-4CD6-B0B5-FE391F2354AC}"/>
-              </a:ext>
-            </a:extLst>
-          </p:cNvPr>
-          <p:cNvCxnSpPr>
-            <a:stCxn xmlns:a="http://schemas.openxmlformats.org/drawingml/2006/main" id="3" idx="3"/>
-            <a:endCxn xmlns:a="http://schemas.openxmlformats.org/drawingml/2006/main" id="4" idx="1"/>
-          </p:cNvCxnSpPr>
-          <p:nvPr/>
-        </p:nvCxnSpPr>
-        <p:spPr>
-          <a:xfrm xmlns:a="http://schemas.openxmlformats.org/drawingml/2006/main">
-            <a:off x="5762625" y="2333625"/>
-            <a:ext cx="571500" cy="0"/>
-          </a:xfrm>
-          <a:prstGeom xmlns:a="http://schemas.openxmlformats.org/drawingml/2006/main" prst="straightConnector1">
-            <a:avLst/>
-          </a:prstGeom>
-          <a:ln xmlns:a="http://schemas.openxmlformats.org/drawingml/2006/main" w="19050">
-            <a:solidFill>
-              <a:srgbClr val="687B64"/>
-            </a:solidFill>
-            <a:tailEnd type="arrow" w="med" len="med"/>
-          </a:ln>
-        </p:spPr>
-      </p:cxnSp>
-      <p:cxnSp>
-        <p:nvCxnSpPr>
-          <p:cNvPr id="6" name="">
-            <a:extLst xmlns:a="http://schemas.openxmlformats.org/drawingml/2006/main">
-              <a:ext uri="{FF2B5EF4-FFF2-40B4-BE49-F238E27FC236}">
-                <a16:creationId xmlns:a16="http://schemas.microsoft.com/office/drawing/2014/main" id="{1CBB6AE4-9337-4140-A643-BB4597C31E7E}"/>
-              </a:ext>
-            </a:extLst>
-          </p:cNvPr>
-          <p:cNvCxnSpPr>
-            <a:stCxn xmlns:a="http://schemas.openxmlformats.org/drawingml/2006/main" id="2" idx="3"/>
-            <a:endCxn xmlns:a="http://schemas.openxmlformats.org/drawingml/2006/main" id="3" idx="1"/>
-          </p:cNvCxnSpPr>
-          <p:nvPr/>
-        </p:nvCxnSpPr>
-        <p:spPr>
-          <a:xfrm xmlns:a="http://schemas.openxmlformats.org/drawingml/2006/main">
-            <a:off x="2905125" y="2333625"/>
-            <a:ext cx="571500" cy="0"/>
-          </a:xfrm>
-          <a:prstGeom xmlns:a="http://schemas.openxmlformats.org/drawingml/2006/main" prst="straightConnector1">
-            <a:avLst/>
-          </a:prstGeom>
-          <a:ln xmlns:a="http://schemas.openxmlformats.org/drawingml/2006/main" w="19050">
-            <a:solidFill>
-              <a:srgbClr val="687B64"/>
-            </a:solidFill>
-            <a:tailEnd type="arrow" w="med" len="med"/>
-          </a:ln>
-        </p:spPr>
-      </p:cxnSp>
-      <p:sp>
-        <p:nvSpPr>
-          <p:cNvPr id="11" name="">
-            <a:extLst xmlns:a="http://schemas.openxmlformats.org/drawingml/2006/main">
-              <a:ext uri="{FF2B5EF4-FFF2-40B4-BE49-F238E27FC236}">
-                <a16:creationId xmlns:a16="http://schemas.microsoft.com/office/drawing/2014/main" id="{EC1B06C0-D863-4FE9-9C06-D27132CB91FC}"/>
-              </a:ext>
-            </a:extLst>
-          </p:cNvPr>
-          <p:cNvSpPr>
-            <a:spLocks xmlns:a="http://schemas.openxmlformats.org/drawingml/2006/main" noGrp="1"/>
-          </p:cNvSpPr>
-          <p:nvPr/>
-        </p:nvSpPr>
-        <p:spPr>
-          <a:xfrm xmlns:a="http://schemas.openxmlformats.org/drawingml/2006/main">
-            <a:off x="609600" y="476250"/>
-            <a:ext cx="10858500" cy="714375"/>
+            <a:off x="609600" y="381000"/>
+            <a:ext cx="10972800" cy="723900"/>
           </a:xfrm>
           <a:prstGeom xmlns:a="http://schemas.openxmlformats.org/drawingml/2006/main" prst="rect">
             <a:avLst/>
@@ -6134,9 +8295,9 @@
           <a:bodyPr xmlns:a="http://schemas.openxmlformats.org/drawingml/2006/main"/>
           <a:lstStyle xmlns:a="http://schemas.openxmlformats.org/drawingml/2006/main">
             <a:defPPr>
-              <a:defRPr sz="3300" b="1">
-                <a:solidFill>
-                  <a:srgbClr val="23423C"/>
+              <a:defRPr sz="3600" b="1">
+                <a:solidFill>
+                  <a:srgbClr val="163D38"/>
                 </a:solidFill>
                 <a:latin typeface="Arial"/>
                 <a:ea typeface="Arial"/>
@@ -6146,9 +8307,9 @@
           </a:lstStyle>
           <a:p xmlns:a="http://schemas.openxmlformats.org/drawingml/2006/main">
             <a:pPr>
-              <a:defRPr sz="3300" b="1">
-                <a:solidFill>
-                  <a:srgbClr val="23423C"/>
+              <a:defRPr sz="3600" b="1">
+                <a:solidFill>
+                  <a:srgbClr val="163D38"/>
                 </a:solidFill>
                 <a:latin typeface="Arial"/>
                 <a:ea typeface="Arial"/>
@@ -6156,9 +8317,9 @@
               </a:defRPr>
             </a:pPr>
             <a:r>
-              <a:rPr sz="3300" b="1">
-                <a:solidFill>
-                  <a:srgbClr val="23423C"/>
+              <a:rPr sz="3600" b="1">
+                <a:solidFill>
+                  <a:srgbClr val="163D38"/>
                 </a:solidFill>
                 <a:latin typeface="Arial"/>
                 <a:ea typeface="Arial"/>
@@ -6169,82 +8330,40 @@
           </a:p>
         </p:txBody>
       </p:sp>
-      <p:sp>
-        <p:nvSpPr>
+      <p:pic>
+        <p:nvPicPr>
           <p:cNvPr id="2" name="">
             <a:extLst xmlns:a="http://schemas.openxmlformats.org/drawingml/2006/main">
               <a:ext uri="{FF2B5EF4-FFF2-40B4-BE49-F238E27FC236}">
-                <a16:creationId xmlns:a16="http://schemas.microsoft.com/office/drawing/2014/main" id="{A84E6A49-3E2A-4844-9957-4D4783DB60CF}"/>
+                <a16:creationId xmlns:a16="http://schemas.microsoft.com/office/drawing/2014/main" id="{6E241FDB-C8D9-49D4-8D0F-44DBBEF5168F}"/>
               </a:ext>
             </a:extLst>
           </p:cNvPr>
-          <p:cNvSpPr>
-            <a:spLocks xmlns:a="http://schemas.openxmlformats.org/drawingml/2006/main" noGrp="1"/>
-          </p:cNvSpPr>
+          <p:cNvPicPr>
+            <a:picLocks xmlns:a="http://schemas.openxmlformats.org/drawingml/2006/main" noChangeAspect="1"/>
+          </p:cNvPicPr>
           <p:nvPr/>
-        </p:nvSpPr>
+        </p:nvPicPr>
+        <p:blipFill>
+          <a:blip xmlns:r="http://schemas.openxmlformats.org/officeDocument/2006/relationships" xmlns:a="http://schemas.openxmlformats.org/drawingml/2006/main" r:embed="R9bae3031e0c14a2a"/>
+          <a:stretch xmlns:a="http://schemas.openxmlformats.org/drawingml/2006/main"/>
+        </p:blipFill>
         <p:spPr>
           <a:xfrm xmlns:a="http://schemas.openxmlformats.org/drawingml/2006/main">
-            <a:off x="619125" y="1905000"/>
-            <a:ext cx="2286000" cy="857250"/>
+            <a:off x="2406802" y="1276350"/>
+            <a:ext cx="7378397" cy="4152900"/>
           </a:xfrm>
           <a:prstGeom xmlns:a="http://schemas.openxmlformats.org/drawingml/2006/main" prst="rect">
             <a:avLst/>
           </a:prstGeom>
-          <a:solidFill xmlns:a="http://schemas.openxmlformats.org/drawingml/2006/main">
-            <a:srgbClr val="E5EBDF"/>
-          </a:solidFill>
-          <a:ln xmlns:a="http://schemas.openxmlformats.org/drawingml/2006/main" w="14288">
-            <a:solidFill>
-              <a:srgbClr val="8B9E7E"/>
-            </a:solidFill>
-          </a:ln>
-        </p:spPr>
-        <p:txBody>
-          <a:bodyPr xmlns:a="http://schemas.openxmlformats.org/drawingml/2006/main"/>
-          <a:lstStyle xmlns:a="http://schemas.openxmlformats.org/drawingml/2006/main">
-            <a:defPPr algn="ctr">
-              <a:defRPr sz="1950" b="1">
-                <a:solidFill>
-                  <a:srgbClr val="23423C"/>
-                </a:solidFill>
-                <a:latin typeface="Arial"/>
-                <a:ea typeface="Arial"/>
-                <a:cs typeface="Arial"/>
-              </a:defRPr>
-            </a:defPPr>
-          </a:lstStyle>
-          <a:p xmlns:a="http://schemas.openxmlformats.org/drawingml/2006/main">
-            <a:pPr algn="ctr">
-              <a:defRPr sz="1950" b="1">
-                <a:solidFill>
-                  <a:srgbClr val="23423C"/>
-                </a:solidFill>
-                <a:latin typeface="Arial"/>
-                <a:ea typeface="Arial"/>
-                <a:cs typeface="Arial"/>
-              </a:defRPr>
-            </a:pPr>
-            <a:r>
-              <a:rPr sz="1950" b="1">
-                <a:solidFill>
-                  <a:srgbClr val="23423C"/>
-                </a:solidFill>
-                <a:latin typeface="Arial"/>
-                <a:ea typeface="Arial"/>
-                <a:cs typeface="Arial"/>
-              </a:rPr>
-              <a:t>Tests + audits</a:t>
-            </a:r>
-          </a:p>
-        </p:txBody>
-      </p:sp>
+        </p:spPr>
+      </p:pic>
       <p:sp>
         <p:nvSpPr>
           <p:cNvPr id="3" name="">
             <a:extLst xmlns:a="http://schemas.openxmlformats.org/drawingml/2006/main">
               <a:ext uri="{FF2B5EF4-FFF2-40B4-BE49-F238E27FC236}">
-                <a16:creationId xmlns:a16="http://schemas.microsoft.com/office/drawing/2014/main" id="{5F39F6A6-8293-42BD-A0F5-05F8C976C5E1}"/>
+                <a16:creationId xmlns:a16="http://schemas.microsoft.com/office/drawing/2014/main" id="{9EE7C0AB-1D9F-4918-AC5E-D6A2E03364B6}"/>
               </a:ext>
             </a:extLst>
           </p:cNvPr>
@@ -6255,218 +8374,8 @@
         </p:nvSpPr>
         <p:spPr>
           <a:xfrm xmlns:a="http://schemas.openxmlformats.org/drawingml/2006/main">
-            <a:off x="3476625" y="1905000"/>
-            <a:ext cx="2286000" cy="857250"/>
-          </a:xfrm>
-          <a:prstGeom xmlns:a="http://schemas.openxmlformats.org/drawingml/2006/main" prst="rect">
-            <a:avLst/>
-          </a:prstGeom>
-          <a:solidFill xmlns:a="http://schemas.openxmlformats.org/drawingml/2006/main">
-            <a:srgbClr val="E5EBDF"/>
-          </a:solidFill>
-          <a:ln xmlns:a="http://schemas.openxmlformats.org/drawingml/2006/main" w="14288">
-            <a:solidFill>
-              <a:srgbClr val="8B9E7E"/>
-            </a:solidFill>
-          </a:ln>
-        </p:spPr>
-        <p:txBody>
-          <a:bodyPr xmlns:a="http://schemas.openxmlformats.org/drawingml/2006/main"/>
-          <a:lstStyle xmlns:a="http://schemas.openxmlformats.org/drawingml/2006/main">
-            <a:defPPr algn="ctr">
-              <a:defRPr sz="1950" b="1">
-                <a:solidFill>
-                  <a:srgbClr val="23423C"/>
-                </a:solidFill>
-                <a:latin typeface="Arial"/>
-                <a:ea typeface="Arial"/>
-                <a:cs typeface="Arial"/>
-              </a:defRPr>
-            </a:defPPr>
-          </a:lstStyle>
-          <a:p xmlns:a="http://schemas.openxmlformats.org/drawingml/2006/main">
-            <a:pPr algn="ctr">
-              <a:defRPr sz="1950" b="1">
-                <a:solidFill>
-                  <a:srgbClr val="23423C"/>
-                </a:solidFill>
-                <a:latin typeface="Arial"/>
-                <a:ea typeface="Arial"/>
-                <a:cs typeface="Arial"/>
-              </a:defRPr>
-            </a:pPr>
-            <a:r>
-              <a:rPr sz="1950" b="1">
-                <a:solidFill>
-                  <a:srgbClr val="23423C"/>
-                </a:solidFill>
-                <a:latin typeface="Arial"/>
-                <a:ea typeface="Arial"/>
-                <a:cs typeface="Arial"/>
-              </a:rPr>
-              <a:t>Docker + Trivy</a:t>
-            </a:r>
-          </a:p>
-        </p:txBody>
-      </p:sp>
-      <p:sp>
-        <p:nvSpPr>
-          <p:cNvPr id="4" name="">
-            <a:extLst xmlns:a="http://schemas.openxmlformats.org/drawingml/2006/main">
-              <a:ext uri="{FF2B5EF4-FFF2-40B4-BE49-F238E27FC236}">
-                <a16:creationId xmlns:a16="http://schemas.microsoft.com/office/drawing/2014/main" id="{DB7256AC-B674-420C-84B1-EC729BD56F99}"/>
-              </a:ext>
-            </a:extLst>
-          </p:cNvPr>
-          <p:cNvSpPr>
-            <a:spLocks xmlns:a="http://schemas.openxmlformats.org/drawingml/2006/main" noGrp="1"/>
-          </p:cNvSpPr>
-          <p:nvPr/>
-        </p:nvSpPr>
-        <p:spPr>
-          <a:xfrm xmlns:a="http://schemas.openxmlformats.org/drawingml/2006/main">
-            <a:off x="6334125" y="1905000"/>
-            <a:ext cx="2286000" cy="857250"/>
-          </a:xfrm>
-          <a:prstGeom xmlns:a="http://schemas.openxmlformats.org/drawingml/2006/main" prst="rect">
-            <a:avLst/>
-          </a:prstGeom>
-          <a:solidFill xmlns:a="http://schemas.openxmlformats.org/drawingml/2006/main">
-            <a:srgbClr val="E5EBDF"/>
-          </a:solidFill>
-          <a:ln xmlns:a="http://schemas.openxmlformats.org/drawingml/2006/main" w="14288">
-            <a:solidFill>
-              <a:srgbClr val="8B9E7E"/>
-            </a:solidFill>
-          </a:ln>
-        </p:spPr>
-        <p:txBody>
-          <a:bodyPr xmlns:a="http://schemas.openxmlformats.org/drawingml/2006/main"/>
-          <a:lstStyle xmlns:a="http://schemas.openxmlformats.org/drawingml/2006/main">
-            <a:defPPr algn="ctr">
-              <a:defRPr sz="1950" b="1">
-                <a:solidFill>
-                  <a:srgbClr val="23423C"/>
-                </a:solidFill>
-                <a:latin typeface="Arial"/>
-                <a:ea typeface="Arial"/>
-                <a:cs typeface="Arial"/>
-              </a:defRPr>
-            </a:defPPr>
-          </a:lstStyle>
-          <a:p xmlns:a="http://schemas.openxmlformats.org/drawingml/2006/main">
-            <a:pPr algn="ctr">
-              <a:defRPr sz="1950" b="1">
-                <a:solidFill>
-                  <a:srgbClr val="23423C"/>
-                </a:solidFill>
-                <a:latin typeface="Arial"/>
-                <a:ea typeface="Arial"/>
-                <a:cs typeface="Arial"/>
-              </a:defRPr>
-            </a:pPr>
-            <a:r>
-              <a:rPr sz="1950" b="1">
-                <a:solidFill>
-                  <a:srgbClr val="23423C"/>
-                </a:solidFill>
-                <a:latin typeface="Arial"/>
-                <a:ea typeface="Arial"/>
-                <a:cs typeface="Arial"/>
-              </a:rPr>
-              <a:t>GHCR SHA tags</a:t>
-            </a:r>
-          </a:p>
-        </p:txBody>
-      </p:sp>
-      <p:sp>
-        <p:nvSpPr>
-          <p:cNvPr id="5" name="">
-            <a:extLst xmlns:a="http://schemas.openxmlformats.org/drawingml/2006/main">
-              <a:ext uri="{FF2B5EF4-FFF2-40B4-BE49-F238E27FC236}">
-                <a16:creationId xmlns:a16="http://schemas.microsoft.com/office/drawing/2014/main" id="{2F87DE7F-2FB1-4328-8C37-A20ECBF48B5E}"/>
-              </a:ext>
-            </a:extLst>
-          </p:cNvPr>
-          <p:cNvSpPr>
-            <a:spLocks xmlns:a="http://schemas.openxmlformats.org/drawingml/2006/main" noGrp="1"/>
-          </p:cNvSpPr>
-          <p:nvPr/>
-        </p:nvSpPr>
-        <p:spPr>
-          <a:xfrm xmlns:a="http://schemas.openxmlformats.org/drawingml/2006/main">
-            <a:off x="9191625" y="1905000"/>
-            <a:ext cx="2286000" cy="857250"/>
-          </a:xfrm>
-          <a:prstGeom xmlns:a="http://schemas.openxmlformats.org/drawingml/2006/main" prst="rect">
-            <a:avLst/>
-          </a:prstGeom>
-          <a:solidFill xmlns:a="http://schemas.openxmlformats.org/drawingml/2006/main">
-            <a:srgbClr val="E5EBDF"/>
-          </a:solidFill>
-          <a:ln xmlns:a="http://schemas.openxmlformats.org/drawingml/2006/main" w="14288">
-            <a:solidFill>
-              <a:srgbClr val="8B9E7E"/>
-            </a:solidFill>
-          </a:ln>
-        </p:spPr>
-        <p:txBody>
-          <a:bodyPr xmlns:a="http://schemas.openxmlformats.org/drawingml/2006/main"/>
-          <a:lstStyle xmlns:a="http://schemas.openxmlformats.org/drawingml/2006/main">
-            <a:defPPr algn="ctr">
-              <a:defRPr sz="1950" b="1">
-                <a:solidFill>
-                  <a:srgbClr val="23423C"/>
-                </a:solidFill>
-                <a:latin typeface="Arial"/>
-                <a:ea typeface="Arial"/>
-                <a:cs typeface="Arial"/>
-              </a:defRPr>
-            </a:defPPr>
-          </a:lstStyle>
-          <a:p xmlns:a="http://schemas.openxmlformats.org/drawingml/2006/main">
-            <a:pPr algn="ctr">
-              <a:defRPr sz="1950" b="1">
-                <a:solidFill>
-                  <a:srgbClr val="23423C"/>
-                </a:solidFill>
-                <a:latin typeface="Arial"/>
-                <a:ea typeface="Arial"/>
-                <a:cs typeface="Arial"/>
-              </a:defRPr>
-            </a:pPr>
-            <a:r>
-              <a:rPr sz="1950" b="1">
-                <a:solidFill>
-                  <a:srgbClr val="23423C"/>
-                </a:solidFill>
-                <a:latin typeface="Arial"/>
-                <a:ea typeface="Arial"/>
-                <a:cs typeface="Arial"/>
-              </a:rPr>
-              <a:t>Helm deploy</a:t>
-            </a:r>
-          </a:p>
-        </p:txBody>
-      </p:sp>
-      <p:sp>
-        <p:nvSpPr>
-          <p:cNvPr id="9" name="">
-            <a:extLst xmlns:a="http://schemas.openxmlformats.org/drawingml/2006/main">
-              <a:ext uri="{FF2B5EF4-FFF2-40B4-BE49-F238E27FC236}">
-                <a16:creationId xmlns:a16="http://schemas.microsoft.com/office/drawing/2014/main" id="{E515E66E-BBC2-4059-858B-AC432B2D9FEA}"/>
-              </a:ext>
-            </a:extLst>
-          </p:cNvPr>
-          <p:cNvSpPr>
-            <a:spLocks xmlns:a="http://schemas.openxmlformats.org/drawingml/2006/main" noGrp="1"/>
-          </p:cNvSpPr>
-          <p:nvPr/>
-        </p:nvSpPr>
-        <p:spPr>
-          <a:xfrm xmlns:a="http://schemas.openxmlformats.org/drawingml/2006/main">
-            <a:off x="685800" y="3619500"/>
-            <a:ext cx="10572750" cy="1047750"/>
+            <a:off x="628650" y="5791200"/>
+            <a:ext cx="3286125" cy="428625"/>
           </a:xfrm>
           <a:prstGeom xmlns:a="http://schemas.openxmlformats.org/drawingml/2006/main" prst="rect">
             <a:avLst/>
@@ -6480,9 +8389,9 @@
           <a:bodyPr xmlns:a="http://schemas.openxmlformats.org/drawingml/2006/main"/>
           <a:lstStyle xmlns:a="http://schemas.openxmlformats.org/drawingml/2006/main">
             <a:defPPr>
-              <a:defRPr sz="2250" b="0">
-                <a:solidFill>
-                  <a:srgbClr val="23423C"/>
+              <a:defRPr sz="2175" b="1">
+                <a:solidFill>
+                  <a:srgbClr val="163D38"/>
                 </a:solidFill>
                 <a:latin typeface="Arial"/>
                 <a:ea typeface="Arial"/>
@@ -6492,9 +8401,9 @@
           </a:lstStyle>
           <a:p xmlns:a="http://schemas.openxmlformats.org/drawingml/2006/main">
             <a:pPr>
-              <a:defRPr sz="2250" b="0">
-                <a:solidFill>
-                  <a:srgbClr val="23423C"/>
+              <a:defRPr sz="2175" b="1">
+                <a:solidFill>
+                  <a:srgbClr val="163D38"/>
                 </a:solidFill>
                 <a:latin typeface="Arial"/>
                 <a:ea typeface="Arial"/>
@@ -6502,25 +8411,25 @@
               </a:defRPr>
             </a:pPr>
             <a:r>
-              <a:rPr sz="2250" b="0">
-                <a:solidFill>
-                  <a:srgbClr val="23423C"/>
+              <a:rPr sz="2175" b="1">
+                <a:solidFill>
+                  <a:srgbClr val="163D38"/>
                 </a:solidFill>
                 <a:latin typeface="Arial"/>
                 <a:ea typeface="Arial"/>
                 <a:cs typeface="Arial"/>
               </a:rPr>
-              <a:t>Every main-branch push runs the pipeline. A failed test or HIGH/CRITICAL image finding blocks publication.</a:t>
-            </a:r>
-          </a:p>
-        </p:txBody>
-      </p:sp>
-      <p:sp>
-        <p:nvSpPr>
-          <p:cNvPr id="10" name="">
+              <a:t>Tests and audits</a:t>
+            </a:r>
+          </a:p>
+        </p:txBody>
+      </p:sp>
+      <p:sp>
+        <p:nvSpPr>
+          <p:cNvPr id="4" name="">
             <a:extLst xmlns:a="http://schemas.openxmlformats.org/drawingml/2006/main">
               <a:ext uri="{FF2B5EF4-FFF2-40B4-BE49-F238E27FC236}">
-                <a16:creationId xmlns:a16="http://schemas.microsoft.com/office/drawing/2014/main" id="{EE5DA85B-02F7-4ABD-9994-F520DCE0D910}"/>
+                <a16:creationId xmlns:a16="http://schemas.microsoft.com/office/drawing/2014/main" id="{D755025F-2171-4279-AE47-6226FBF4F728}"/>
               </a:ext>
             </a:extLst>
           </p:cNvPr>
@@ -6531,8 +8440,8 @@
         </p:nvSpPr>
         <p:spPr>
           <a:xfrm xmlns:a="http://schemas.openxmlformats.org/drawingml/2006/main">
-            <a:off x="685800" y="5048250"/>
-            <a:ext cx="10572750" cy="904875"/>
+            <a:off x="4257675" y="5791200"/>
+            <a:ext cx="3333750" cy="428625"/>
           </a:xfrm>
           <a:prstGeom xmlns:a="http://schemas.openxmlformats.org/drawingml/2006/main" prst="rect">
             <a:avLst/>
@@ -6546,9 +8455,9 @@
           <a:bodyPr xmlns:a="http://schemas.openxmlformats.org/drawingml/2006/main"/>
           <a:lstStyle xmlns:a="http://schemas.openxmlformats.org/drawingml/2006/main">
             <a:defPPr>
-              <a:defRPr sz="2025" b="0">
-                <a:solidFill>
-                  <a:srgbClr val="687B64"/>
+              <a:defRPr sz="2175" b="1">
+                <a:solidFill>
+                  <a:srgbClr val="163D38"/>
                 </a:solidFill>
                 <a:latin typeface="Arial"/>
                 <a:ea typeface="Arial"/>
@@ -6558,9 +8467,9 @@
           </a:lstStyle>
           <a:p xmlns:a="http://schemas.openxmlformats.org/drawingml/2006/main">
             <a:pPr>
-              <a:defRPr sz="2025" b="0">
-                <a:solidFill>
-                  <a:srgbClr val="687B64"/>
+              <a:defRPr sz="2175" b="1">
+                <a:solidFill>
+                  <a:srgbClr val="163D38"/>
                 </a:solidFill>
                 <a:latin typeface="Arial"/>
                 <a:ea typeface="Arial"/>
@@ -6568,15 +8477,147 @@
               </a:defRPr>
             </a:pPr>
             <a:r>
-              <a:rPr sz="2025" b="0">
-                <a:solidFill>
-                  <a:srgbClr val="687B64"/>
+              <a:rPr sz="2175" b="1">
+                <a:solidFill>
+                  <a:srgbClr val="163D38"/>
                 </a:solidFill>
                 <a:latin typeface="Arial"/>
                 <a:ea typeface="Arial"/>
                 <a:cs typeface="Arial"/>
               </a:rPr>
-              <a:t>Ruff and Bandit check Python code. Dependency audits and a full-history secret scan run before image promotion.</a:t>
+              <a:t>Docker and Trivy</a:t>
+            </a:r>
+          </a:p>
+        </p:txBody>
+      </p:sp>
+      <p:sp>
+        <p:nvSpPr>
+          <p:cNvPr id="5" name="">
+            <a:extLst xmlns:a="http://schemas.openxmlformats.org/drawingml/2006/main">
+              <a:ext uri="{FF2B5EF4-FFF2-40B4-BE49-F238E27FC236}">
+                <a16:creationId xmlns:a16="http://schemas.microsoft.com/office/drawing/2014/main" id="{0D8E6332-0268-49CE-A989-A4DAF1217F9C}"/>
+              </a:ext>
+            </a:extLst>
+          </p:cNvPr>
+          <p:cNvSpPr>
+            <a:spLocks xmlns:a="http://schemas.openxmlformats.org/drawingml/2006/main" noGrp="1"/>
+          </p:cNvSpPr>
+          <p:nvPr/>
+        </p:nvSpPr>
+        <p:spPr>
+          <a:xfrm xmlns:a="http://schemas.openxmlformats.org/drawingml/2006/main">
+            <a:off x="7981950" y="5791200"/>
+            <a:ext cx="3571875" cy="428625"/>
+          </a:xfrm>
+          <a:prstGeom xmlns:a="http://schemas.openxmlformats.org/drawingml/2006/main" prst="rect">
+            <a:avLst/>
+          </a:prstGeom>
+          <a:noFill xmlns:a="http://schemas.openxmlformats.org/drawingml/2006/main"/>
+          <a:ln xmlns:a="http://schemas.openxmlformats.org/drawingml/2006/main" w="0">
+            <a:noFill/>
+          </a:ln>
+        </p:spPr>
+        <p:txBody>
+          <a:bodyPr xmlns:a="http://schemas.openxmlformats.org/drawingml/2006/main"/>
+          <a:lstStyle xmlns:a="http://schemas.openxmlformats.org/drawingml/2006/main">
+            <a:defPPr>
+              <a:defRPr sz="2175" b="1">
+                <a:solidFill>
+                  <a:srgbClr val="163D38"/>
+                </a:solidFill>
+                <a:latin typeface="Arial"/>
+                <a:ea typeface="Arial"/>
+                <a:cs typeface="Arial"/>
+              </a:defRPr>
+            </a:defPPr>
+          </a:lstStyle>
+          <a:p xmlns:a="http://schemas.openxmlformats.org/drawingml/2006/main">
+            <a:pPr>
+              <a:defRPr sz="2175" b="1">
+                <a:solidFill>
+                  <a:srgbClr val="163D38"/>
+                </a:solidFill>
+                <a:latin typeface="Arial"/>
+                <a:ea typeface="Arial"/>
+                <a:cs typeface="Arial"/>
+              </a:defRPr>
+            </a:pPr>
+            <a:r>
+              <a:rPr sz="2175" b="1">
+                <a:solidFill>
+                  <a:srgbClr val="163D38"/>
+                </a:solidFill>
+                <a:latin typeface="Arial"/>
+                <a:ea typeface="Arial"/>
+                <a:cs typeface="Arial"/>
+              </a:rPr>
+              <a:t>SHA images and Helm</a:t>
+            </a:r>
+          </a:p>
+        </p:txBody>
+      </p:sp>
+      <p:sp>
+        <p:nvSpPr>
+          <p:cNvPr id="6" name="">
+            <a:extLst xmlns:a="http://schemas.openxmlformats.org/drawingml/2006/main">
+              <a:ext uri="{FF2B5EF4-FFF2-40B4-BE49-F238E27FC236}">
+                <a16:creationId xmlns:a16="http://schemas.microsoft.com/office/drawing/2014/main" id="{3AFCE3ED-276A-4365-9673-552F1F7D35A7}"/>
+              </a:ext>
+            </a:extLst>
+          </p:cNvPr>
+          <p:cNvSpPr>
+            <a:spLocks xmlns:a="http://schemas.openxmlformats.org/drawingml/2006/main" noGrp="1"/>
+          </p:cNvSpPr>
+          <p:nvPr/>
+        </p:nvSpPr>
+        <p:spPr>
+          <a:xfrm xmlns:a="http://schemas.openxmlformats.org/drawingml/2006/main">
+            <a:off x="628650" y="6334125"/>
+            <a:ext cx="10763250" cy="304800"/>
+          </a:xfrm>
+          <a:prstGeom xmlns:a="http://schemas.openxmlformats.org/drawingml/2006/main" prst="rect">
+            <a:avLst/>
+          </a:prstGeom>
+          <a:noFill xmlns:a="http://schemas.openxmlformats.org/drawingml/2006/main"/>
+          <a:ln xmlns:a="http://schemas.openxmlformats.org/drawingml/2006/main" w="0">
+            <a:noFill/>
+          </a:ln>
+        </p:spPr>
+        <p:txBody>
+          <a:bodyPr xmlns:a="http://schemas.openxmlformats.org/drawingml/2006/main"/>
+          <a:lstStyle xmlns:a="http://schemas.openxmlformats.org/drawingml/2006/main">
+            <a:defPPr>
+              <a:defRPr sz="1650" b="0">
+                <a:solidFill>
+                  <a:srgbClr val="526963"/>
+                </a:solidFill>
+                <a:latin typeface="Arial"/>
+                <a:ea typeface="Arial"/>
+                <a:cs typeface="Arial"/>
+              </a:defRPr>
+            </a:defPPr>
+          </a:lstStyle>
+          <a:p xmlns:a="http://schemas.openxmlformats.org/drawingml/2006/main">
+            <a:pPr>
+              <a:defRPr sz="1650" b="0">
+                <a:solidFill>
+                  <a:srgbClr val="526963"/>
+                </a:solidFill>
+                <a:latin typeface="Arial"/>
+                <a:ea typeface="Arial"/>
+                <a:cs typeface="Arial"/>
+              </a:defRPr>
+            </a:pPr>
+            <a:r>
+              <a:rPr sz="1650" b="0">
+                <a:solidFill>
+                  <a:srgbClr val="526963"/>
+                </a:solidFill>
+                <a:latin typeface="Arial"/>
+                <a:ea typeface="Arial"/>
+                <a:cs typeface="Arial"/>
+              </a:rPr>
+              <a:t>A failed gate stops promotion. Cloud deployment runs only while the AWS lab is enabled.</a:t>
             </a:r>
           </a:p>
         </p:txBody>
@@ -6584,7 +8625,7 @@
     </p:spTree>
     <p:extLst>
       <p:ext uri="{BB962C8B-B14F-4D97-AF65-F5344CB8AC3E}">
-        <p14:creationId xmlns:p14="http://schemas.microsoft.com/office/powerpoint/2010/main" val="405561193"/>
+        <p14:creationId xmlns:p14="http://schemas.microsoft.com/office/powerpoint/2010/main" val="1710440423"/>
       </p:ext>
     </p:extLst>
   </p:cSld>
@@ -6597,7 +8638,7 @@
     <p:bg>
       <p:bgPr>
         <a:solidFill xmlns:a="http://schemas.openxmlformats.org/drawingml/2006/main">
-          <a:srgbClr val="F5F4EF"/>
+          <a:srgbClr val="F8F5EE"/>
         </a:solidFill>
       </p:bgPr>
     </p:bg>
@@ -6615,7 +8656,7 @@
           <p:cNvPr id="7" name="">
             <a:extLst xmlns:a="http://schemas.openxmlformats.org/drawingml/2006/main">
               <a:ext uri="{FF2B5EF4-FFF2-40B4-BE49-F238E27FC236}">
-                <a16:creationId xmlns:a16="http://schemas.microsoft.com/office/drawing/2014/main" id="{8FE7A9A2-9B89-4D26-B1CB-D90CC64AD9A4}"/>
+                <a16:creationId xmlns:a16="http://schemas.microsoft.com/office/drawing/2014/main" id="{DF68673C-80D0-49D6-A017-8FDF57A39815}"/>
               </a:ext>
             </a:extLst>
           </p:cNvPr>
@@ -6626,8 +8667,8 @@
         </p:nvSpPr>
         <p:spPr>
           <a:xfrm xmlns:a="http://schemas.openxmlformats.org/drawingml/2006/main">
-            <a:off x="609600" y="476250"/>
-            <a:ext cx="10858500" cy="714375"/>
+            <a:off x="609600" y="381000"/>
+            <a:ext cx="10972800" cy="723900"/>
           </a:xfrm>
           <a:prstGeom xmlns:a="http://schemas.openxmlformats.org/drawingml/2006/main" prst="rect">
             <a:avLst/>
@@ -6641,9 +8682,9 @@
           <a:bodyPr xmlns:a="http://schemas.openxmlformats.org/drawingml/2006/main"/>
           <a:lstStyle xmlns:a="http://schemas.openxmlformats.org/drawingml/2006/main">
             <a:defPPr>
-              <a:defRPr sz="3300" b="1">
-                <a:solidFill>
-                  <a:srgbClr val="23423C"/>
+              <a:defRPr sz="3600" b="1">
+                <a:solidFill>
+                  <a:srgbClr val="163D38"/>
                 </a:solidFill>
                 <a:latin typeface="Arial"/>
                 <a:ea typeface="Arial"/>
@@ -6653,9 +8694,9 @@
           </a:lstStyle>
           <a:p xmlns:a="http://schemas.openxmlformats.org/drawingml/2006/main">
             <a:pPr>
-              <a:defRPr sz="3300" b="1">
-                <a:solidFill>
-                  <a:srgbClr val="23423C"/>
+              <a:defRPr sz="3600" b="1">
+                <a:solidFill>
+                  <a:srgbClr val="163D38"/>
                 </a:solidFill>
                 <a:latin typeface="Arial"/>
                 <a:ea typeface="Arial"/>
@@ -6663,9 +8704,9 @@
               </a:defRPr>
             </a:pPr>
             <a:r>
-              <a:rPr sz="3300" b="1">
-                <a:solidFill>
-                  <a:srgbClr val="23423C"/>
+              <a:rPr sz="3600" b="1">
+                <a:solidFill>
+                  <a:srgbClr val="163D38"/>
                 </a:solidFill>
                 <a:latin typeface="Arial"/>
                 <a:ea typeface="Arial"/>
@@ -6676,24 +8717,52 @@
           </a:p>
         </p:txBody>
       </p:sp>
-      <p:sp>
-        <p:nvSpPr>
+      <p:pic>
+        <p:nvPicPr>
           <p:cNvPr id="2" name="">
             <a:extLst xmlns:a="http://schemas.openxmlformats.org/drawingml/2006/main">
               <a:ext uri="{FF2B5EF4-FFF2-40B4-BE49-F238E27FC236}">
-                <a16:creationId xmlns:a16="http://schemas.microsoft.com/office/drawing/2014/main" id="{1FB1E06F-65E7-41DC-BA7C-7477D27ACF4D}"/>
+                <a16:creationId xmlns:a16="http://schemas.microsoft.com/office/drawing/2014/main" id="{1539DD94-0B37-4723-898A-470B5DE9EFE9}"/>
               </a:ext>
             </a:extLst>
           </p:cNvPr>
-          <p:cNvSpPr>
-            <a:spLocks xmlns:a="http://schemas.openxmlformats.org/drawingml/2006/main" noGrp="1"/>
-          </p:cNvSpPr>
+          <p:cNvPicPr>
+            <a:picLocks xmlns:a="http://schemas.openxmlformats.org/drawingml/2006/main" noChangeAspect="1"/>
+          </p:cNvPicPr>
           <p:nvPr/>
-        </p:nvSpPr>
+        </p:nvPicPr>
+        <p:blipFill>
+          <a:blip xmlns:r="http://schemas.openxmlformats.org/officeDocument/2006/relationships" xmlns:a="http://schemas.openxmlformats.org/drawingml/2006/main" r:embed="Rf84dd5bf2c554897"/>
+          <a:stretch xmlns:a="http://schemas.openxmlformats.org/drawingml/2006/main"/>
+        </p:blipFill>
         <p:spPr>
           <a:xfrm xmlns:a="http://schemas.openxmlformats.org/drawingml/2006/main">
-            <a:off x="685800" y="1476375"/>
-            <a:ext cx="10572750" cy="714375"/>
+            <a:off x="514350" y="1474589"/>
+            <a:ext cx="8134350" cy="4575572"/>
+          </a:xfrm>
+          <a:prstGeom xmlns:a="http://schemas.openxmlformats.org/drawingml/2006/main" prst="rect">
+            <a:avLst/>
+          </a:prstGeom>
+        </p:spPr>
+      </p:pic>
+      <p:sp>
+        <p:nvSpPr>
+          <p:cNvPr id="3" name="">
+            <a:extLst xmlns:a="http://schemas.openxmlformats.org/drawingml/2006/main">
+              <a:ext uri="{FF2B5EF4-FFF2-40B4-BE49-F238E27FC236}">
+                <a16:creationId xmlns:a16="http://schemas.microsoft.com/office/drawing/2014/main" id="{69CCBEFD-52FD-421C-8D40-403BAA9D4437}"/>
+              </a:ext>
+            </a:extLst>
+          </p:cNvPr>
+          <p:cNvSpPr>
+            <a:spLocks xmlns:a="http://schemas.openxmlformats.org/drawingml/2006/main" noGrp="1"/>
+          </p:cNvSpPr>
+          <p:nvPr/>
+        </p:nvSpPr>
+        <p:spPr>
+          <a:xfrm xmlns:a="http://schemas.openxmlformats.org/drawingml/2006/main">
+            <a:off x="8905875" y="1733550"/>
+            <a:ext cx="2619375" cy="666750"/>
           </a:xfrm>
           <a:prstGeom xmlns:a="http://schemas.openxmlformats.org/drawingml/2006/main" prst="rect">
             <a:avLst/>
@@ -6707,9 +8776,9 @@
           <a:bodyPr xmlns:a="http://schemas.openxmlformats.org/drawingml/2006/main"/>
           <a:lstStyle xmlns:a="http://schemas.openxmlformats.org/drawingml/2006/main">
             <a:defPPr>
-              <a:defRPr sz="2100" b="0">
-                <a:solidFill>
-                  <a:srgbClr val="23423C"/>
+              <a:defRPr sz="3525" b="1">
+                <a:solidFill>
+                  <a:srgbClr val="D76F3E"/>
                 </a:solidFill>
                 <a:latin typeface="Arial"/>
                 <a:ea typeface="Arial"/>
@@ -6719,9 +8788,9 @@
           </a:lstStyle>
           <a:p xmlns:a="http://schemas.openxmlformats.org/drawingml/2006/main">
             <a:pPr>
-              <a:defRPr sz="2100" b="0">
-                <a:solidFill>
-                  <a:srgbClr val="23423C"/>
+              <a:defRPr sz="3525" b="1">
+                <a:solidFill>
+                  <a:srgbClr val="D76F3E"/>
                 </a:solidFill>
                 <a:latin typeface="Arial"/>
                 <a:ea typeface="Arial"/>
@@ -6729,25 +8798,25 @@
               </a:defRPr>
             </a:pPr>
             <a:r>
-              <a:rPr sz="2100" b="0">
-                <a:solidFill>
-                  <a:srgbClr val="23423C"/>
+              <a:rPr sz="3525" b="1">
+                <a:solidFill>
+                  <a:srgbClr val="D76F3E"/>
                 </a:solidFill>
                 <a:latin typeface="Arial"/>
                 <a:ea typeface="Arial"/>
                 <a:cs typeface="Arial"/>
               </a:rPr>
-              <a:t>Terraform creates the VPC and two public subnets in separate zones.</a:t>
-            </a:r>
-          </a:p>
-        </p:txBody>
-      </p:sp>
-      <p:sp>
-        <p:nvSpPr>
-          <p:cNvPr id="3" name="">
+              <a:t>2 zones</a:t>
+            </a:r>
+          </a:p>
+        </p:txBody>
+      </p:sp>
+      <p:sp>
+        <p:nvSpPr>
+          <p:cNvPr id="4" name="">
             <a:extLst xmlns:a="http://schemas.openxmlformats.org/drawingml/2006/main">
               <a:ext uri="{FF2B5EF4-FFF2-40B4-BE49-F238E27FC236}">
-                <a16:creationId xmlns:a16="http://schemas.microsoft.com/office/drawing/2014/main" id="{DCEC91D5-FA12-4F99-883B-4ABA9D4E7D1A}"/>
+                <a16:creationId xmlns:a16="http://schemas.microsoft.com/office/drawing/2014/main" id="{6C28353F-D54B-453F-B576-1897C8B9287D}"/>
               </a:ext>
             </a:extLst>
           </p:cNvPr>
@@ -6758,8 +8827,8 @@
         </p:nvSpPr>
         <p:spPr>
           <a:xfrm xmlns:a="http://schemas.openxmlformats.org/drawingml/2006/main">
-            <a:off x="685800" y="2352675"/>
-            <a:ext cx="10572750" cy="714375"/>
+            <a:off x="8915400" y="2705100"/>
+            <a:ext cx="2619375" cy="1524000"/>
           </a:xfrm>
           <a:prstGeom xmlns:a="http://schemas.openxmlformats.org/drawingml/2006/main" prst="rect">
             <a:avLst/>
@@ -6775,7 +8844,7 @@
             <a:defPPr>
               <a:defRPr sz="2100" b="0">
                 <a:solidFill>
-                  <a:srgbClr val="23423C"/>
+                  <a:srgbClr val="163D38"/>
                 </a:solidFill>
                 <a:latin typeface="Arial"/>
                 <a:ea typeface="Arial"/>
@@ -6787,7 +8856,7 @@
             <a:pPr>
               <a:defRPr sz="2100" b="0">
                 <a:solidFill>
-                  <a:srgbClr val="23423C"/>
+                  <a:srgbClr val="163D38"/>
                 </a:solidFill>
                 <a:latin typeface="Arial"/>
                 <a:ea typeface="Arial"/>
@@ -6797,23 +8866,69 @@
             <a:r>
               <a:rPr sz="2100" b="0">
                 <a:solidFill>
-                  <a:srgbClr val="23423C"/>
+                  <a:srgbClr val="163D38"/>
                 </a:solidFill>
                 <a:latin typeface="Arial"/>
                 <a:ea typeface="Arial"/>
                 <a:cs typeface="Arial"/>
               </a:rPr>
-              <a:t>EKS 1.35 uses two t3.medium workers and EBS CSI storage.</a:t>
-            </a:r>
-          </a:p>
-        </p:txBody>
-      </p:sp>
-      <p:sp>
-        <p:nvSpPr>
-          <p:cNvPr id="4" name="">
+              <a:t>Two public subnets</a:t>
+            </a:r>
+          </a:p>
+          <a:p xmlns:a="http://schemas.openxmlformats.org/drawingml/2006/main">
+            <a:pPr>
+              <a:defRPr sz="2100" b="0">
+                <a:solidFill>
+                  <a:srgbClr val="163D38"/>
+                </a:solidFill>
+                <a:latin typeface="Arial"/>
+                <a:ea typeface="Arial"/>
+                <a:cs typeface="Arial"/>
+              </a:defRPr>
+            </a:pPr>
+            <a:r>
+              <a:rPr sz="2100" b="0">
+                <a:solidFill>
+                  <a:srgbClr val="163D38"/>
+                </a:solidFill>
+                <a:latin typeface="Arial"/>
+                <a:ea typeface="Arial"/>
+                <a:cs typeface="Arial"/>
+              </a:rPr>
+              <a:t>One EKS cluster</a:t>
+            </a:r>
+          </a:p>
+          <a:p xmlns:a="http://schemas.openxmlformats.org/drawingml/2006/main">
+            <a:pPr>
+              <a:defRPr sz="2100" b="0">
+                <a:solidFill>
+                  <a:srgbClr val="163D38"/>
+                </a:solidFill>
+                <a:latin typeface="Arial"/>
+                <a:ea typeface="Arial"/>
+                <a:cs typeface="Arial"/>
+              </a:defRPr>
+            </a:pPr>
+            <a:r>
+              <a:rPr sz="2100" b="0">
+                <a:solidFill>
+                  <a:srgbClr val="163D38"/>
+                </a:solidFill>
+                <a:latin typeface="Arial"/>
+                <a:ea typeface="Arial"/>
+                <a:cs typeface="Arial"/>
+              </a:rPr>
+              <a:t>Two worker nodes</a:t>
+            </a:r>
+          </a:p>
+        </p:txBody>
+      </p:sp>
+      <p:sp>
+        <p:nvSpPr>
+          <p:cNvPr id="5" name="">
             <a:extLst xmlns:a="http://schemas.openxmlformats.org/drawingml/2006/main">
               <a:ext uri="{FF2B5EF4-FFF2-40B4-BE49-F238E27FC236}">
-                <a16:creationId xmlns:a16="http://schemas.microsoft.com/office/drawing/2014/main" id="{4A9250FD-2D79-4498-8309-FC78F2A00EDB}"/>
+                <a16:creationId xmlns:a16="http://schemas.microsoft.com/office/drawing/2014/main" id="{9229508A-2C35-4C3E-8CCB-27EEDFBD61CC}"/>
               </a:ext>
             </a:extLst>
           </p:cNvPr>
@@ -6824,8 +8939,8 @@
         </p:nvSpPr>
         <p:spPr>
           <a:xfrm xmlns:a="http://schemas.openxmlformats.org/drawingml/2006/main">
-            <a:off x="685800" y="3228975"/>
-            <a:ext cx="10572750" cy="714375"/>
+            <a:off x="8915400" y="4772025"/>
+            <a:ext cx="2667000" cy="1066800"/>
           </a:xfrm>
           <a:prstGeom xmlns:a="http://schemas.openxmlformats.org/drawingml/2006/main" prst="rect">
             <a:avLst/>
@@ -6839,9 +8954,9 @@
           <a:bodyPr xmlns:a="http://schemas.openxmlformats.org/drawingml/2006/main"/>
           <a:lstStyle xmlns:a="http://schemas.openxmlformats.org/drawingml/2006/main">
             <a:defPPr>
-              <a:defRPr sz="2100" b="0">
-                <a:solidFill>
-                  <a:srgbClr val="23423C"/>
+              <a:defRPr sz="1875" b="0">
+                <a:solidFill>
+                  <a:srgbClr val="526963"/>
                 </a:solidFill>
                 <a:latin typeface="Arial"/>
                 <a:ea typeface="Arial"/>
@@ -6851,9 +8966,9 @@
           </a:lstStyle>
           <a:p xmlns:a="http://schemas.openxmlformats.org/drawingml/2006/main">
             <a:pPr>
-              <a:defRPr sz="2100" b="0">
-                <a:solidFill>
-                  <a:srgbClr val="23423C"/>
+              <a:defRPr sz="1875" b="0">
+                <a:solidFill>
+                  <a:srgbClr val="526963"/>
                 </a:solidFill>
                 <a:latin typeface="Arial"/>
                 <a:ea typeface="Arial"/>
@@ -6861,25 +8976,48 @@
               </a:defRPr>
             </a:pPr>
             <a:r>
-              <a:rPr sz="2100" b="0">
-                <a:solidFill>
-                  <a:srgbClr val="23423C"/>
+              <a:rPr sz="1875" b="0">
+                <a:solidFill>
+                  <a:srgbClr val="526963"/>
                 </a:solidFill>
                 <a:latin typeface="Arial"/>
                 <a:ea typeface="Arial"/>
                 <a:cs typeface="Arial"/>
               </a:rPr>
-              <a:t>GitHub OIDC grants temporary access to this project cluster.</a:t>
-            </a:r>
-          </a:p>
-        </p:txBody>
-      </p:sp>
-      <p:sp>
-        <p:nvSpPr>
-          <p:cNvPr id="5" name="">
+              <a:t>Temporary OIDC access</a:t>
+            </a:r>
+          </a:p>
+          <a:p xmlns:a="http://schemas.openxmlformats.org/drawingml/2006/main">
+            <a:pPr>
+              <a:defRPr sz="1875" b="0">
+                <a:solidFill>
+                  <a:srgbClr val="526963"/>
+                </a:solidFill>
+                <a:latin typeface="Arial"/>
+                <a:ea typeface="Arial"/>
+                <a:cs typeface="Arial"/>
+              </a:defRPr>
+            </a:pPr>
+            <a:r>
+              <a:rPr sz="1875" b="0">
+                <a:solidFill>
+                  <a:srgbClr val="526963"/>
+                </a:solidFill>
+                <a:latin typeface="Arial"/>
+                <a:ea typeface="Arial"/>
+                <a:cs typeface="Arial"/>
+              </a:rPr>
+              <a:t>Teardown after recording</a:t>
+            </a:r>
+          </a:p>
+        </p:txBody>
+      </p:sp>
+      <p:sp>
+        <p:nvSpPr>
+          <p:cNvPr id="6" name="">
             <a:extLst xmlns:a="http://schemas.openxmlformats.org/drawingml/2006/main">
               <a:ext uri="{FF2B5EF4-FFF2-40B4-BE49-F238E27FC236}">
-                <a16:creationId xmlns:a16="http://schemas.microsoft.com/office/drawing/2014/main" id="{787BCB9A-53F4-445F-A837-455A76ABF6C8}"/>
+                <a16:creationId xmlns:a16="http://schemas.microsoft.com/office/drawing/2014/main" id="{7E1B9D34-BEE7-46AE-AA33-8700625228C9}"/>
               </a:ext>
             </a:extLst>
           </p:cNvPr>
@@ -6890,8 +9028,8 @@
         </p:nvSpPr>
         <p:spPr>
           <a:xfrm xmlns:a="http://schemas.openxmlformats.org/drawingml/2006/main">
-            <a:off x="685800" y="4105275"/>
-            <a:ext cx="10572750" cy="714375"/>
+            <a:off x="628650" y="6324600"/>
+            <a:ext cx="10763250" cy="323850"/>
           </a:xfrm>
           <a:prstGeom xmlns:a="http://schemas.openxmlformats.org/drawingml/2006/main" prst="rect">
             <a:avLst/>
@@ -6905,9 +9043,9 @@
           <a:bodyPr xmlns:a="http://schemas.openxmlformats.org/drawingml/2006/main"/>
           <a:lstStyle xmlns:a="http://schemas.openxmlformats.org/drawingml/2006/main">
             <a:defPPr>
-              <a:defRPr sz="2100" b="0">
-                <a:solidFill>
-                  <a:srgbClr val="23423C"/>
+              <a:defRPr sz="1800" b="0">
+                <a:solidFill>
+                  <a:srgbClr val="526963"/>
                 </a:solidFill>
                 <a:latin typeface="Arial"/>
                 <a:ea typeface="Arial"/>
@@ -6917,9 +9055,9 @@
           </a:lstStyle>
           <a:p xmlns:a="http://schemas.openxmlformats.org/drawingml/2006/main">
             <a:pPr>
-              <a:defRPr sz="2100" b="0">
-                <a:solidFill>
-                  <a:srgbClr val="23423C"/>
+              <a:defRPr sz="1800" b="0">
+                <a:solidFill>
+                  <a:srgbClr val="526963"/>
                 </a:solidFill>
                 <a:latin typeface="Arial"/>
                 <a:ea typeface="Arial"/>
@@ -6927,81 +9065,15 @@
               </a:defRPr>
             </a:pPr>
             <a:r>
-              <a:rPr sz="2100" b="0">
-                <a:solidFill>
-                  <a:srgbClr val="23423C"/>
+              <a:rPr sz="1800" b="0">
+                <a:solidFill>
+                  <a:srgbClr val="526963"/>
                 </a:solidFill>
                 <a:latin typeface="Arial"/>
                 <a:ea typeface="Arial"/>
                 <a:cs typeface="Arial"/>
               </a:rPr>
-              <a:t>Initial setup uses cluster access, then deployment access narrows to the app namespace.</a:t>
-            </a:r>
-          </a:p>
-        </p:txBody>
-      </p:sp>
-      <p:sp>
-        <p:nvSpPr>
-          <p:cNvPr id="6" name="">
-            <a:extLst xmlns:a="http://schemas.openxmlformats.org/drawingml/2006/main">
-              <a:ext uri="{FF2B5EF4-FFF2-40B4-BE49-F238E27FC236}">
-                <a16:creationId xmlns:a16="http://schemas.microsoft.com/office/drawing/2014/main" id="{F9BF7A45-815B-4D28-A259-24BA2E9A1267}"/>
-              </a:ext>
-            </a:extLst>
-          </p:cNvPr>
-          <p:cNvSpPr>
-            <a:spLocks xmlns:a="http://schemas.openxmlformats.org/drawingml/2006/main" noGrp="1"/>
-          </p:cNvSpPr>
-          <p:nvPr/>
-        </p:nvSpPr>
-        <p:spPr>
-          <a:xfrm xmlns:a="http://schemas.openxmlformats.org/drawingml/2006/main">
-            <a:off x="685800" y="4981575"/>
-            <a:ext cx="10572750" cy="714375"/>
-          </a:xfrm>
-          <a:prstGeom xmlns:a="http://schemas.openxmlformats.org/drawingml/2006/main" prst="rect">
-            <a:avLst/>
-          </a:prstGeom>
-          <a:noFill xmlns:a="http://schemas.openxmlformats.org/drawingml/2006/main"/>
-          <a:ln xmlns:a="http://schemas.openxmlformats.org/drawingml/2006/main" w="0">
-            <a:noFill/>
-          </a:ln>
-        </p:spPr>
-        <p:txBody>
-          <a:bodyPr xmlns:a="http://schemas.openxmlformats.org/drawingml/2006/main"/>
-          <a:lstStyle xmlns:a="http://schemas.openxmlformats.org/drawingml/2006/main">
-            <a:defPPr>
-              <a:defRPr sz="2100" b="0">
-                <a:solidFill>
-                  <a:srgbClr val="23423C"/>
-                </a:solidFill>
-                <a:latin typeface="Arial"/>
-                <a:ea typeface="Arial"/>
-                <a:cs typeface="Arial"/>
-              </a:defRPr>
-            </a:defPPr>
-          </a:lstStyle>
-          <a:p xmlns:a="http://schemas.openxmlformats.org/drawingml/2006/main">
-            <a:pPr>
-              <a:defRPr sz="2100" b="0">
-                <a:solidFill>
-                  <a:srgbClr val="23423C"/>
-                </a:solidFill>
-                <a:latin typeface="Arial"/>
-                <a:ea typeface="Arial"/>
-                <a:cs typeface="Arial"/>
-              </a:defRPr>
-            </a:pPr>
-            <a:r>
-              <a:rPr sz="2100" b="0">
-                <a:solidFill>
-                  <a:srgbClr val="23423C"/>
-                </a:solidFill>
-                <a:latin typeface="Arial"/>
-                <a:ea typeface="Arial"/>
-                <a:cs typeface="Arial"/>
-              </a:rPr>
-              <a:t>No NAT gateway or RDS instance. Terraform destroy removes the lab.</a:t>
+              <a:t>us-east-1   VPC 10.42.0.0/16</a:t>
             </a:r>
           </a:p>
         </p:txBody>
@@ -7009,7 +9081,7 @@
     </p:spTree>
     <p:extLst>
       <p:ext uri="{BB962C8B-B14F-4D97-AF65-F5344CB8AC3E}">
-        <p14:creationId xmlns:p14="http://schemas.microsoft.com/office/powerpoint/2010/main" val="1412552643"/>
+        <p14:creationId xmlns:p14="http://schemas.microsoft.com/office/powerpoint/2010/main" val="463008924"/>
       </p:ext>
     </p:extLst>
   </p:cSld>
@@ -7022,7 +9094,7 @@
     <p:bg>
       <p:bgPr>
         <a:solidFill xmlns:a="http://schemas.openxmlformats.org/drawingml/2006/main">
-          <a:srgbClr val="F5F4EF"/>
+          <a:srgbClr val="F8F5EE"/>
         </a:solidFill>
       </p:bgPr>
     </p:bg>
@@ -7037,10 +9109,10 @@
       </p:grpSpPr>
       <p:sp>
         <p:nvSpPr>
-          <p:cNvPr id="7" name="">
+          <p:cNvPr id="6" name="">
             <a:extLst xmlns:a="http://schemas.openxmlformats.org/drawingml/2006/main">
               <a:ext uri="{FF2B5EF4-FFF2-40B4-BE49-F238E27FC236}">
-                <a16:creationId xmlns:a16="http://schemas.microsoft.com/office/drawing/2014/main" id="{D46B67E9-6EAE-40FC-9055-D7D830F407EC}"/>
+                <a16:creationId xmlns:a16="http://schemas.microsoft.com/office/drawing/2014/main" id="{161ABFCE-342A-46CE-9CCF-62B1ABBF440D}"/>
               </a:ext>
             </a:extLst>
           </p:cNvPr>
@@ -7051,8 +9123,8 @@
         </p:nvSpPr>
         <p:spPr>
           <a:xfrm xmlns:a="http://schemas.openxmlformats.org/drawingml/2006/main">
-            <a:off x="609600" y="476250"/>
-            <a:ext cx="10858500" cy="714375"/>
+            <a:off x="609600" y="381000"/>
+            <a:ext cx="10972800" cy="723900"/>
           </a:xfrm>
           <a:prstGeom xmlns:a="http://schemas.openxmlformats.org/drawingml/2006/main" prst="rect">
             <a:avLst/>
@@ -7066,9 +9138,9 @@
           <a:bodyPr xmlns:a="http://schemas.openxmlformats.org/drawingml/2006/main"/>
           <a:lstStyle xmlns:a="http://schemas.openxmlformats.org/drawingml/2006/main">
             <a:defPPr>
-              <a:defRPr sz="3300" b="1">
-                <a:solidFill>
-                  <a:srgbClr val="23423C"/>
+              <a:defRPr sz="3600" b="1">
+                <a:solidFill>
+                  <a:srgbClr val="163D38"/>
                 </a:solidFill>
                 <a:latin typeface="Arial"/>
                 <a:ea typeface="Arial"/>
@@ -7078,9 +9150,9 @@
           </a:lstStyle>
           <a:p xmlns:a="http://schemas.openxmlformats.org/drawingml/2006/main">
             <a:pPr>
-              <a:defRPr sz="3300" b="1">
-                <a:solidFill>
-                  <a:srgbClr val="23423C"/>
+              <a:defRPr sz="3600" b="1">
+                <a:solidFill>
+                  <a:srgbClr val="163D38"/>
                 </a:solidFill>
                 <a:latin typeface="Arial"/>
                 <a:ea typeface="Arial"/>
@@ -7088,37 +9160,65 @@
               </a:defRPr>
             </a:pPr>
             <a:r>
-              <a:rPr sz="3300" b="1">
-                <a:solidFill>
-                  <a:srgbClr val="23423C"/>
+              <a:rPr sz="3600" b="1">
+                <a:solidFill>
+                  <a:srgbClr val="163D38"/>
                 </a:solidFill>
                 <a:latin typeface="Arial"/>
                 <a:ea typeface="Arial"/>
                 <a:cs typeface="Arial"/>
               </a:rPr>
-              <a:t>Kubernetes and GitOps</a:t>
-            </a:r>
-          </a:p>
-        </p:txBody>
-      </p:sp>
-      <p:sp>
-        <p:nvSpPr>
+              <a:t>Kubernetes and Helm</a:t>
+            </a:r>
+          </a:p>
+        </p:txBody>
+      </p:sp>
+      <p:pic>
+        <p:nvPicPr>
           <p:cNvPr id="2" name="">
             <a:extLst xmlns:a="http://schemas.openxmlformats.org/drawingml/2006/main">
               <a:ext uri="{FF2B5EF4-FFF2-40B4-BE49-F238E27FC236}">
-                <a16:creationId xmlns:a16="http://schemas.microsoft.com/office/drawing/2014/main" id="{6AE21B5B-01B2-42BC-ADD1-13151CE3A24D}"/>
+                <a16:creationId xmlns:a16="http://schemas.microsoft.com/office/drawing/2014/main" id="{3268FA10-17BC-4F7A-87B9-89E95E9E8C69}"/>
               </a:ext>
             </a:extLst>
           </p:cNvPr>
-          <p:cNvSpPr>
-            <a:spLocks xmlns:a="http://schemas.openxmlformats.org/drawingml/2006/main" noGrp="1"/>
-          </p:cNvSpPr>
+          <p:cNvPicPr>
+            <a:picLocks xmlns:a="http://schemas.openxmlformats.org/drawingml/2006/main" noChangeAspect="1"/>
+          </p:cNvPicPr>
           <p:nvPr/>
-        </p:nvSpPr>
+        </p:nvPicPr>
+        <p:blipFill>
+          <a:blip xmlns:r="http://schemas.openxmlformats.org/officeDocument/2006/relationships" xmlns:a="http://schemas.openxmlformats.org/drawingml/2006/main" r:embed="Rd5b57156a2564dce"/>
+          <a:stretch xmlns:a="http://schemas.openxmlformats.org/drawingml/2006/main"/>
+        </p:blipFill>
         <p:spPr>
           <a:xfrm xmlns:a="http://schemas.openxmlformats.org/drawingml/2006/main">
-            <a:off x="685800" y="1476375"/>
-            <a:ext cx="10572750" cy="714375"/>
+            <a:off x="1932960" y="1266825"/>
+            <a:ext cx="8326081" cy="4686300"/>
+          </a:xfrm>
+          <a:prstGeom xmlns:a="http://schemas.openxmlformats.org/drawingml/2006/main" prst="rect">
+            <a:avLst/>
+          </a:prstGeom>
+        </p:spPr>
+      </p:pic>
+      <p:sp>
+        <p:nvSpPr>
+          <p:cNvPr id="3" name="">
+            <a:extLst xmlns:a="http://schemas.openxmlformats.org/drawingml/2006/main">
+              <a:ext uri="{FF2B5EF4-FFF2-40B4-BE49-F238E27FC236}">
+                <a16:creationId xmlns:a16="http://schemas.microsoft.com/office/drawing/2014/main" id="{A3F149A3-2CB2-4E1F-8AC0-6BFEC09611DF}"/>
+              </a:ext>
+            </a:extLst>
+          </p:cNvPr>
+          <p:cNvSpPr>
+            <a:spLocks xmlns:a="http://schemas.openxmlformats.org/drawingml/2006/main" noGrp="1"/>
+          </p:cNvSpPr>
+          <p:nvPr/>
+        </p:nvSpPr>
+        <p:spPr>
+          <a:xfrm xmlns:a="http://schemas.openxmlformats.org/drawingml/2006/main">
+            <a:off x="647700" y="6200775"/>
+            <a:ext cx="2857500" cy="400050"/>
           </a:xfrm>
           <a:prstGeom xmlns:a="http://schemas.openxmlformats.org/drawingml/2006/main" prst="rect">
             <a:avLst/>
@@ -7132,9 +9232,9 @@
           <a:bodyPr xmlns:a="http://schemas.openxmlformats.org/drawingml/2006/main"/>
           <a:lstStyle xmlns:a="http://schemas.openxmlformats.org/drawingml/2006/main">
             <a:defPPr>
-              <a:defRPr sz="2100" b="0">
-                <a:solidFill>
-                  <a:srgbClr val="23423C"/>
+              <a:defRPr sz="2175" b="1">
+                <a:solidFill>
+                  <a:srgbClr val="163D38"/>
                 </a:solidFill>
                 <a:latin typeface="Arial"/>
                 <a:ea typeface="Arial"/>
@@ -7144,9 +9244,9 @@
           </a:lstStyle>
           <a:p xmlns:a="http://schemas.openxmlformats.org/drawingml/2006/main">
             <a:pPr>
-              <a:defRPr sz="2100" b="0">
-                <a:solidFill>
-                  <a:srgbClr val="23423C"/>
+              <a:defRPr sz="2175" b="1">
+                <a:solidFill>
+                  <a:srgbClr val="163D38"/>
                 </a:solidFill>
                 <a:latin typeface="Arial"/>
                 <a:ea typeface="Arial"/>
@@ -7154,25 +9254,25 @@
               </a:defRPr>
             </a:pPr>
             <a:r>
-              <a:rPr sz="2100" b="0">
-                <a:solidFill>
-                  <a:srgbClr val="23423C"/>
+              <a:rPr sz="2175" b="1">
+                <a:solidFill>
+                  <a:srgbClr val="163D38"/>
                 </a:solidFill>
                 <a:latin typeface="Arial"/>
                 <a:ea typeface="Arial"/>
                 <a:cs typeface="Arial"/>
               </a:rPr>
-              <a:t>The Helm chart defines two frontend replicas and a backend HPA.</a:t>
-            </a:r>
-          </a:p>
-        </p:txBody>
-      </p:sp>
-      <p:sp>
-        <p:nvSpPr>
-          <p:cNvPr id="3" name="">
+              <a:t>Ready Pods</a:t>
+            </a:r>
+          </a:p>
+        </p:txBody>
+      </p:sp>
+      <p:sp>
+        <p:nvSpPr>
+          <p:cNvPr id="4" name="">
             <a:extLst xmlns:a="http://schemas.openxmlformats.org/drawingml/2006/main">
               <a:ext uri="{FF2B5EF4-FFF2-40B4-BE49-F238E27FC236}">
-                <a16:creationId xmlns:a16="http://schemas.microsoft.com/office/drawing/2014/main" id="{10E7E872-3E66-422B-9B3F-1E4D5925C5B1}"/>
+                <a16:creationId xmlns:a16="http://schemas.microsoft.com/office/drawing/2014/main" id="{25A23500-D99B-413A-B441-87D5B626741F}"/>
               </a:ext>
             </a:extLst>
           </p:cNvPr>
@@ -7183,8 +9283,8 @@
         </p:nvSpPr>
         <p:spPr>
           <a:xfrm xmlns:a="http://schemas.openxmlformats.org/drawingml/2006/main">
-            <a:off x="685800" y="2352675"/>
-            <a:ext cx="10572750" cy="714375"/>
+            <a:off x="4048125" y="6200775"/>
+            <a:ext cx="3714750" cy="400050"/>
           </a:xfrm>
           <a:prstGeom xmlns:a="http://schemas.openxmlformats.org/drawingml/2006/main" prst="rect">
             <a:avLst/>
@@ -7198,9 +9298,9 @@
           <a:bodyPr xmlns:a="http://schemas.openxmlformats.org/drawingml/2006/main"/>
           <a:lstStyle xmlns:a="http://schemas.openxmlformats.org/drawingml/2006/main">
             <a:defPPr>
-              <a:defRPr sz="2100" b="0">
-                <a:solidFill>
-                  <a:srgbClr val="23423C"/>
+              <a:defRPr sz="2175" b="1">
+                <a:solidFill>
+                  <a:srgbClr val="163D38"/>
                 </a:solidFill>
                 <a:latin typeface="Arial"/>
                 <a:ea typeface="Arial"/>
@@ -7210,9 +9310,9 @@
           </a:lstStyle>
           <a:p xmlns:a="http://schemas.openxmlformats.org/drawingml/2006/main">
             <a:pPr>
-              <a:defRPr sz="2100" b="0">
-                <a:solidFill>
-                  <a:srgbClr val="23423C"/>
+              <a:defRPr sz="2175" b="1">
+                <a:solidFill>
+                  <a:srgbClr val="163D38"/>
                 </a:solidFill>
                 <a:latin typeface="Arial"/>
                 <a:ea typeface="Arial"/>
@@ -7220,25 +9320,25 @@
               </a:defRPr>
             </a:pPr>
             <a:r>
-              <a:rPr sz="2100" b="0">
-                <a:solidFill>
-                  <a:srgbClr val="23423C"/>
+              <a:rPr sz="2175" b="1">
+                <a:solidFill>
+                  <a:srgbClr val="163D38"/>
                 </a:solidFill>
                 <a:latin typeface="Arial"/>
                 <a:ea typeface="Arial"/>
                 <a:cs typeface="Arial"/>
               </a:rPr>
-              <a:t>ClusterIP Services and Ingress route the browser and API requests.</a:t>
-            </a:r>
-          </a:p>
-        </p:txBody>
-      </p:sp>
-      <p:sp>
-        <p:nvSpPr>
-          <p:cNvPr id="4" name="">
+              <a:t>Internal Services</a:t>
+            </a:r>
+          </a:p>
+        </p:txBody>
+      </p:sp>
+      <p:sp>
+        <p:nvSpPr>
+          <p:cNvPr id="5" name="">
             <a:extLst xmlns:a="http://schemas.openxmlformats.org/drawingml/2006/main">
               <a:ext uri="{FF2B5EF4-FFF2-40B4-BE49-F238E27FC236}">
-                <a16:creationId xmlns:a16="http://schemas.microsoft.com/office/drawing/2014/main" id="{7637467A-5274-4C6C-91BE-CEAB1FBA75FB}"/>
+                <a16:creationId xmlns:a16="http://schemas.microsoft.com/office/drawing/2014/main" id="{8771F658-9875-4334-84B2-4DB35B539025}"/>
               </a:ext>
             </a:extLst>
           </p:cNvPr>
@@ -7249,8 +9349,8 @@
         </p:nvSpPr>
         <p:spPr>
           <a:xfrm xmlns:a="http://schemas.openxmlformats.org/drawingml/2006/main">
-            <a:off x="685800" y="3228975"/>
-            <a:ext cx="10572750" cy="714375"/>
+            <a:off x="8058150" y="6200775"/>
+            <a:ext cx="3524250" cy="400050"/>
           </a:xfrm>
           <a:prstGeom xmlns:a="http://schemas.openxmlformats.org/drawingml/2006/main" prst="rect">
             <a:avLst/>
@@ -7264,9 +9364,9 @@
           <a:bodyPr xmlns:a="http://schemas.openxmlformats.org/drawingml/2006/main"/>
           <a:lstStyle xmlns:a="http://schemas.openxmlformats.org/drawingml/2006/main">
             <a:defPPr>
-              <a:defRPr sz="2100" b="0">
-                <a:solidFill>
-                  <a:srgbClr val="23423C"/>
+              <a:defRPr sz="2175" b="1">
+                <a:solidFill>
+                  <a:srgbClr val="163D38"/>
                 </a:solidFill>
                 <a:latin typeface="Arial"/>
                 <a:ea typeface="Arial"/>
@@ -7276,9 +9376,9 @@
           </a:lstStyle>
           <a:p xmlns:a="http://schemas.openxmlformats.org/drawingml/2006/main">
             <a:pPr>
-              <a:defRPr sz="2100" b="0">
-                <a:solidFill>
-                  <a:srgbClr val="23423C"/>
+              <a:defRPr sz="2175" b="1">
+                <a:solidFill>
+                  <a:srgbClr val="163D38"/>
                 </a:solidFill>
                 <a:latin typeface="Arial"/>
                 <a:ea typeface="Arial"/>
@@ -7286,147 +9386,15 @@
               </a:defRPr>
             </a:pPr>
             <a:r>
-              <a:rPr sz="2100" b="0">
-                <a:solidFill>
-                  <a:srgbClr val="23423C"/>
+              <a:rPr sz="2175" b="1">
+                <a:solidFill>
+                  <a:srgbClr val="163D38"/>
                 </a:solidFill>
                 <a:latin typeface="Arial"/>
                 <a:ea typeface="Arial"/>
                 <a:cs typeface="Arial"/>
               </a:rPr>
-              <a:t>PostgreSQL uses a PVC. Probes keep unready Pods out of traffic.</a:t>
-            </a:r>
-          </a:p>
-        </p:txBody>
-      </p:sp>
-      <p:sp>
-        <p:nvSpPr>
-          <p:cNvPr id="5" name="">
-            <a:extLst xmlns:a="http://schemas.openxmlformats.org/drawingml/2006/main">
-              <a:ext uri="{FF2B5EF4-FFF2-40B4-BE49-F238E27FC236}">
-                <a16:creationId xmlns:a16="http://schemas.microsoft.com/office/drawing/2014/main" id="{93E2781F-6CEC-450A-9FAE-C10AB0BB6120}"/>
-              </a:ext>
-            </a:extLst>
-          </p:cNvPr>
-          <p:cNvSpPr>
-            <a:spLocks xmlns:a="http://schemas.openxmlformats.org/drawingml/2006/main" noGrp="1"/>
-          </p:cNvSpPr>
-          <p:nvPr/>
-        </p:nvSpPr>
-        <p:spPr>
-          <a:xfrm xmlns:a="http://schemas.openxmlformats.org/drawingml/2006/main">
-            <a:off x="685800" y="4105275"/>
-            <a:ext cx="10572750" cy="714375"/>
-          </a:xfrm>
-          <a:prstGeom xmlns:a="http://schemas.openxmlformats.org/drawingml/2006/main" prst="rect">
-            <a:avLst/>
-          </a:prstGeom>
-          <a:noFill xmlns:a="http://schemas.openxmlformats.org/drawingml/2006/main"/>
-          <a:ln xmlns:a="http://schemas.openxmlformats.org/drawingml/2006/main" w="0">
-            <a:noFill/>
-          </a:ln>
-        </p:spPr>
-        <p:txBody>
-          <a:bodyPr xmlns:a="http://schemas.openxmlformats.org/drawingml/2006/main"/>
-          <a:lstStyle xmlns:a="http://schemas.openxmlformats.org/drawingml/2006/main">
-            <a:defPPr>
-              <a:defRPr sz="2100" b="0">
-                <a:solidFill>
-                  <a:srgbClr val="23423C"/>
-                </a:solidFill>
-                <a:latin typeface="Arial"/>
-                <a:ea typeface="Arial"/>
-                <a:cs typeface="Arial"/>
-              </a:defRPr>
-            </a:defPPr>
-          </a:lstStyle>
-          <a:p xmlns:a="http://schemas.openxmlformats.org/drawingml/2006/main">
-            <a:pPr>
-              <a:defRPr sz="2100" b="0">
-                <a:solidFill>
-                  <a:srgbClr val="23423C"/>
-                </a:solidFill>
-                <a:latin typeface="Arial"/>
-                <a:ea typeface="Arial"/>
-                <a:cs typeface="Arial"/>
-              </a:defRPr>
-            </a:pPr>
-            <a:r>
-              <a:rPr sz="2100" b="0">
-                <a:solidFill>
-                  <a:srgbClr val="23423C"/>
-                </a:solidFill>
-                <a:latin typeface="Arial"/>
-                <a:ea typeface="Arial"/>
-                <a:cs typeface="Arial"/>
-              </a:rPr>
-              <a:t>Argo CD reads the chart and tested image tag from Git.</a:t>
-            </a:r>
-          </a:p>
-        </p:txBody>
-      </p:sp>
-      <p:sp>
-        <p:nvSpPr>
-          <p:cNvPr id="6" name="">
-            <a:extLst xmlns:a="http://schemas.openxmlformats.org/drawingml/2006/main">
-              <a:ext uri="{FF2B5EF4-FFF2-40B4-BE49-F238E27FC236}">
-                <a16:creationId xmlns:a16="http://schemas.microsoft.com/office/drawing/2014/main" id="{C1E3AD3E-C08D-47B9-9012-A4D86B0E7B74}"/>
-              </a:ext>
-            </a:extLst>
-          </p:cNvPr>
-          <p:cNvSpPr>
-            <a:spLocks xmlns:a="http://schemas.openxmlformats.org/drawingml/2006/main" noGrp="1"/>
-          </p:cNvSpPr>
-          <p:nvPr/>
-        </p:nvSpPr>
-        <p:spPr>
-          <a:xfrm xmlns:a="http://schemas.openxmlformats.org/drawingml/2006/main">
-            <a:off x="685800" y="4981575"/>
-            <a:ext cx="10572750" cy="714375"/>
-          </a:xfrm>
-          <a:prstGeom xmlns:a="http://schemas.openxmlformats.org/drawingml/2006/main" prst="rect">
-            <a:avLst/>
-          </a:prstGeom>
-          <a:noFill xmlns:a="http://schemas.openxmlformats.org/drawingml/2006/main"/>
-          <a:ln xmlns:a="http://schemas.openxmlformats.org/drawingml/2006/main" w="0">
-            <a:noFill/>
-          </a:ln>
-        </p:spPr>
-        <p:txBody>
-          <a:bodyPr xmlns:a="http://schemas.openxmlformats.org/drawingml/2006/main"/>
-          <a:lstStyle xmlns:a="http://schemas.openxmlformats.org/drawingml/2006/main">
-            <a:defPPr>
-              <a:defRPr sz="2100" b="0">
-                <a:solidFill>
-                  <a:srgbClr val="23423C"/>
-                </a:solidFill>
-                <a:latin typeface="Arial"/>
-                <a:ea typeface="Arial"/>
-                <a:cs typeface="Arial"/>
-              </a:defRPr>
-            </a:defPPr>
-          </a:lstStyle>
-          <a:p xmlns:a="http://schemas.openxmlformats.org/drawingml/2006/main">
-            <a:pPr>
-              <a:defRPr sz="2100" b="0">
-                <a:solidFill>
-                  <a:srgbClr val="23423C"/>
-                </a:solidFill>
-                <a:latin typeface="Arial"/>
-                <a:ea typeface="Arial"/>
-                <a:cs typeface="Arial"/>
-              </a:defRPr>
-            </a:pPr>
-            <a:r>
-              <a:rPr sz="2100" b="0">
-                <a:solidFill>
-                  <a:srgbClr val="23423C"/>
-                </a:solidFill>
-                <a:latin typeface="Arial"/>
-                <a:ea typeface="Arial"/>
-                <a:cs typeface="Arial"/>
-              </a:rPr>
-              <a:t>Automatic sync and self-healing reconcile a Git change or manual drift.</a:t>
+              <a:t>Bound database PVC</a:t>
             </a:r>
           </a:p>
         </p:txBody>
@@ -7434,7 +9402,7 @@
     </p:spTree>
     <p:extLst>
       <p:ext uri="{BB962C8B-B14F-4D97-AF65-F5344CB8AC3E}">
-        <p14:creationId xmlns:p14="http://schemas.microsoft.com/office/powerpoint/2010/main" val="310226108"/>
+        <p14:creationId xmlns:p14="http://schemas.microsoft.com/office/powerpoint/2010/main" val="1840869670"/>
       </p:ext>
     </p:extLst>
   </p:cSld>
@@ -7447,7 +9415,7 @@
     <p:bg>
       <p:bgPr>
         <a:solidFill xmlns:a="http://schemas.openxmlformats.org/drawingml/2006/main">
-          <a:srgbClr val="F5F4EF"/>
+          <a:srgbClr val="F8F5EE"/>
         </a:solidFill>
       </p:bgPr>
     </p:bg>
@@ -7462,10 +9430,10 @@
       </p:grpSpPr>
       <p:sp>
         <p:nvSpPr>
-          <p:cNvPr id="7" name="">
+          <p:cNvPr id="4" name="">
             <a:extLst xmlns:a="http://schemas.openxmlformats.org/drawingml/2006/main">
               <a:ext uri="{FF2B5EF4-FFF2-40B4-BE49-F238E27FC236}">
-                <a16:creationId xmlns:a16="http://schemas.microsoft.com/office/drawing/2014/main" id="{1A9CFF3A-8A08-4E03-B051-ED5B849226DE}"/>
+                <a16:creationId xmlns:a16="http://schemas.microsoft.com/office/drawing/2014/main" id="{8B33F8C0-3E3E-4FCF-9C14-21D39BCC1617}"/>
               </a:ext>
             </a:extLst>
           </p:cNvPr>
@@ -7476,8 +9444,8 @@
         </p:nvSpPr>
         <p:spPr>
           <a:xfrm xmlns:a="http://schemas.openxmlformats.org/drawingml/2006/main">
-            <a:off x="609600" y="476250"/>
-            <a:ext cx="10858500" cy="714375"/>
+            <a:off x="609600" y="381000"/>
+            <a:ext cx="10972800" cy="723900"/>
           </a:xfrm>
           <a:prstGeom xmlns:a="http://schemas.openxmlformats.org/drawingml/2006/main" prst="rect">
             <a:avLst/>
@@ -7491,9 +9459,9 @@
           <a:bodyPr xmlns:a="http://schemas.openxmlformats.org/drawingml/2006/main"/>
           <a:lstStyle xmlns:a="http://schemas.openxmlformats.org/drawingml/2006/main">
             <a:defPPr>
-              <a:defRPr sz="3300" b="1">
-                <a:solidFill>
-                  <a:srgbClr val="23423C"/>
+              <a:defRPr sz="3600" b="1">
+                <a:solidFill>
+                  <a:srgbClr val="163D38"/>
                 </a:solidFill>
                 <a:latin typeface="Arial"/>
                 <a:ea typeface="Arial"/>
@@ -7503,9 +9471,9 @@
           </a:lstStyle>
           <a:p xmlns:a="http://schemas.openxmlformats.org/drawingml/2006/main">
             <a:pPr>
-              <a:defRPr sz="3300" b="1">
-                <a:solidFill>
-                  <a:srgbClr val="23423C"/>
+              <a:defRPr sz="3600" b="1">
+                <a:solidFill>
+                  <a:srgbClr val="163D38"/>
                 </a:solidFill>
                 <a:latin typeface="Arial"/>
                 <a:ea typeface="Arial"/>
@@ -7513,37 +9481,65 @@
               </a:defRPr>
             </a:pPr>
             <a:r>
-              <a:rPr sz="3300" b="1">
-                <a:solidFill>
-                  <a:srgbClr val="23423C"/>
+              <a:rPr sz="3600" b="1">
+                <a:solidFill>
+                  <a:srgbClr val="163D38"/>
                 </a:solidFill>
                 <a:latin typeface="Arial"/>
                 <a:ea typeface="Arial"/>
                 <a:cs typeface="Arial"/>
               </a:rPr>
-              <a:t>Observability</a:t>
-            </a:r>
-          </a:p>
-        </p:txBody>
-      </p:sp>
-      <p:sp>
-        <p:nvSpPr>
+              <a:t>GitOps with Argo CD</a:t>
+            </a:r>
+          </a:p>
+        </p:txBody>
+      </p:sp>
+      <p:pic>
+        <p:nvPicPr>
           <p:cNvPr id="2" name="">
             <a:extLst xmlns:a="http://schemas.openxmlformats.org/drawingml/2006/main">
               <a:ext uri="{FF2B5EF4-FFF2-40B4-BE49-F238E27FC236}">
-                <a16:creationId xmlns:a16="http://schemas.microsoft.com/office/drawing/2014/main" id="{A04957C0-F71D-4C71-A5F0-FC849E8B636C}"/>
+                <a16:creationId xmlns:a16="http://schemas.microsoft.com/office/drawing/2014/main" id="{030FC8D9-4089-4671-8DF0-D2AC47EA48ED}"/>
               </a:ext>
             </a:extLst>
           </p:cNvPr>
-          <p:cNvSpPr>
-            <a:spLocks xmlns:a="http://schemas.openxmlformats.org/drawingml/2006/main" noGrp="1"/>
-          </p:cNvSpPr>
+          <p:cNvPicPr>
+            <a:picLocks xmlns:a="http://schemas.openxmlformats.org/drawingml/2006/main" noChangeAspect="1"/>
+          </p:cNvPicPr>
           <p:nvPr/>
-        </p:nvSpPr>
+        </p:nvPicPr>
+        <p:blipFill>
+          <a:blip xmlns:r="http://schemas.openxmlformats.org/officeDocument/2006/relationships" xmlns:a="http://schemas.openxmlformats.org/drawingml/2006/main" r:embed="Rd1e10994271e40b9"/>
+          <a:stretch xmlns:a="http://schemas.openxmlformats.org/drawingml/2006/main"/>
+        </p:blipFill>
         <p:spPr>
           <a:xfrm xmlns:a="http://schemas.openxmlformats.org/drawingml/2006/main">
-            <a:off x="685800" y="1476375"/>
-            <a:ext cx="10572750" cy="714375"/>
+            <a:off x="1947333" y="1285875"/>
+            <a:ext cx="8297333" cy="4667250"/>
+          </a:xfrm>
+          <a:prstGeom xmlns:a="http://schemas.openxmlformats.org/drawingml/2006/main" prst="rect">
+            <a:avLst/>
+          </a:prstGeom>
+        </p:spPr>
+      </p:pic>
+      <p:sp>
+        <p:nvSpPr>
+          <p:cNvPr id="3" name="">
+            <a:extLst xmlns:a="http://schemas.openxmlformats.org/drawingml/2006/main">
+              <a:ext uri="{FF2B5EF4-FFF2-40B4-BE49-F238E27FC236}">
+                <a16:creationId xmlns:a16="http://schemas.microsoft.com/office/drawing/2014/main" id="{78FF2809-32C8-4D3B-AD92-6E696E6612FF}"/>
+              </a:ext>
+            </a:extLst>
+          </p:cNvPr>
+          <p:cNvSpPr>
+            <a:spLocks xmlns:a="http://schemas.openxmlformats.org/drawingml/2006/main" noGrp="1"/>
+          </p:cNvSpPr>
+          <p:nvPr/>
+        </p:nvSpPr>
+        <p:spPr>
+          <a:xfrm xmlns:a="http://schemas.openxmlformats.org/drawingml/2006/main">
+            <a:off x="628650" y="6210300"/>
+            <a:ext cx="10858500" cy="400050"/>
           </a:xfrm>
           <a:prstGeom xmlns:a="http://schemas.openxmlformats.org/drawingml/2006/main" prst="rect">
             <a:avLst/>
@@ -7557,9 +9553,9 @@
           <a:bodyPr xmlns:a="http://schemas.openxmlformats.org/drawingml/2006/main"/>
           <a:lstStyle xmlns:a="http://schemas.openxmlformats.org/drawingml/2006/main">
             <a:defPPr>
-              <a:defRPr sz="2100" b="0">
-                <a:solidFill>
-                  <a:srgbClr val="23423C"/>
+              <a:defRPr sz="2175" b="1">
+                <a:solidFill>
+                  <a:srgbClr val="163D38"/>
                 </a:solidFill>
                 <a:latin typeface="Arial"/>
                 <a:ea typeface="Arial"/>
@@ -7569,9 +9565,9 @@
           </a:lstStyle>
           <a:p xmlns:a="http://schemas.openxmlformats.org/drawingml/2006/main">
             <a:pPr>
-              <a:defRPr sz="2100" b="0">
-                <a:solidFill>
-                  <a:srgbClr val="23423C"/>
+              <a:defRPr sz="2175" b="1">
+                <a:solidFill>
+                  <a:srgbClr val="163D38"/>
                 </a:solidFill>
                 <a:latin typeface="Arial"/>
                 <a:ea typeface="Arial"/>
@@ -7579,279 +9575,15 @@
               </a:defRPr>
             </a:pPr>
             <a:r>
-              <a:rPr sz="2100" b="0">
-                <a:solidFill>
-                  <a:srgbClr val="23423C"/>
+              <a:rPr sz="2175" b="1">
+                <a:solidFill>
+                  <a:srgbClr val="163D38"/>
                 </a:solidFill>
                 <a:latin typeface="Arial"/>
                 <a:ea typeface="Arial"/>
                 <a:cs typeface="Arial"/>
               </a:rPr>
-              <a:t>FastAPI exposes request counters and latency histograms at /metrics.</a:t>
-            </a:r>
-          </a:p>
-        </p:txBody>
-      </p:sp>
-      <p:sp>
-        <p:nvSpPr>
-          <p:cNvPr id="3" name="">
-            <a:extLst xmlns:a="http://schemas.openxmlformats.org/drawingml/2006/main">
-              <a:ext uri="{FF2B5EF4-FFF2-40B4-BE49-F238E27FC236}">
-                <a16:creationId xmlns:a16="http://schemas.microsoft.com/office/drawing/2014/main" id="{ADE70AA2-D465-4D01-BB3A-0B1547FB1F41}"/>
-              </a:ext>
-            </a:extLst>
-          </p:cNvPr>
-          <p:cNvSpPr>
-            <a:spLocks xmlns:a="http://schemas.openxmlformats.org/drawingml/2006/main" noGrp="1"/>
-          </p:cNvSpPr>
-          <p:nvPr/>
-        </p:nvSpPr>
-        <p:spPr>
-          <a:xfrm xmlns:a="http://schemas.openxmlformats.org/drawingml/2006/main">
-            <a:off x="685800" y="2352675"/>
-            <a:ext cx="10572750" cy="714375"/>
-          </a:xfrm>
-          <a:prstGeom xmlns:a="http://schemas.openxmlformats.org/drawingml/2006/main" prst="rect">
-            <a:avLst/>
-          </a:prstGeom>
-          <a:noFill xmlns:a="http://schemas.openxmlformats.org/drawingml/2006/main"/>
-          <a:ln xmlns:a="http://schemas.openxmlformats.org/drawingml/2006/main" w="0">
-            <a:noFill/>
-          </a:ln>
-        </p:spPr>
-        <p:txBody>
-          <a:bodyPr xmlns:a="http://schemas.openxmlformats.org/drawingml/2006/main"/>
-          <a:lstStyle xmlns:a="http://schemas.openxmlformats.org/drawingml/2006/main">
-            <a:defPPr>
-              <a:defRPr sz="2100" b="0">
-                <a:solidFill>
-                  <a:srgbClr val="23423C"/>
-                </a:solidFill>
-                <a:latin typeface="Arial"/>
-                <a:ea typeface="Arial"/>
-                <a:cs typeface="Arial"/>
-              </a:defRPr>
-            </a:defPPr>
-          </a:lstStyle>
-          <a:p xmlns:a="http://schemas.openxmlformats.org/drawingml/2006/main">
-            <a:pPr>
-              <a:defRPr sz="2100" b="0">
-                <a:solidFill>
-                  <a:srgbClr val="23423C"/>
-                </a:solidFill>
-                <a:latin typeface="Arial"/>
-                <a:ea typeface="Arial"/>
-                <a:cs typeface="Arial"/>
-              </a:defRPr>
-            </a:pPr>
-            <a:r>
-              <a:rPr sz="2100" b="0">
-                <a:solidFill>
-                  <a:srgbClr val="23423C"/>
-                </a:solidFill>
-                <a:latin typeface="Arial"/>
-                <a:ea typeface="Arial"/>
-                <a:cs typeface="Arial"/>
-              </a:rPr>
-              <a:t>A ServiceMonitor tells Prometheus which backend Pods to scrape.</a:t>
-            </a:r>
-          </a:p>
-        </p:txBody>
-      </p:sp>
-      <p:sp>
-        <p:nvSpPr>
-          <p:cNvPr id="4" name="">
-            <a:extLst xmlns:a="http://schemas.openxmlformats.org/drawingml/2006/main">
-              <a:ext uri="{FF2B5EF4-FFF2-40B4-BE49-F238E27FC236}">
-                <a16:creationId xmlns:a16="http://schemas.microsoft.com/office/drawing/2014/main" id="{665C5966-901A-4F81-90B9-9D7DC52D2A9C}"/>
-              </a:ext>
-            </a:extLst>
-          </p:cNvPr>
-          <p:cNvSpPr>
-            <a:spLocks xmlns:a="http://schemas.openxmlformats.org/drawingml/2006/main" noGrp="1"/>
-          </p:cNvSpPr>
-          <p:nvPr/>
-        </p:nvSpPr>
-        <p:spPr>
-          <a:xfrm xmlns:a="http://schemas.openxmlformats.org/drawingml/2006/main">
-            <a:off x="685800" y="3228975"/>
-            <a:ext cx="10572750" cy="714375"/>
-          </a:xfrm>
-          <a:prstGeom xmlns:a="http://schemas.openxmlformats.org/drawingml/2006/main" prst="rect">
-            <a:avLst/>
-          </a:prstGeom>
-          <a:noFill xmlns:a="http://schemas.openxmlformats.org/drawingml/2006/main"/>
-          <a:ln xmlns:a="http://schemas.openxmlformats.org/drawingml/2006/main" w="0">
-            <a:noFill/>
-          </a:ln>
-        </p:spPr>
-        <p:txBody>
-          <a:bodyPr xmlns:a="http://schemas.openxmlformats.org/drawingml/2006/main"/>
-          <a:lstStyle xmlns:a="http://schemas.openxmlformats.org/drawingml/2006/main">
-            <a:defPPr>
-              <a:defRPr sz="2100" b="0">
-                <a:solidFill>
-                  <a:srgbClr val="23423C"/>
-                </a:solidFill>
-                <a:latin typeface="Arial"/>
-                <a:ea typeface="Arial"/>
-                <a:cs typeface="Arial"/>
-              </a:defRPr>
-            </a:defPPr>
-          </a:lstStyle>
-          <a:p xmlns:a="http://schemas.openxmlformats.org/drawingml/2006/main">
-            <a:pPr>
-              <a:defRPr sz="2100" b="0">
-                <a:solidFill>
-                  <a:srgbClr val="23423C"/>
-                </a:solidFill>
-                <a:latin typeface="Arial"/>
-                <a:ea typeface="Arial"/>
-                <a:cs typeface="Arial"/>
-              </a:defRPr>
-            </a:pPr>
-            <a:r>
-              <a:rPr sz="2100" b="0">
-                <a:solidFill>
-                  <a:srgbClr val="23423C"/>
-                </a:solidFill>
-                <a:latin typeface="Arial"/>
-                <a:ea typeface="Arial"/>
-                <a:cs typeface="Arial"/>
-              </a:rPr>
-              <a:t>The Targets page must show the application as UP.</a:t>
-            </a:r>
-          </a:p>
-        </p:txBody>
-      </p:sp>
-      <p:sp>
-        <p:nvSpPr>
-          <p:cNvPr id="5" name="">
-            <a:extLst xmlns:a="http://schemas.openxmlformats.org/drawingml/2006/main">
-              <a:ext uri="{FF2B5EF4-FFF2-40B4-BE49-F238E27FC236}">
-                <a16:creationId xmlns:a16="http://schemas.microsoft.com/office/drawing/2014/main" id="{F3FFA122-ED63-46B7-904B-0316BBECE534}"/>
-              </a:ext>
-            </a:extLst>
-          </p:cNvPr>
-          <p:cNvSpPr>
-            <a:spLocks xmlns:a="http://schemas.openxmlformats.org/drawingml/2006/main" noGrp="1"/>
-          </p:cNvSpPr>
-          <p:nvPr/>
-        </p:nvSpPr>
-        <p:spPr>
-          <a:xfrm xmlns:a="http://schemas.openxmlformats.org/drawingml/2006/main">
-            <a:off x="685800" y="4105275"/>
-            <a:ext cx="10572750" cy="714375"/>
-          </a:xfrm>
-          <a:prstGeom xmlns:a="http://schemas.openxmlformats.org/drawingml/2006/main" prst="rect">
-            <a:avLst/>
-          </a:prstGeom>
-          <a:noFill xmlns:a="http://schemas.openxmlformats.org/drawingml/2006/main"/>
-          <a:ln xmlns:a="http://schemas.openxmlformats.org/drawingml/2006/main" w="0">
-            <a:noFill/>
-          </a:ln>
-        </p:spPr>
-        <p:txBody>
-          <a:bodyPr xmlns:a="http://schemas.openxmlformats.org/drawingml/2006/main"/>
-          <a:lstStyle xmlns:a="http://schemas.openxmlformats.org/drawingml/2006/main">
-            <a:defPPr>
-              <a:defRPr sz="2100" b="0">
-                <a:solidFill>
-                  <a:srgbClr val="23423C"/>
-                </a:solidFill>
-                <a:latin typeface="Arial"/>
-                <a:ea typeface="Arial"/>
-                <a:cs typeface="Arial"/>
-              </a:defRPr>
-            </a:defPPr>
-          </a:lstStyle>
-          <a:p xmlns:a="http://schemas.openxmlformats.org/drawingml/2006/main">
-            <a:pPr>
-              <a:defRPr sz="2100" b="0">
-                <a:solidFill>
-                  <a:srgbClr val="23423C"/>
-                </a:solidFill>
-                <a:latin typeface="Arial"/>
-                <a:ea typeface="Arial"/>
-                <a:cs typeface="Arial"/>
-              </a:defRPr>
-            </a:pPr>
-            <a:r>
-              <a:rPr sz="2100" b="0">
-                <a:solidFill>
-                  <a:srgbClr val="23423C"/>
-                </a:solidFill>
-                <a:latin typeface="Arial"/>
-                <a:ea typeface="Arial"/>
-                <a:cs typeface="Arial"/>
-              </a:rPr>
-              <a:t>Grafana shows requests, request rate, p95 latency, errors and CPU.</a:t>
-            </a:r>
-          </a:p>
-        </p:txBody>
-      </p:sp>
-      <p:sp>
-        <p:nvSpPr>
-          <p:cNvPr id="6" name="">
-            <a:extLst xmlns:a="http://schemas.openxmlformats.org/drawingml/2006/main">
-              <a:ext uri="{FF2B5EF4-FFF2-40B4-BE49-F238E27FC236}">
-                <a16:creationId xmlns:a16="http://schemas.microsoft.com/office/drawing/2014/main" id="{25226B54-BE2E-4D55-97C8-C284CEEE17D9}"/>
-              </a:ext>
-            </a:extLst>
-          </p:cNvPr>
-          <p:cNvSpPr>
-            <a:spLocks xmlns:a="http://schemas.openxmlformats.org/drawingml/2006/main" noGrp="1"/>
-          </p:cNvSpPr>
-          <p:nvPr/>
-        </p:nvSpPr>
-        <p:spPr>
-          <a:xfrm xmlns:a="http://schemas.openxmlformats.org/drawingml/2006/main">
-            <a:off x="685800" y="4981575"/>
-            <a:ext cx="10572750" cy="714375"/>
-          </a:xfrm>
-          <a:prstGeom xmlns:a="http://schemas.openxmlformats.org/drawingml/2006/main" prst="rect">
-            <a:avLst/>
-          </a:prstGeom>
-          <a:noFill xmlns:a="http://schemas.openxmlformats.org/drawingml/2006/main"/>
-          <a:ln xmlns:a="http://schemas.openxmlformats.org/drawingml/2006/main" w="0">
-            <a:noFill/>
-          </a:ln>
-        </p:spPr>
-        <p:txBody>
-          <a:bodyPr xmlns:a="http://schemas.openxmlformats.org/drawingml/2006/main"/>
-          <a:lstStyle xmlns:a="http://schemas.openxmlformats.org/drawingml/2006/main">
-            <a:defPPr>
-              <a:defRPr sz="2100" b="0">
-                <a:solidFill>
-                  <a:srgbClr val="23423C"/>
-                </a:solidFill>
-                <a:latin typeface="Arial"/>
-                <a:ea typeface="Arial"/>
-                <a:cs typeface="Arial"/>
-              </a:defRPr>
-            </a:defPPr>
-          </a:lstStyle>
-          <a:p xmlns:a="http://schemas.openxmlformats.org/drawingml/2006/main">
-            <a:pPr>
-              <a:defRPr sz="2100" b="0">
-                <a:solidFill>
-                  <a:srgbClr val="23423C"/>
-                </a:solidFill>
-                <a:latin typeface="Arial"/>
-                <a:ea typeface="Arial"/>
-                <a:cs typeface="Arial"/>
-              </a:defRPr>
-            </a:pPr>
-            <a:r>
-              <a:rPr sz="2100" b="0">
-                <a:solidFill>
-                  <a:srgbClr val="23423C"/>
-                </a:solidFill>
-                <a:latin typeface="Arial"/>
-                <a:ea typeface="Arial"/>
-                <a:cs typeface="Arial"/>
-              </a:rPr>
-              <a:t>Metrics Server supplies CPU readings to the HPA separately.</a:t>
+              <a:t>Git change   Configuration rollout   Synced / Healthy</a:t>
             </a:r>
           </a:p>
         </p:txBody>
@@ -7859,7 +9591,7 @@
     </p:spTree>
     <p:extLst>
       <p:ext uri="{BB962C8B-B14F-4D97-AF65-F5344CB8AC3E}">
-        <p14:creationId xmlns:p14="http://schemas.microsoft.com/office/powerpoint/2010/main" val="377107104"/>
+        <p14:creationId xmlns:p14="http://schemas.microsoft.com/office/powerpoint/2010/main" val="1686127652"/>
       </p:ext>
     </p:extLst>
   </p:cSld>
